--- a/design/templates/nile-night-teal/template.pptx
+++ b/design/templates/nile-night-teal/template.pptx
@@ -126,7 +126,7 @@
           <p:cNvPr id="9" name="creative_background">
             <a:extLst>
               <a:ext uri="{FF2B5EF4-FFF2-40B4-BE49-F238E27FC236}">
-                <a16:creationId xmlns:a16="http://schemas.microsoft.com/office/drawing/2014/main" id="{6EF54721-B971-7F15-DCF6-88E276CE6DEB}"/>
+                <a16:creationId xmlns:a16="http://schemas.microsoft.com/office/drawing/2014/main" id="{B53AF03F-2A24-25DB-4159-A63990FB7D8E}"/>
               </a:ext>
             </a:extLst>
           </p:cNvPr>
@@ -290,7 +290,7 @@
             </a:lvl1pPr>
           </a:lstStyle>
           <a:p>
-            <a:fld id="{52C30056-F7E3-48DE-B485-350B3C114D69}" type="datetimeFigureOut">
+            <a:fld id="{22B1A858-2238-4D50-A136-D8298B9D7581}" type="datetimeFigureOut">
               <a:rPr lang="en-US" smtClean="0"/>
               <a:t>10/3/2026</a:t>
             </a:fld>
@@ -332,7 +332,7 @@
           <a:bodyPr/>
           <a:lstStyle/>
           <a:p>
-            <a:fld id="{8B33DAD4-768E-42FF-9F37-25C31ACC81D1}" type="slidenum">
+            <a:fld id="{6B7AFC5B-9B31-47DE-8C26-4C4AD0A46382}" type="slidenum">
               <a:rPr lang="en-US" smtClean="0"/>
               <a:t>‹#›</a:t>
             </a:fld>
@@ -343,7 +343,7 @@
     </p:spTree>
     <p:extLst>
       <p:ext uri="{BB962C8B-B14F-4D97-AF65-F5344CB8AC3E}">
-        <p14:creationId xmlns:p14="http://schemas.microsoft.com/office/powerpoint/2010/main" val="2227527609"/>
+        <p14:creationId xmlns:p14="http://schemas.microsoft.com/office/powerpoint/2010/main" val="1133264696"/>
       </p:ext>
     </p:extLst>
   </p:cSld>
@@ -375,7 +375,7 @@
           <p:cNvPr id="7" name="creative_background">
             <a:extLst>
               <a:ext uri="{FF2B5EF4-FFF2-40B4-BE49-F238E27FC236}">
-                <a16:creationId xmlns:a16="http://schemas.microsoft.com/office/drawing/2014/main" id="{3764A0EC-9615-AFFC-7517-8C810F1B57DC}"/>
+                <a16:creationId xmlns:a16="http://schemas.microsoft.com/office/drawing/2014/main" id="{E4C15C58-4B25-2E99-5FA9-E251E15AD301}"/>
               </a:ext>
             </a:extLst>
           </p:cNvPr>
@@ -448,7 +448,7 @@
           <a:bodyPr/>
           <a:lstStyle/>
           <a:p>
-            <a:fld id="{52C30056-F7E3-48DE-B485-350B3C114D69}" type="datetimeFigureOut">
+            <a:fld id="{22B1A858-2238-4D50-A136-D8298B9D7581}" type="datetimeFigureOut">
               <a:rPr lang="en-US" smtClean="0"/>
               <a:t>10/3/2026</a:t>
             </a:fld>
@@ -490,7 +490,7 @@
           <a:bodyPr/>
           <a:lstStyle/>
           <a:p>
-            <a:fld id="{8B33DAD4-768E-42FF-9F37-25C31ACC81D1}" type="slidenum">
+            <a:fld id="{6B7AFC5B-9B31-47DE-8C26-4C4AD0A46382}" type="slidenum">
               <a:rPr lang="en-US" smtClean="0"/>
               <a:t>‹#›</a:t>
             </a:fld>
@@ -503,7 +503,7 @@
           <p:cNvPr id="8" name="body">
             <a:extLst>
               <a:ext uri="{FF2B5EF4-FFF2-40B4-BE49-F238E27FC236}">
-                <a16:creationId xmlns:a16="http://schemas.microsoft.com/office/drawing/2014/main" id="{80966E2C-3C8A-D6E4-89D4-88A188B0B290}"/>
+                <a16:creationId xmlns:a16="http://schemas.microsoft.com/office/drawing/2014/main" id="{97EBE968-B88F-F24B-D741-E077D1081EE7}"/>
               </a:ext>
             </a:extLst>
           </p:cNvPr>
@@ -543,7 +543,7 @@
           <p:cNvPr id="9" name="source">
             <a:extLst>
               <a:ext uri="{FF2B5EF4-FFF2-40B4-BE49-F238E27FC236}">
-                <a16:creationId xmlns:a16="http://schemas.microsoft.com/office/drawing/2014/main" id="{F6B31D56-EE61-C94E-D05E-E9DD916D96FA}"/>
+                <a16:creationId xmlns:a16="http://schemas.microsoft.com/office/drawing/2014/main" id="{A034B728-CB34-B697-BA6D-3F96376014D4}"/>
               </a:ext>
             </a:extLst>
           </p:cNvPr>
@@ -598,7 +598,7 @@
     </p:spTree>
     <p:extLst>
       <p:ext uri="{BB962C8B-B14F-4D97-AF65-F5344CB8AC3E}">
-        <p14:creationId xmlns:p14="http://schemas.microsoft.com/office/powerpoint/2010/main" val="2417060210"/>
+        <p14:creationId xmlns:p14="http://schemas.microsoft.com/office/powerpoint/2010/main" val="443170250"/>
       </p:ext>
     </p:extLst>
   </p:cSld>
@@ -630,7 +630,7 @@
           <p:cNvPr id="7" name="creative_background">
             <a:extLst>
               <a:ext uri="{FF2B5EF4-FFF2-40B4-BE49-F238E27FC236}">
-                <a16:creationId xmlns:a16="http://schemas.microsoft.com/office/drawing/2014/main" id="{FE065525-EF2D-38E0-9409-B6AF8216BD3E}"/>
+                <a16:creationId xmlns:a16="http://schemas.microsoft.com/office/drawing/2014/main" id="{BD3E1CE5-6565-8733-6DFC-4AC892464320}"/>
               </a:ext>
             </a:extLst>
           </p:cNvPr>
@@ -703,7 +703,7 @@
           <a:bodyPr/>
           <a:lstStyle/>
           <a:p>
-            <a:fld id="{52C30056-F7E3-48DE-B485-350B3C114D69}" type="datetimeFigureOut">
+            <a:fld id="{22B1A858-2238-4D50-A136-D8298B9D7581}" type="datetimeFigureOut">
               <a:rPr lang="en-US" smtClean="0"/>
               <a:t>10/3/2026</a:t>
             </a:fld>
@@ -745,7 +745,7 @@
           <a:bodyPr/>
           <a:lstStyle/>
           <a:p>
-            <a:fld id="{8B33DAD4-768E-42FF-9F37-25C31ACC81D1}" type="slidenum">
+            <a:fld id="{6B7AFC5B-9B31-47DE-8C26-4C4AD0A46382}" type="slidenum">
               <a:rPr lang="en-US" smtClean="0"/>
               <a:t>‹#›</a:t>
             </a:fld>
@@ -758,7 +758,7 @@
           <p:cNvPr id="8" name="body">
             <a:extLst>
               <a:ext uri="{FF2B5EF4-FFF2-40B4-BE49-F238E27FC236}">
-                <a16:creationId xmlns:a16="http://schemas.microsoft.com/office/drawing/2014/main" id="{AC64FAD7-2E53-C928-33C7-4A791F17651F}"/>
+                <a16:creationId xmlns:a16="http://schemas.microsoft.com/office/drawing/2014/main" id="{F04AEBDC-2C14-429B-39EE-E897ADC52C04}"/>
               </a:ext>
             </a:extLst>
           </p:cNvPr>
@@ -801,7 +801,7 @@
     </p:spTree>
     <p:extLst>
       <p:ext uri="{BB962C8B-B14F-4D97-AF65-F5344CB8AC3E}">
-        <p14:creationId xmlns:p14="http://schemas.microsoft.com/office/powerpoint/2010/main" val="1999194915"/>
+        <p14:creationId xmlns:p14="http://schemas.microsoft.com/office/powerpoint/2010/main" val="761092590"/>
       </p:ext>
     </p:extLst>
   </p:cSld>
@@ -886,7 +886,7 @@
           <p:cNvPr id="6" name="section_number">
             <a:extLst>
               <a:ext uri="{FF2B5EF4-FFF2-40B4-BE49-F238E27FC236}">
-                <a16:creationId xmlns:a16="http://schemas.microsoft.com/office/drawing/2014/main" id="{20382B78-AC67-51E8-C50F-C3A59F453248}"/>
+                <a16:creationId xmlns:a16="http://schemas.microsoft.com/office/drawing/2014/main" id="{A959FC7B-18C0-DBA0-9961-39244E770A70}"/>
               </a:ext>
             </a:extLst>
           </p:cNvPr>
@@ -939,7 +939,7 @@
           <p:cNvPr id="7" name="subtitle">
             <a:extLst>
               <a:ext uri="{FF2B5EF4-FFF2-40B4-BE49-F238E27FC236}">
-                <a16:creationId xmlns:a16="http://schemas.microsoft.com/office/drawing/2014/main" id="{D4F75077-08A7-8DE8-93C2-04A0BB0192F4}"/>
+                <a16:creationId xmlns:a16="http://schemas.microsoft.com/office/drawing/2014/main" id="{66E1BD05-3723-ABE7-D2D9-4585193832FF}"/>
               </a:ext>
             </a:extLst>
           </p:cNvPr>
@@ -989,7 +989,7 @@
     </p:spTree>
     <p:extLst>
       <p:ext uri="{BB962C8B-B14F-4D97-AF65-F5344CB8AC3E}">
-        <p14:creationId xmlns:p14="http://schemas.microsoft.com/office/powerpoint/2010/main" val="3691925625"/>
+        <p14:creationId xmlns:p14="http://schemas.microsoft.com/office/powerpoint/2010/main" val="481995957"/>
       </p:ext>
     </p:extLst>
   </p:cSld>
@@ -1021,7 +1021,7 @@
           <p:cNvPr id="7" name="creative_background">
             <a:extLst>
               <a:ext uri="{FF2B5EF4-FFF2-40B4-BE49-F238E27FC236}">
-                <a16:creationId xmlns:a16="http://schemas.microsoft.com/office/drawing/2014/main" id="{894F646B-238F-B9BB-25CB-9CF0360D075D}"/>
+                <a16:creationId xmlns:a16="http://schemas.microsoft.com/office/drawing/2014/main" id="{9BBA9B33-1926-5751-A19D-8C4A44D91C17}"/>
               </a:ext>
             </a:extLst>
           </p:cNvPr>
@@ -1094,7 +1094,7 @@
           <a:bodyPr/>
           <a:lstStyle/>
           <a:p>
-            <a:fld id="{52C30056-F7E3-48DE-B485-350B3C114D69}" type="datetimeFigureOut">
+            <a:fld id="{22B1A858-2238-4D50-A136-D8298B9D7581}" type="datetimeFigureOut">
               <a:rPr lang="en-US" smtClean="0"/>
               <a:t>10/3/2026</a:t>
             </a:fld>
@@ -1136,7 +1136,7 @@
           <a:bodyPr/>
           <a:lstStyle/>
           <a:p>
-            <a:fld id="{8B33DAD4-768E-42FF-9F37-25C31ACC81D1}" type="slidenum">
+            <a:fld id="{6B7AFC5B-9B31-47DE-8C26-4C4AD0A46382}" type="slidenum">
               <a:rPr lang="en-US" smtClean="0"/>
               <a:t>‹#›</a:t>
             </a:fld>
@@ -1149,7 +1149,7 @@
           <p:cNvPr id="8" name="item_1_title">
             <a:extLst>
               <a:ext uri="{FF2B5EF4-FFF2-40B4-BE49-F238E27FC236}">
-                <a16:creationId xmlns:a16="http://schemas.microsoft.com/office/drawing/2014/main" id="{BD1898A0-1497-13A2-3077-3DEDBC7B93DC}"/>
+                <a16:creationId xmlns:a16="http://schemas.microsoft.com/office/drawing/2014/main" id="{131077D6-EE38-DC50-0DA4-420D170B4BD9}"/>
               </a:ext>
             </a:extLst>
           </p:cNvPr>
@@ -1199,7 +1199,7 @@
           <p:cNvPr id="9" name="item_1">
             <a:extLst>
               <a:ext uri="{FF2B5EF4-FFF2-40B4-BE49-F238E27FC236}">
-                <a16:creationId xmlns:a16="http://schemas.microsoft.com/office/drawing/2014/main" id="{FF86FAA0-7AC0-EEDF-2D5C-052C2B6AF959}"/>
+                <a16:creationId xmlns:a16="http://schemas.microsoft.com/office/drawing/2014/main" id="{AC9070DE-1CF6-4D0C-B3F7-37E0996DCEF2}"/>
               </a:ext>
             </a:extLst>
           </p:cNvPr>
@@ -1247,7 +1247,7 @@
           <p:cNvPr id="10" name="item_2_title">
             <a:extLst>
               <a:ext uri="{FF2B5EF4-FFF2-40B4-BE49-F238E27FC236}">
-                <a16:creationId xmlns:a16="http://schemas.microsoft.com/office/drawing/2014/main" id="{288E6DD2-E266-EBCB-C876-430DBD9093AB}"/>
+                <a16:creationId xmlns:a16="http://schemas.microsoft.com/office/drawing/2014/main" id="{3171DD0E-50D8-0412-37BE-F887800EA3BA}"/>
               </a:ext>
             </a:extLst>
           </p:cNvPr>
@@ -1300,7 +1300,7 @@
           <p:cNvPr id="11" name="item_2">
             <a:extLst>
               <a:ext uri="{FF2B5EF4-FFF2-40B4-BE49-F238E27FC236}">
-                <a16:creationId xmlns:a16="http://schemas.microsoft.com/office/drawing/2014/main" id="{98935977-3CCC-F341-ADF6-E35A6C39A4FA}"/>
+                <a16:creationId xmlns:a16="http://schemas.microsoft.com/office/drawing/2014/main" id="{0E643AA3-5013-C53B-311A-AEB8EAB86FD6}"/>
               </a:ext>
             </a:extLst>
           </p:cNvPr>
@@ -1348,7 +1348,7 @@
           <p:cNvPr id="12" name="item_3_title">
             <a:extLst>
               <a:ext uri="{FF2B5EF4-FFF2-40B4-BE49-F238E27FC236}">
-                <a16:creationId xmlns:a16="http://schemas.microsoft.com/office/drawing/2014/main" id="{EE286139-C646-B30B-22E4-D05966BABFB3}"/>
+                <a16:creationId xmlns:a16="http://schemas.microsoft.com/office/drawing/2014/main" id="{CF1E9033-E5C0-A6F4-0F53-3200D4CCE3F9}"/>
               </a:ext>
             </a:extLst>
           </p:cNvPr>
@@ -1401,7 +1401,7 @@
           <p:cNvPr id="13" name="item_3">
             <a:extLst>
               <a:ext uri="{FF2B5EF4-FFF2-40B4-BE49-F238E27FC236}">
-                <a16:creationId xmlns:a16="http://schemas.microsoft.com/office/drawing/2014/main" id="{4851A42C-6916-91B9-3CFD-AE01C0F39021}"/>
+                <a16:creationId xmlns:a16="http://schemas.microsoft.com/office/drawing/2014/main" id="{B3FC64FF-69E1-FA35-DE17-567040519ECC}"/>
               </a:ext>
             </a:extLst>
           </p:cNvPr>
@@ -1449,7 +1449,7 @@
           <p:cNvPr id="14" name="item_4_title">
             <a:extLst>
               <a:ext uri="{FF2B5EF4-FFF2-40B4-BE49-F238E27FC236}">
-                <a16:creationId xmlns:a16="http://schemas.microsoft.com/office/drawing/2014/main" id="{BF77B4E1-8CB8-B67E-089B-7A05756ED2E5}"/>
+                <a16:creationId xmlns:a16="http://schemas.microsoft.com/office/drawing/2014/main" id="{FEE8007D-543D-F18A-006C-D4802255B6B3}"/>
               </a:ext>
             </a:extLst>
           </p:cNvPr>
@@ -1502,7 +1502,7 @@
           <p:cNvPr id="15" name="item_4">
             <a:extLst>
               <a:ext uri="{FF2B5EF4-FFF2-40B4-BE49-F238E27FC236}">
-                <a16:creationId xmlns:a16="http://schemas.microsoft.com/office/drawing/2014/main" id="{42F5BECB-8EE7-AD9B-8201-940AA117EC6B}"/>
+                <a16:creationId xmlns:a16="http://schemas.microsoft.com/office/drawing/2014/main" id="{BC6A4E5F-A0DD-0DB1-820E-7D665127D2E2}"/>
               </a:ext>
             </a:extLst>
           </p:cNvPr>
@@ -1550,7 +1550,7 @@
           <p:cNvPr id="16" name="source">
             <a:extLst>
               <a:ext uri="{FF2B5EF4-FFF2-40B4-BE49-F238E27FC236}">
-                <a16:creationId xmlns:a16="http://schemas.microsoft.com/office/drawing/2014/main" id="{AA197CEB-6690-B9D3-0420-39212B2B2985}"/>
+                <a16:creationId xmlns:a16="http://schemas.microsoft.com/office/drawing/2014/main" id="{31BBD24D-C025-1B72-0B42-5C1FAA21BA82}"/>
               </a:ext>
             </a:extLst>
           </p:cNvPr>
@@ -1605,7 +1605,7 @@
     </p:spTree>
     <p:extLst>
       <p:ext uri="{BB962C8B-B14F-4D97-AF65-F5344CB8AC3E}">
-        <p14:creationId xmlns:p14="http://schemas.microsoft.com/office/powerpoint/2010/main" val="2026554021"/>
+        <p14:creationId xmlns:p14="http://schemas.microsoft.com/office/powerpoint/2010/main" val="1638505544"/>
       </p:ext>
     </p:extLst>
   </p:cSld>
@@ -1637,7 +1637,7 @@
           <p:cNvPr id="7" name="creative_background">
             <a:extLst>
               <a:ext uri="{FF2B5EF4-FFF2-40B4-BE49-F238E27FC236}">
-                <a16:creationId xmlns:a16="http://schemas.microsoft.com/office/drawing/2014/main" id="{952F3A9A-0CDC-4F46-0D78-B9451C330551}"/>
+                <a16:creationId xmlns:a16="http://schemas.microsoft.com/office/drawing/2014/main" id="{D7F55EC6-F81B-2CE9-9A2F-AC65FC5777CC}"/>
               </a:ext>
             </a:extLst>
           </p:cNvPr>
@@ -1710,7 +1710,7 @@
           <a:bodyPr/>
           <a:lstStyle/>
           <a:p>
-            <a:fld id="{52C30056-F7E3-48DE-B485-350B3C114D69}" type="datetimeFigureOut">
+            <a:fld id="{22B1A858-2238-4D50-A136-D8298B9D7581}" type="datetimeFigureOut">
               <a:rPr lang="en-US" smtClean="0"/>
               <a:t>10/3/2026</a:t>
             </a:fld>
@@ -1752,7 +1752,7 @@
           <a:bodyPr/>
           <a:lstStyle/>
           <a:p>
-            <a:fld id="{8B33DAD4-768E-42FF-9F37-25C31ACC81D1}" type="slidenum">
+            <a:fld id="{6B7AFC5B-9B31-47DE-8C26-4C4AD0A46382}" type="slidenum">
               <a:rPr lang="en-US" smtClean="0"/>
               <a:t>‹#›</a:t>
             </a:fld>
@@ -1765,7 +1765,7 @@
           <p:cNvPr id="8" name="body">
             <a:extLst>
               <a:ext uri="{FF2B5EF4-FFF2-40B4-BE49-F238E27FC236}">
-                <a16:creationId xmlns:a16="http://schemas.microsoft.com/office/drawing/2014/main" id="{0131F25C-E253-69F7-B792-D732B089884F}"/>
+                <a16:creationId xmlns:a16="http://schemas.microsoft.com/office/drawing/2014/main" id="{344A3378-4831-023E-B5E8-BE09BD441819}"/>
               </a:ext>
             </a:extLst>
           </p:cNvPr>
@@ -1810,7 +1810,7 @@
           <p:cNvPr id="9" name="source">
             <a:extLst>
               <a:ext uri="{FF2B5EF4-FFF2-40B4-BE49-F238E27FC236}">
-                <a16:creationId xmlns:a16="http://schemas.microsoft.com/office/drawing/2014/main" id="{C434A189-5984-D179-62E7-A935A10502CE}"/>
+                <a16:creationId xmlns:a16="http://schemas.microsoft.com/office/drawing/2014/main" id="{34EBD3B9-4F4A-0C96-942B-60B47D2AAA1F}"/>
               </a:ext>
             </a:extLst>
           </p:cNvPr>
@@ -1865,7 +1865,7 @@
     </p:spTree>
     <p:extLst>
       <p:ext uri="{BB962C8B-B14F-4D97-AF65-F5344CB8AC3E}">
-        <p14:creationId xmlns:p14="http://schemas.microsoft.com/office/powerpoint/2010/main" val="1256097901"/>
+        <p14:creationId xmlns:p14="http://schemas.microsoft.com/office/powerpoint/2010/main" val="1690653024"/>
       </p:ext>
     </p:extLst>
   </p:cSld>
@@ -1897,7 +1897,7 @@
           <p:cNvPr id="7" name="creative_background">
             <a:extLst>
               <a:ext uri="{FF2B5EF4-FFF2-40B4-BE49-F238E27FC236}">
-                <a16:creationId xmlns:a16="http://schemas.microsoft.com/office/drawing/2014/main" id="{9C1B7B0C-DACA-57CE-FF4D-95A8E3406ADF}"/>
+                <a16:creationId xmlns:a16="http://schemas.microsoft.com/office/drawing/2014/main" id="{2EE56F8B-5DD2-EEDF-C3F4-C3DC5BA52481}"/>
               </a:ext>
             </a:extLst>
           </p:cNvPr>
@@ -1970,7 +1970,7 @@
           <a:bodyPr/>
           <a:lstStyle/>
           <a:p>
-            <a:fld id="{52C30056-F7E3-48DE-B485-350B3C114D69}" type="datetimeFigureOut">
+            <a:fld id="{22B1A858-2238-4D50-A136-D8298B9D7581}" type="datetimeFigureOut">
               <a:rPr lang="en-US" smtClean="0"/>
               <a:t>10/3/2026</a:t>
             </a:fld>
@@ -2012,7 +2012,7 @@
           <a:bodyPr/>
           <a:lstStyle/>
           <a:p>
-            <a:fld id="{8B33DAD4-768E-42FF-9F37-25C31ACC81D1}" type="slidenum">
+            <a:fld id="{6B7AFC5B-9B31-47DE-8C26-4C4AD0A46382}" type="slidenum">
               <a:rPr lang="en-US" smtClean="0"/>
               <a:t>‹#›</a:t>
             </a:fld>
@@ -2025,7 +2025,7 @@
           <p:cNvPr id="8" name="item_1_title">
             <a:extLst>
               <a:ext uri="{FF2B5EF4-FFF2-40B4-BE49-F238E27FC236}">
-                <a16:creationId xmlns:a16="http://schemas.microsoft.com/office/drawing/2014/main" id="{05698789-FAB2-991C-41D7-AB24A885182A}"/>
+                <a16:creationId xmlns:a16="http://schemas.microsoft.com/office/drawing/2014/main" id="{AF7DABD0-9A1C-3EE0-5498-0CEE612799FD}"/>
               </a:ext>
             </a:extLst>
           </p:cNvPr>
@@ -2075,7 +2075,7 @@
           <p:cNvPr id="9" name="item_1">
             <a:extLst>
               <a:ext uri="{FF2B5EF4-FFF2-40B4-BE49-F238E27FC236}">
-                <a16:creationId xmlns:a16="http://schemas.microsoft.com/office/drawing/2014/main" id="{E6BC86DA-EE01-7F8A-7011-507A9A75E51C}"/>
+                <a16:creationId xmlns:a16="http://schemas.microsoft.com/office/drawing/2014/main" id="{D360901D-A403-8356-B6BA-F88A8BABB83A}"/>
               </a:ext>
             </a:extLst>
           </p:cNvPr>
@@ -2123,7 +2123,7 @@
           <p:cNvPr id="10" name="item_2_title">
             <a:extLst>
               <a:ext uri="{FF2B5EF4-FFF2-40B4-BE49-F238E27FC236}">
-                <a16:creationId xmlns:a16="http://schemas.microsoft.com/office/drawing/2014/main" id="{EF59CE1A-BA2A-5F70-4A1E-8CCB77676129}"/>
+                <a16:creationId xmlns:a16="http://schemas.microsoft.com/office/drawing/2014/main" id="{C27CD614-48C9-4C1D-54F1-6265A38D5F53}"/>
               </a:ext>
             </a:extLst>
           </p:cNvPr>
@@ -2176,7 +2176,7 @@
           <p:cNvPr id="11" name="item_2">
             <a:extLst>
               <a:ext uri="{FF2B5EF4-FFF2-40B4-BE49-F238E27FC236}">
-                <a16:creationId xmlns:a16="http://schemas.microsoft.com/office/drawing/2014/main" id="{C7F64C64-6FF0-F0E4-72F2-23793F93A007}"/>
+                <a16:creationId xmlns:a16="http://schemas.microsoft.com/office/drawing/2014/main" id="{EF759483-CA72-C8FE-9810-DB94E3C9090A}"/>
               </a:ext>
             </a:extLst>
           </p:cNvPr>
@@ -2224,7 +2224,7 @@
           <p:cNvPr id="12" name="item_3_title">
             <a:extLst>
               <a:ext uri="{FF2B5EF4-FFF2-40B4-BE49-F238E27FC236}">
-                <a16:creationId xmlns:a16="http://schemas.microsoft.com/office/drawing/2014/main" id="{D84810D1-81FD-2B31-E909-365CE724375E}"/>
+                <a16:creationId xmlns:a16="http://schemas.microsoft.com/office/drawing/2014/main" id="{5245A036-D439-2DA9-CA46-1DC40B4ED749}"/>
               </a:ext>
             </a:extLst>
           </p:cNvPr>
@@ -2277,7 +2277,7 @@
           <p:cNvPr id="13" name="item_3">
             <a:extLst>
               <a:ext uri="{FF2B5EF4-FFF2-40B4-BE49-F238E27FC236}">
-                <a16:creationId xmlns:a16="http://schemas.microsoft.com/office/drawing/2014/main" id="{63A3CD98-B38E-8C39-0E62-AD73729FB3A7}"/>
+                <a16:creationId xmlns:a16="http://schemas.microsoft.com/office/drawing/2014/main" id="{2FDC5D4B-D492-D944-5F77-D71D4131AD90}"/>
               </a:ext>
             </a:extLst>
           </p:cNvPr>
@@ -2325,7 +2325,7 @@
           <p:cNvPr id="14" name="item_4_title">
             <a:extLst>
               <a:ext uri="{FF2B5EF4-FFF2-40B4-BE49-F238E27FC236}">
-                <a16:creationId xmlns:a16="http://schemas.microsoft.com/office/drawing/2014/main" id="{5395240D-4A8B-BA01-137D-C4753372205E}"/>
+                <a16:creationId xmlns:a16="http://schemas.microsoft.com/office/drawing/2014/main" id="{655CB419-F6DD-BDA9-AD35-B1F675C13706}"/>
               </a:ext>
             </a:extLst>
           </p:cNvPr>
@@ -2378,7 +2378,7 @@
           <p:cNvPr id="15" name="item_4">
             <a:extLst>
               <a:ext uri="{FF2B5EF4-FFF2-40B4-BE49-F238E27FC236}">
-                <a16:creationId xmlns:a16="http://schemas.microsoft.com/office/drawing/2014/main" id="{9EB89417-B548-FC58-2E88-687B7D509B0C}"/>
+                <a16:creationId xmlns:a16="http://schemas.microsoft.com/office/drawing/2014/main" id="{0B64F68E-2DE7-775A-9360-C1E8DD7EB379}"/>
               </a:ext>
             </a:extLst>
           </p:cNvPr>
@@ -2426,7 +2426,7 @@
           <p:cNvPr id="16" name="source">
             <a:extLst>
               <a:ext uri="{FF2B5EF4-FFF2-40B4-BE49-F238E27FC236}">
-                <a16:creationId xmlns:a16="http://schemas.microsoft.com/office/drawing/2014/main" id="{EF7DFD68-8793-3620-0F68-290EE239C773}"/>
+                <a16:creationId xmlns:a16="http://schemas.microsoft.com/office/drawing/2014/main" id="{8636D59B-3AD5-DC99-0556-916F6518C7B5}"/>
               </a:ext>
             </a:extLst>
           </p:cNvPr>
@@ -2481,7 +2481,7 @@
     </p:spTree>
     <p:extLst>
       <p:ext uri="{BB962C8B-B14F-4D97-AF65-F5344CB8AC3E}">
-        <p14:creationId xmlns:p14="http://schemas.microsoft.com/office/powerpoint/2010/main" val="637766787"/>
+        <p14:creationId xmlns:p14="http://schemas.microsoft.com/office/powerpoint/2010/main" val="2643442347"/>
       </p:ext>
     </p:extLst>
   </p:cSld>
@@ -2513,7 +2513,7 @@
           <p:cNvPr id="7" name="creative_background">
             <a:extLst>
               <a:ext uri="{FF2B5EF4-FFF2-40B4-BE49-F238E27FC236}">
-                <a16:creationId xmlns:a16="http://schemas.microsoft.com/office/drawing/2014/main" id="{F334FD8B-23B3-5BD9-D94E-ECC6F34723F3}"/>
+                <a16:creationId xmlns:a16="http://schemas.microsoft.com/office/drawing/2014/main" id="{D6360C29-B8D9-7F56-CD8D-3EF5EBA4644E}"/>
               </a:ext>
             </a:extLst>
           </p:cNvPr>
@@ -2586,7 +2586,7 @@
           <a:bodyPr/>
           <a:lstStyle/>
           <a:p>
-            <a:fld id="{52C30056-F7E3-48DE-B485-350B3C114D69}" type="datetimeFigureOut">
+            <a:fld id="{22B1A858-2238-4D50-A136-D8298B9D7581}" type="datetimeFigureOut">
               <a:rPr lang="en-US" smtClean="0"/>
               <a:t>10/3/2026</a:t>
             </a:fld>
@@ -2628,7 +2628,7 @@
           <a:bodyPr/>
           <a:lstStyle/>
           <a:p>
-            <a:fld id="{8B33DAD4-768E-42FF-9F37-25C31ACC81D1}" type="slidenum">
+            <a:fld id="{6B7AFC5B-9B31-47DE-8C26-4C4AD0A46382}" type="slidenum">
               <a:rPr lang="en-US" smtClean="0"/>
               <a:t>‹#›</a:t>
             </a:fld>
@@ -2641,7 +2641,7 @@
           <p:cNvPr id="8" name="body">
             <a:extLst>
               <a:ext uri="{FF2B5EF4-FFF2-40B4-BE49-F238E27FC236}">
-                <a16:creationId xmlns:a16="http://schemas.microsoft.com/office/drawing/2014/main" id="{626E6DD6-BA1A-9C32-D493-35D8BCCCDC3B}"/>
+                <a16:creationId xmlns:a16="http://schemas.microsoft.com/office/drawing/2014/main" id="{7D7AC3ED-9DD2-7121-F352-B848733D06E1}"/>
               </a:ext>
             </a:extLst>
           </p:cNvPr>
@@ -2681,7 +2681,7 @@
           <p:cNvPr id="9" name="kpi_value_1">
             <a:extLst>
               <a:ext uri="{FF2B5EF4-FFF2-40B4-BE49-F238E27FC236}">
-                <a16:creationId xmlns:a16="http://schemas.microsoft.com/office/drawing/2014/main" id="{5816CC3C-AE1D-9E46-92F5-E184CF164FB1}"/>
+                <a16:creationId xmlns:a16="http://schemas.microsoft.com/office/drawing/2014/main" id="{44BFD109-CFF0-495F-BE5F-BAB969FB1E7D}"/>
               </a:ext>
             </a:extLst>
           </p:cNvPr>
@@ -2734,7 +2734,7 @@
           <p:cNvPr id="10" name="kpi_label_1">
             <a:extLst>
               <a:ext uri="{FF2B5EF4-FFF2-40B4-BE49-F238E27FC236}">
-                <a16:creationId xmlns:a16="http://schemas.microsoft.com/office/drawing/2014/main" id="{28D3E063-B233-06FC-65D8-13B07CAA2BC0}"/>
+                <a16:creationId xmlns:a16="http://schemas.microsoft.com/office/drawing/2014/main" id="{01D4F321-B721-228B-02A7-D8EFC3929D2A}"/>
               </a:ext>
             </a:extLst>
           </p:cNvPr>
@@ -2782,7 +2782,7 @@
           <p:cNvPr id="11" name="source">
             <a:extLst>
               <a:ext uri="{FF2B5EF4-FFF2-40B4-BE49-F238E27FC236}">
-                <a16:creationId xmlns:a16="http://schemas.microsoft.com/office/drawing/2014/main" id="{6673E006-3B27-443B-E841-EEE4D82915D9}"/>
+                <a16:creationId xmlns:a16="http://schemas.microsoft.com/office/drawing/2014/main" id="{38916106-C873-4AEE-03D8-A38B3291E8ED}"/>
               </a:ext>
             </a:extLst>
           </p:cNvPr>
@@ -2837,7 +2837,7 @@
     </p:spTree>
     <p:extLst>
       <p:ext uri="{BB962C8B-B14F-4D97-AF65-F5344CB8AC3E}">
-        <p14:creationId xmlns:p14="http://schemas.microsoft.com/office/powerpoint/2010/main" val="3343975709"/>
+        <p14:creationId xmlns:p14="http://schemas.microsoft.com/office/powerpoint/2010/main" val="3167086359"/>
       </p:ext>
     </p:extLst>
   </p:cSld>
@@ -2869,7 +2869,7 @@
           <p:cNvPr id="7" name="creative_background">
             <a:extLst>
               <a:ext uri="{FF2B5EF4-FFF2-40B4-BE49-F238E27FC236}">
-                <a16:creationId xmlns:a16="http://schemas.microsoft.com/office/drawing/2014/main" id="{2DCFE04A-FD48-B54F-FB2D-F2A33C9EE589}"/>
+                <a16:creationId xmlns:a16="http://schemas.microsoft.com/office/drawing/2014/main" id="{927D54FC-5FBC-C88C-A33A-58518A5B74C6}"/>
               </a:ext>
             </a:extLst>
           </p:cNvPr>
@@ -2942,7 +2942,7 @@
           <a:bodyPr/>
           <a:lstStyle/>
           <a:p>
-            <a:fld id="{52C30056-F7E3-48DE-B485-350B3C114D69}" type="datetimeFigureOut">
+            <a:fld id="{22B1A858-2238-4D50-A136-D8298B9D7581}" type="datetimeFigureOut">
               <a:rPr lang="en-US" smtClean="0"/>
               <a:t>10/3/2026</a:t>
             </a:fld>
@@ -2984,7 +2984,7 @@
           <a:bodyPr/>
           <a:lstStyle/>
           <a:p>
-            <a:fld id="{8B33DAD4-768E-42FF-9F37-25C31ACC81D1}" type="slidenum">
+            <a:fld id="{6B7AFC5B-9B31-47DE-8C26-4C4AD0A46382}" type="slidenum">
               <a:rPr lang="en-US" smtClean="0"/>
               <a:t>‹#›</a:t>
             </a:fld>
@@ -2997,7 +2997,7 @@
           <p:cNvPr id="8" name="body">
             <a:extLst>
               <a:ext uri="{FF2B5EF4-FFF2-40B4-BE49-F238E27FC236}">
-                <a16:creationId xmlns:a16="http://schemas.microsoft.com/office/drawing/2014/main" id="{6FAEFABB-6D89-84F9-B30A-0F0C84D24FF3}"/>
+                <a16:creationId xmlns:a16="http://schemas.microsoft.com/office/drawing/2014/main" id="{584921CA-2DFE-5F2F-CBF5-7A9DE5733931}"/>
               </a:ext>
             </a:extLst>
           </p:cNvPr>
@@ -3037,7 +3037,7 @@
           <p:cNvPr id="9" name="kpi_value_1">
             <a:extLst>
               <a:ext uri="{FF2B5EF4-FFF2-40B4-BE49-F238E27FC236}">
-                <a16:creationId xmlns:a16="http://schemas.microsoft.com/office/drawing/2014/main" id="{1004CC3F-02C1-A81C-CB11-38A04F908FD2}"/>
+                <a16:creationId xmlns:a16="http://schemas.microsoft.com/office/drawing/2014/main" id="{3C6BFA87-3A4F-E2B0-20AB-FCE80629A967}"/>
               </a:ext>
             </a:extLst>
           </p:cNvPr>
@@ -3090,7 +3090,7 @@
           <p:cNvPr id="10" name="kpi_label_1">
             <a:extLst>
               <a:ext uri="{FF2B5EF4-FFF2-40B4-BE49-F238E27FC236}">
-                <a16:creationId xmlns:a16="http://schemas.microsoft.com/office/drawing/2014/main" id="{7BE7D6CE-FB1D-CAAD-2AA4-F53D721A6E6A}"/>
+                <a16:creationId xmlns:a16="http://schemas.microsoft.com/office/drawing/2014/main" id="{EB3D7B72-555B-B742-F268-945A02B86678}"/>
               </a:ext>
             </a:extLst>
           </p:cNvPr>
@@ -3138,7 +3138,7 @@
           <p:cNvPr id="11" name="kpi_value_2">
             <a:extLst>
               <a:ext uri="{FF2B5EF4-FFF2-40B4-BE49-F238E27FC236}">
-                <a16:creationId xmlns:a16="http://schemas.microsoft.com/office/drawing/2014/main" id="{7EB07985-4B7E-2B8D-FEF9-EC23C4211DD6}"/>
+                <a16:creationId xmlns:a16="http://schemas.microsoft.com/office/drawing/2014/main" id="{A626DB9F-6466-14C5-BA60-2A611D6123EE}"/>
               </a:ext>
             </a:extLst>
           </p:cNvPr>
@@ -3191,7 +3191,7 @@
           <p:cNvPr id="12" name="kpi_label_2">
             <a:extLst>
               <a:ext uri="{FF2B5EF4-FFF2-40B4-BE49-F238E27FC236}">
-                <a16:creationId xmlns:a16="http://schemas.microsoft.com/office/drawing/2014/main" id="{2E644E79-E0EF-2B73-91A8-3EFB8949A77E}"/>
+                <a16:creationId xmlns:a16="http://schemas.microsoft.com/office/drawing/2014/main" id="{33D9B51E-6E6E-6EA7-9BF6-3C10B7B2F65E}"/>
               </a:ext>
             </a:extLst>
           </p:cNvPr>
@@ -3239,7 +3239,7 @@
           <p:cNvPr id="13" name="kpi_value_3">
             <a:extLst>
               <a:ext uri="{FF2B5EF4-FFF2-40B4-BE49-F238E27FC236}">
-                <a16:creationId xmlns:a16="http://schemas.microsoft.com/office/drawing/2014/main" id="{9E599449-39B8-F1BE-6D05-0A7792B27188}"/>
+                <a16:creationId xmlns:a16="http://schemas.microsoft.com/office/drawing/2014/main" id="{A66C80A0-A581-FE09-FCEB-4B4E81E2088D}"/>
               </a:ext>
             </a:extLst>
           </p:cNvPr>
@@ -3292,7 +3292,7 @@
           <p:cNvPr id="14" name="kpi_label_3">
             <a:extLst>
               <a:ext uri="{FF2B5EF4-FFF2-40B4-BE49-F238E27FC236}">
-                <a16:creationId xmlns:a16="http://schemas.microsoft.com/office/drawing/2014/main" id="{7A245483-FE11-F79A-F06C-AF171A7750BB}"/>
+                <a16:creationId xmlns:a16="http://schemas.microsoft.com/office/drawing/2014/main" id="{4D5B13A9-ECA2-33E1-0461-68372B2B8B98}"/>
               </a:ext>
             </a:extLst>
           </p:cNvPr>
@@ -3340,7 +3340,7 @@
           <p:cNvPr id="15" name="kpi_value_4">
             <a:extLst>
               <a:ext uri="{FF2B5EF4-FFF2-40B4-BE49-F238E27FC236}">
-                <a16:creationId xmlns:a16="http://schemas.microsoft.com/office/drawing/2014/main" id="{E3D444E2-B41C-4BC1-6ACE-A21FD2EAFDF6}"/>
+                <a16:creationId xmlns:a16="http://schemas.microsoft.com/office/drawing/2014/main" id="{840E128D-9A4E-239F-BA64-20112BF81792}"/>
               </a:ext>
             </a:extLst>
           </p:cNvPr>
@@ -3393,7 +3393,7 @@
           <p:cNvPr id="16" name="kpi_label_4">
             <a:extLst>
               <a:ext uri="{FF2B5EF4-FFF2-40B4-BE49-F238E27FC236}">
-                <a16:creationId xmlns:a16="http://schemas.microsoft.com/office/drawing/2014/main" id="{5CE300C8-0EA4-5E5D-5077-7E5DEC091A76}"/>
+                <a16:creationId xmlns:a16="http://schemas.microsoft.com/office/drawing/2014/main" id="{475DB2EF-D918-0A25-017E-D454F72B78A5}"/>
               </a:ext>
             </a:extLst>
           </p:cNvPr>
@@ -3441,7 +3441,7 @@
           <p:cNvPr id="17" name="source">
             <a:extLst>
               <a:ext uri="{FF2B5EF4-FFF2-40B4-BE49-F238E27FC236}">
-                <a16:creationId xmlns:a16="http://schemas.microsoft.com/office/drawing/2014/main" id="{A9ED33E7-B0ED-52B9-EEB8-2DFBDC20F66C}"/>
+                <a16:creationId xmlns:a16="http://schemas.microsoft.com/office/drawing/2014/main" id="{E0891126-EA10-B7AF-C7BD-4AEC71D097E0}"/>
               </a:ext>
             </a:extLst>
           </p:cNvPr>
@@ -3496,7 +3496,7 @@
     </p:spTree>
     <p:extLst>
       <p:ext uri="{BB962C8B-B14F-4D97-AF65-F5344CB8AC3E}">
-        <p14:creationId xmlns:p14="http://schemas.microsoft.com/office/powerpoint/2010/main" val="1281687811"/>
+        <p14:creationId xmlns:p14="http://schemas.microsoft.com/office/powerpoint/2010/main" val="1768892213"/>
       </p:ext>
     </p:extLst>
   </p:cSld>
@@ -3528,7 +3528,7 @@
           <p:cNvPr id="7" name="creative_background">
             <a:extLst>
               <a:ext uri="{FF2B5EF4-FFF2-40B4-BE49-F238E27FC236}">
-                <a16:creationId xmlns:a16="http://schemas.microsoft.com/office/drawing/2014/main" id="{429E169B-AB87-3B33-0D06-83BB4E481DED}"/>
+                <a16:creationId xmlns:a16="http://schemas.microsoft.com/office/drawing/2014/main" id="{7CF551A8-916C-6EFC-8999-7AFDAFE4F4C3}"/>
               </a:ext>
             </a:extLst>
           </p:cNvPr>
@@ -3601,7 +3601,7 @@
           <a:bodyPr/>
           <a:lstStyle/>
           <a:p>
-            <a:fld id="{52C30056-F7E3-48DE-B485-350B3C114D69}" type="datetimeFigureOut">
+            <a:fld id="{22B1A858-2238-4D50-A136-D8298B9D7581}" type="datetimeFigureOut">
               <a:rPr lang="en-US" smtClean="0"/>
               <a:t>10/3/2026</a:t>
             </a:fld>
@@ -3643,7 +3643,7 @@
           <a:bodyPr/>
           <a:lstStyle/>
           <a:p>
-            <a:fld id="{8B33DAD4-768E-42FF-9F37-25C31ACC81D1}" type="slidenum">
+            <a:fld id="{6B7AFC5B-9B31-47DE-8C26-4C4AD0A46382}" type="slidenum">
               <a:rPr lang="en-US" smtClean="0"/>
               <a:t>‹#›</a:t>
             </a:fld>
@@ -3656,7 +3656,7 @@
           <p:cNvPr id="8" name="body">
             <a:extLst>
               <a:ext uri="{FF2B5EF4-FFF2-40B4-BE49-F238E27FC236}">
-                <a16:creationId xmlns:a16="http://schemas.microsoft.com/office/drawing/2014/main" id="{068821F9-60D5-9BB1-0B42-A03954BFA90D}"/>
+                <a16:creationId xmlns:a16="http://schemas.microsoft.com/office/drawing/2014/main" id="{C4DD5711-0D5A-9B6B-8D95-4AB2B9D3D8B7}"/>
               </a:ext>
             </a:extLst>
           </p:cNvPr>
@@ -3696,7 +3696,7 @@
           <p:cNvPr id="9" name="kpi_value_1">
             <a:extLst>
               <a:ext uri="{FF2B5EF4-FFF2-40B4-BE49-F238E27FC236}">
-                <a16:creationId xmlns:a16="http://schemas.microsoft.com/office/drawing/2014/main" id="{F29C22B1-6F6A-711A-F40F-E0278708CC91}"/>
+                <a16:creationId xmlns:a16="http://schemas.microsoft.com/office/drawing/2014/main" id="{4EC592D5-8EFC-863A-9F2D-1C7D8A54F784}"/>
               </a:ext>
             </a:extLst>
           </p:cNvPr>
@@ -3749,7 +3749,7 @@
           <p:cNvPr id="10" name="kpi_label_1">
             <a:extLst>
               <a:ext uri="{FF2B5EF4-FFF2-40B4-BE49-F238E27FC236}">
-                <a16:creationId xmlns:a16="http://schemas.microsoft.com/office/drawing/2014/main" id="{4C2E7E7A-D7E9-D623-974C-031F36E6FDAE}"/>
+                <a16:creationId xmlns:a16="http://schemas.microsoft.com/office/drawing/2014/main" id="{8D743105-E935-8FF3-FBDB-67FC910840E7}"/>
               </a:ext>
             </a:extLst>
           </p:cNvPr>
@@ -3797,7 +3797,7 @@
           <p:cNvPr id="11" name="kpi_value_2">
             <a:extLst>
               <a:ext uri="{FF2B5EF4-FFF2-40B4-BE49-F238E27FC236}">
-                <a16:creationId xmlns:a16="http://schemas.microsoft.com/office/drawing/2014/main" id="{9DA39478-4FD5-192B-6BA8-780DE86DB473}"/>
+                <a16:creationId xmlns:a16="http://schemas.microsoft.com/office/drawing/2014/main" id="{C86578F7-847A-66C0-E8A6-A0E2BEAEB464}"/>
               </a:ext>
             </a:extLst>
           </p:cNvPr>
@@ -3850,7 +3850,7 @@
           <p:cNvPr id="12" name="kpi_label_2">
             <a:extLst>
               <a:ext uri="{FF2B5EF4-FFF2-40B4-BE49-F238E27FC236}">
-                <a16:creationId xmlns:a16="http://schemas.microsoft.com/office/drawing/2014/main" id="{9C19AF35-3DF2-741C-92AE-94FBB52AEE1A}"/>
+                <a16:creationId xmlns:a16="http://schemas.microsoft.com/office/drawing/2014/main" id="{CFE8A12C-7806-C3B8-B869-75CBEAB18231}"/>
               </a:ext>
             </a:extLst>
           </p:cNvPr>
@@ -3898,7 +3898,7 @@
           <p:cNvPr id="13" name="source">
             <a:extLst>
               <a:ext uri="{FF2B5EF4-FFF2-40B4-BE49-F238E27FC236}">
-                <a16:creationId xmlns:a16="http://schemas.microsoft.com/office/drawing/2014/main" id="{4D528F76-0AC8-547E-18BE-C2A3C94BBEC5}"/>
+                <a16:creationId xmlns:a16="http://schemas.microsoft.com/office/drawing/2014/main" id="{302658F9-956C-90B3-AA3E-EC03FF2D373D}"/>
               </a:ext>
             </a:extLst>
           </p:cNvPr>
@@ -3953,7 +3953,7 @@
     </p:spTree>
     <p:extLst>
       <p:ext uri="{BB962C8B-B14F-4D97-AF65-F5344CB8AC3E}">
-        <p14:creationId xmlns:p14="http://schemas.microsoft.com/office/powerpoint/2010/main" val="1865292389"/>
+        <p14:creationId xmlns:p14="http://schemas.microsoft.com/office/powerpoint/2010/main" val="2120906685"/>
       </p:ext>
     </p:extLst>
   </p:cSld>
@@ -3985,7 +3985,7 @@
           <p:cNvPr id="7" name="creative_background">
             <a:extLst>
               <a:ext uri="{FF2B5EF4-FFF2-40B4-BE49-F238E27FC236}">
-                <a16:creationId xmlns:a16="http://schemas.microsoft.com/office/drawing/2014/main" id="{D274A5D4-4B45-1DE9-C3C9-2C6159A6D819}"/>
+                <a16:creationId xmlns:a16="http://schemas.microsoft.com/office/drawing/2014/main" id="{6D5AFA5C-8B22-E79C-F783-96493D0A7207}"/>
               </a:ext>
             </a:extLst>
           </p:cNvPr>
@@ -4058,7 +4058,7 @@
           <a:bodyPr/>
           <a:lstStyle/>
           <a:p>
-            <a:fld id="{52C30056-F7E3-48DE-B485-350B3C114D69}" type="datetimeFigureOut">
+            <a:fld id="{22B1A858-2238-4D50-A136-D8298B9D7581}" type="datetimeFigureOut">
               <a:rPr lang="en-US" smtClean="0"/>
               <a:t>10/3/2026</a:t>
             </a:fld>
@@ -4100,7 +4100,7 @@
           <a:bodyPr/>
           <a:lstStyle/>
           <a:p>
-            <a:fld id="{8B33DAD4-768E-42FF-9F37-25C31ACC81D1}" type="slidenum">
+            <a:fld id="{6B7AFC5B-9B31-47DE-8C26-4C4AD0A46382}" type="slidenum">
               <a:rPr lang="en-US" smtClean="0"/>
               <a:t>‹#›</a:t>
             </a:fld>
@@ -4113,7 +4113,7 @@
           <p:cNvPr id="8" name="body">
             <a:extLst>
               <a:ext uri="{FF2B5EF4-FFF2-40B4-BE49-F238E27FC236}">
-                <a16:creationId xmlns:a16="http://schemas.microsoft.com/office/drawing/2014/main" id="{9ABE7F15-4925-FF6D-89AF-179FFEF326BE}"/>
+                <a16:creationId xmlns:a16="http://schemas.microsoft.com/office/drawing/2014/main" id="{F3FE6717-20B5-A805-6271-7B68D338C664}"/>
               </a:ext>
             </a:extLst>
           </p:cNvPr>
@@ -4153,7 +4153,7 @@
           <p:cNvPr id="9" name="kpi_value_1">
             <a:extLst>
               <a:ext uri="{FF2B5EF4-FFF2-40B4-BE49-F238E27FC236}">
-                <a16:creationId xmlns:a16="http://schemas.microsoft.com/office/drawing/2014/main" id="{E1D82466-E1AF-FD3F-FDF2-E992D6D646B0}"/>
+                <a16:creationId xmlns:a16="http://schemas.microsoft.com/office/drawing/2014/main" id="{5D725A1D-614E-B9E0-332D-0A9E7DE392ED}"/>
               </a:ext>
             </a:extLst>
           </p:cNvPr>
@@ -4206,7 +4206,7 @@
           <p:cNvPr id="10" name="kpi_label_1">
             <a:extLst>
               <a:ext uri="{FF2B5EF4-FFF2-40B4-BE49-F238E27FC236}">
-                <a16:creationId xmlns:a16="http://schemas.microsoft.com/office/drawing/2014/main" id="{587335E1-DADF-F4E7-00B9-2F889C58CF6C}"/>
+                <a16:creationId xmlns:a16="http://schemas.microsoft.com/office/drawing/2014/main" id="{B3BCF85C-2658-FF44-048D-85FA55508CA9}"/>
               </a:ext>
             </a:extLst>
           </p:cNvPr>
@@ -4254,7 +4254,7 @@
           <p:cNvPr id="11" name="kpi_value_2">
             <a:extLst>
               <a:ext uri="{FF2B5EF4-FFF2-40B4-BE49-F238E27FC236}">
-                <a16:creationId xmlns:a16="http://schemas.microsoft.com/office/drawing/2014/main" id="{8C3077E3-4DAB-46D3-64AA-A764C3E1691C}"/>
+                <a16:creationId xmlns:a16="http://schemas.microsoft.com/office/drawing/2014/main" id="{D0D34A42-128B-B14F-9A1C-0ED9C74ECC64}"/>
               </a:ext>
             </a:extLst>
           </p:cNvPr>
@@ -4307,7 +4307,7 @@
           <p:cNvPr id="12" name="kpi_label_2">
             <a:extLst>
               <a:ext uri="{FF2B5EF4-FFF2-40B4-BE49-F238E27FC236}">
-                <a16:creationId xmlns:a16="http://schemas.microsoft.com/office/drawing/2014/main" id="{09D4E34B-F155-0AF8-2A55-23D08CB8D402}"/>
+                <a16:creationId xmlns:a16="http://schemas.microsoft.com/office/drawing/2014/main" id="{B56FDAE5-11E5-42B9-0216-FBB4CF14FC16}"/>
               </a:ext>
             </a:extLst>
           </p:cNvPr>
@@ -4355,7 +4355,7 @@
           <p:cNvPr id="13" name="kpi_value_3">
             <a:extLst>
               <a:ext uri="{FF2B5EF4-FFF2-40B4-BE49-F238E27FC236}">
-                <a16:creationId xmlns:a16="http://schemas.microsoft.com/office/drawing/2014/main" id="{C76BBCF0-10D4-566E-EBAB-EDFA0FE4995D}"/>
+                <a16:creationId xmlns:a16="http://schemas.microsoft.com/office/drawing/2014/main" id="{9452C64C-7768-C146-E3D3-917653E71B51}"/>
               </a:ext>
             </a:extLst>
           </p:cNvPr>
@@ -4408,7 +4408,7 @@
           <p:cNvPr id="14" name="kpi_label_3">
             <a:extLst>
               <a:ext uri="{FF2B5EF4-FFF2-40B4-BE49-F238E27FC236}">
-                <a16:creationId xmlns:a16="http://schemas.microsoft.com/office/drawing/2014/main" id="{905E4A42-7BB9-8AA3-E03E-7516B5055A2D}"/>
+                <a16:creationId xmlns:a16="http://schemas.microsoft.com/office/drawing/2014/main" id="{A145C4E1-3FF2-EE2E-FBA0-CAD87D37B873}"/>
               </a:ext>
             </a:extLst>
           </p:cNvPr>
@@ -4456,7 +4456,7 @@
           <p:cNvPr id="15" name="kpi_value_4">
             <a:extLst>
               <a:ext uri="{FF2B5EF4-FFF2-40B4-BE49-F238E27FC236}">
-                <a16:creationId xmlns:a16="http://schemas.microsoft.com/office/drawing/2014/main" id="{BB903965-815E-DCF6-69DB-4C2D813A7E3A}"/>
+                <a16:creationId xmlns:a16="http://schemas.microsoft.com/office/drawing/2014/main" id="{3DC827B3-4AF0-CECB-951A-F353BB35F46E}"/>
               </a:ext>
             </a:extLst>
           </p:cNvPr>
@@ -4509,7 +4509,7 @@
           <p:cNvPr id="16" name="kpi_label_4">
             <a:extLst>
               <a:ext uri="{FF2B5EF4-FFF2-40B4-BE49-F238E27FC236}">
-                <a16:creationId xmlns:a16="http://schemas.microsoft.com/office/drawing/2014/main" id="{2407DA6F-ABA8-E620-2B84-C8CE3A612E3B}"/>
+                <a16:creationId xmlns:a16="http://schemas.microsoft.com/office/drawing/2014/main" id="{0B6A6107-1ADC-7048-6055-02EE6FFDB034}"/>
               </a:ext>
             </a:extLst>
           </p:cNvPr>
@@ -4557,7 +4557,7 @@
           <p:cNvPr id="17" name="source">
             <a:extLst>
               <a:ext uri="{FF2B5EF4-FFF2-40B4-BE49-F238E27FC236}">
-                <a16:creationId xmlns:a16="http://schemas.microsoft.com/office/drawing/2014/main" id="{0259494D-8927-28B5-D7CB-D770B1AA5600}"/>
+                <a16:creationId xmlns:a16="http://schemas.microsoft.com/office/drawing/2014/main" id="{361CED1C-9177-3499-2208-2949BE85309C}"/>
               </a:ext>
             </a:extLst>
           </p:cNvPr>
@@ -4612,7 +4612,7 @@
     </p:spTree>
     <p:extLst>
       <p:ext uri="{BB962C8B-B14F-4D97-AF65-F5344CB8AC3E}">
-        <p14:creationId xmlns:p14="http://schemas.microsoft.com/office/powerpoint/2010/main" val="334828478"/>
+        <p14:creationId xmlns:p14="http://schemas.microsoft.com/office/powerpoint/2010/main" val="2775566711"/>
       </p:ext>
     </p:extLst>
   </p:cSld>
@@ -4644,7 +4644,7 @@
           <p:cNvPr id="7" name="creative_background">
             <a:extLst>
               <a:ext uri="{FF2B5EF4-FFF2-40B4-BE49-F238E27FC236}">
-                <a16:creationId xmlns:a16="http://schemas.microsoft.com/office/drawing/2014/main" id="{EA085B9B-6566-5551-F3B6-36DB028A45FF}"/>
+                <a16:creationId xmlns:a16="http://schemas.microsoft.com/office/drawing/2014/main" id="{DB28B238-58CF-86E0-C2B2-06468EB672DD}"/>
               </a:ext>
             </a:extLst>
           </p:cNvPr>
@@ -4717,7 +4717,7 @@
           <a:bodyPr/>
           <a:lstStyle/>
           <a:p>
-            <a:fld id="{52C30056-F7E3-48DE-B485-350B3C114D69}" type="datetimeFigureOut">
+            <a:fld id="{22B1A858-2238-4D50-A136-D8298B9D7581}" type="datetimeFigureOut">
               <a:rPr lang="en-US" smtClean="0"/>
               <a:t>10/3/2026</a:t>
             </a:fld>
@@ -4759,7 +4759,7 @@
           <a:bodyPr/>
           <a:lstStyle/>
           <a:p>
-            <a:fld id="{8B33DAD4-768E-42FF-9F37-25C31ACC81D1}" type="slidenum">
+            <a:fld id="{6B7AFC5B-9B31-47DE-8C26-4C4AD0A46382}" type="slidenum">
               <a:rPr lang="en-US" smtClean="0"/>
               <a:t>‹#›</a:t>
             </a:fld>
@@ -4772,7 +4772,7 @@
           <p:cNvPr id="8" name="item_1_title">
             <a:extLst>
               <a:ext uri="{FF2B5EF4-FFF2-40B4-BE49-F238E27FC236}">
-                <a16:creationId xmlns:a16="http://schemas.microsoft.com/office/drawing/2014/main" id="{E0EB0F2F-9D77-F338-B741-D5130D9BBDB4}"/>
+                <a16:creationId xmlns:a16="http://schemas.microsoft.com/office/drawing/2014/main" id="{56651330-A0B7-4F24-5872-57DA32A7FC8E}"/>
               </a:ext>
             </a:extLst>
           </p:cNvPr>
@@ -4822,7 +4822,7 @@
           <p:cNvPr id="9" name="item_1">
             <a:extLst>
               <a:ext uri="{FF2B5EF4-FFF2-40B4-BE49-F238E27FC236}">
-                <a16:creationId xmlns:a16="http://schemas.microsoft.com/office/drawing/2014/main" id="{B81F9C85-8B3A-1636-DA90-FA3C17B61D65}"/>
+                <a16:creationId xmlns:a16="http://schemas.microsoft.com/office/drawing/2014/main" id="{DF773B96-2BCD-E7BE-CB81-4D37E63EBD47}"/>
               </a:ext>
             </a:extLst>
           </p:cNvPr>
@@ -4870,7 +4870,7 @@
           <p:cNvPr id="10" name="item_2_title">
             <a:extLst>
               <a:ext uri="{FF2B5EF4-FFF2-40B4-BE49-F238E27FC236}">
-                <a16:creationId xmlns:a16="http://schemas.microsoft.com/office/drawing/2014/main" id="{912244F7-5E62-D9AA-9976-928C63720B51}"/>
+                <a16:creationId xmlns:a16="http://schemas.microsoft.com/office/drawing/2014/main" id="{B1559678-40D2-79C1-C8D5-D1BD2896CFA6}"/>
               </a:ext>
             </a:extLst>
           </p:cNvPr>
@@ -4923,7 +4923,7 @@
           <p:cNvPr id="11" name="item_2">
             <a:extLst>
               <a:ext uri="{FF2B5EF4-FFF2-40B4-BE49-F238E27FC236}">
-                <a16:creationId xmlns:a16="http://schemas.microsoft.com/office/drawing/2014/main" id="{E7C799EA-2C41-EE76-5B62-89E744F1CBD0}"/>
+                <a16:creationId xmlns:a16="http://schemas.microsoft.com/office/drawing/2014/main" id="{211D3A30-645F-2117-FCD9-27306A93E2F7}"/>
               </a:ext>
             </a:extLst>
           </p:cNvPr>
@@ -4971,7 +4971,7 @@
           <p:cNvPr id="12" name="item_3_title">
             <a:extLst>
               <a:ext uri="{FF2B5EF4-FFF2-40B4-BE49-F238E27FC236}">
-                <a16:creationId xmlns:a16="http://schemas.microsoft.com/office/drawing/2014/main" id="{262DC49C-B18F-A6E9-2172-BCA46DEC785D}"/>
+                <a16:creationId xmlns:a16="http://schemas.microsoft.com/office/drawing/2014/main" id="{C8356413-F3CB-A31C-3DE0-36D4AE94D47C}"/>
               </a:ext>
             </a:extLst>
           </p:cNvPr>
@@ -5024,7 +5024,7 @@
           <p:cNvPr id="13" name="item_3">
             <a:extLst>
               <a:ext uri="{FF2B5EF4-FFF2-40B4-BE49-F238E27FC236}">
-                <a16:creationId xmlns:a16="http://schemas.microsoft.com/office/drawing/2014/main" id="{31C13ACD-42B5-7EFE-3671-9896EA1A249E}"/>
+                <a16:creationId xmlns:a16="http://schemas.microsoft.com/office/drawing/2014/main" id="{3BC13045-187C-840A-6BFC-1FCDAF44F02C}"/>
               </a:ext>
             </a:extLst>
           </p:cNvPr>
@@ -5072,7 +5072,7 @@
           <p:cNvPr id="14" name="item_4_title">
             <a:extLst>
               <a:ext uri="{FF2B5EF4-FFF2-40B4-BE49-F238E27FC236}">
-                <a16:creationId xmlns:a16="http://schemas.microsoft.com/office/drawing/2014/main" id="{FF103650-294D-ADBB-EC99-89F2F237B923}"/>
+                <a16:creationId xmlns:a16="http://schemas.microsoft.com/office/drawing/2014/main" id="{2D63756E-4BD8-818E-F576-9E6FCB52DD4F}"/>
               </a:ext>
             </a:extLst>
           </p:cNvPr>
@@ -5125,7 +5125,7 @@
           <p:cNvPr id="15" name="item_4">
             <a:extLst>
               <a:ext uri="{FF2B5EF4-FFF2-40B4-BE49-F238E27FC236}">
-                <a16:creationId xmlns:a16="http://schemas.microsoft.com/office/drawing/2014/main" id="{64F1AB2C-0768-29E5-3DB3-09D10AFACE5F}"/>
+                <a16:creationId xmlns:a16="http://schemas.microsoft.com/office/drawing/2014/main" id="{3E45AD2A-0552-9654-8E91-AADC3A293E3C}"/>
               </a:ext>
             </a:extLst>
           </p:cNvPr>
@@ -5173,7 +5173,7 @@
           <p:cNvPr id="16" name="source">
             <a:extLst>
               <a:ext uri="{FF2B5EF4-FFF2-40B4-BE49-F238E27FC236}">
-                <a16:creationId xmlns:a16="http://schemas.microsoft.com/office/drawing/2014/main" id="{797EBABE-DBE2-0F06-5A8A-B932A40C9376}"/>
+                <a16:creationId xmlns:a16="http://schemas.microsoft.com/office/drawing/2014/main" id="{BCF7376B-C818-1481-14BD-AFEFDF1E9318}"/>
               </a:ext>
             </a:extLst>
           </p:cNvPr>
@@ -5228,7 +5228,7 @@
     </p:spTree>
     <p:extLst>
       <p:ext uri="{BB962C8B-B14F-4D97-AF65-F5344CB8AC3E}">
-        <p14:creationId xmlns:p14="http://schemas.microsoft.com/office/powerpoint/2010/main" val="3889042184"/>
+        <p14:creationId xmlns:p14="http://schemas.microsoft.com/office/powerpoint/2010/main" val="3820611050"/>
       </p:ext>
     </p:extLst>
   </p:cSld>
@@ -5260,7 +5260,7 @@
           <p:cNvPr id="7" name="creative_background">
             <a:extLst>
               <a:ext uri="{FF2B5EF4-FFF2-40B4-BE49-F238E27FC236}">
-                <a16:creationId xmlns:a16="http://schemas.microsoft.com/office/drawing/2014/main" id="{70966C06-E7BB-616D-44A0-7C3343B1FBFE}"/>
+                <a16:creationId xmlns:a16="http://schemas.microsoft.com/office/drawing/2014/main" id="{B7D9C6F3-7863-083C-F038-CFF24D22B097}"/>
               </a:ext>
             </a:extLst>
           </p:cNvPr>
@@ -5333,7 +5333,7 @@
           <a:bodyPr/>
           <a:lstStyle/>
           <a:p>
-            <a:fld id="{52C30056-F7E3-48DE-B485-350B3C114D69}" type="datetimeFigureOut">
+            <a:fld id="{22B1A858-2238-4D50-A136-D8298B9D7581}" type="datetimeFigureOut">
               <a:rPr lang="en-US" smtClean="0"/>
               <a:t>10/3/2026</a:t>
             </a:fld>
@@ -5375,7 +5375,7 @@
           <a:bodyPr/>
           <a:lstStyle/>
           <a:p>
-            <a:fld id="{8B33DAD4-768E-42FF-9F37-25C31ACC81D1}" type="slidenum">
+            <a:fld id="{6B7AFC5B-9B31-47DE-8C26-4C4AD0A46382}" type="slidenum">
               <a:rPr lang="en-US" smtClean="0"/>
               <a:t>‹#›</a:t>
             </a:fld>
@@ -5388,7 +5388,7 @@
           <p:cNvPr id="8" name="marker_1">
             <a:extLst>
               <a:ext uri="{FF2B5EF4-FFF2-40B4-BE49-F238E27FC236}">
-                <a16:creationId xmlns:a16="http://schemas.microsoft.com/office/drawing/2014/main" id="{2AF8E761-9CBA-45F6-3F74-8611624AFE07}"/>
+                <a16:creationId xmlns:a16="http://schemas.microsoft.com/office/drawing/2014/main" id="{E5339670-FBBB-7F13-4FA5-5DA0EB355280}"/>
               </a:ext>
             </a:extLst>
           </p:cNvPr>
@@ -5444,7 +5444,7 @@
           <p:cNvPr id="9" name="item_1_title">
             <a:extLst>
               <a:ext uri="{FF2B5EF4-FFF2-40B4-BE49-F238E27FC236}">
-                <a16:creationId xmlns:a16="http://schemas.microsoft.com/office/drawing/2014/main" id="{F37F3100-0618-ACA7-79E1-55F9828392E5}"/>
+                <a16:creationId xmlns:a16="http://schemas.microsoft.com/office/drawing/2014/main" id="{5774AF0D-978D-6B09-6AAF-A3558F4D65BD}"/>
               </a:ext>
             </a:extLst>
           </p:cNvPr>
@@ -5497,7 +5497,7 @@
           <p:cNvPr id="10" name="item_1">
             <a:extLst>
               <a:ext uri="{FF2B5EF4-FFF2-40B4-BE49-F238E27FC236}">
-                <a16:creationId xmlns:a16="http://schemas.microsoft.com/office/drawing/2014/main" id="{E0E1D6B1-F875-213D-F035-8955C0029A56}"/>
+                <a16:creationId xmlns:a16="http://schemas.microsoft.com/office/drawing/2014/main" id="{9BC52F97-8324-CA0F-934B-C77297DDD945}"/>
               </a:ext>
             </a:extLst>
           </p:cNvPr>
@@ -5545,7 +5545,7 @@
           <p:cNvPr id="11" name="marker_2">
             <a:extLst>
               <a:ext uri="{FF2B5EF4-FFF2-40B4-BE49-F238E27FC236}">
-                <a16:creationId xmlns:a16="http://schemas.microsoft.com/office/drawing/2014/main" id="{7B537A95-6957-6233-308B-A0F63C8B42B0}"/>
+                <a16:creationId xmlns:a16="http://schemas.microsoft.com/office/drawing/2014/main" id="{13EC149A-1547-AB82-DA63-8CF417BE2810}"/>
               </a:ext>
             </a:extLst>
           </p:cNvPr>
@@ -5601,7 +5601,7 @@
           <p:cNvPr id="12" name="item_2_title">
             <a:extLst>
               <a:ext uri="{FF2B5EF4-FFF2-40B4-BE49-F238E27FC236}">
-                <a16:creationId xmlns:a16="http://schemas.microsoft.com/office/drawing/2014/main" id="{2BCADD1A-14F9-69AF-5C24-B66329599B96}"/>
+                <a16:creationId xmlns:a16="http://schemas.microsoft.com/office/drawing/2014/main" id="{7274B344-44B9-6DA4-4400-1BCBDD0500E6}"/>
               </a:ext>
             </a:extLst>
           </p:cNvPr>
@@ -5654,7 +5654,7 @@
           <p:cNvPr id="13" name="item_2">
             <a:extLst>
               <a:ext uri="{FF2B5EF4-FFF2-40B4-BE49-F238E27FC236}">
-                <a16:creationId xmlns:a16="http://schemas.microsoft.com/office/drawing/2014/main" id="{A42FA5AA-3945-646E-C23F-EE55E3B0A1D3}"/>
+                <a16:creationId xmlns:a16="http://schemas.microsoft.com/office/drawing/2014/main" id="{AE799014-F165-FA6F-724D-BCE8CF55CA23}"/>
               </a:ext>
             </a:extLst>
           </p:cNvPr>
@@ -5702,7 +5702,7 @@
           <p:cNvPr id="14" name="source">
             <a:extLst>
               <a:ext uri="{FF2B5EF4-FFF2-40B4-BE49-F238E27FC236}">
-                <a16:creationId xmlns:a16="http://schemas.microsoft.com/office/drawing/2014/main" id="{EA040624-F6AE-4B78-FD68-06628B466A2B}"/>
+                <a16:creationId xmlns:a16="http://schemas.microsoft.com/office/drawing/2014/main" id="{096C47EC-4FC9-5EF5-FCBB-D5D94FF2CC4C}"/>
               </a:ext>
             </a:extLst>
           </p:cNvPr>
@@ -5757,7 +5757,7 @@
     </p:spTree>
     <p:extLst>
       <p:ext uri="{BB962C8B-B14F-4D97-AF65-F5344CB8AC3E}">
-        <p14:creationId xmlns:p14="http://schemas.microsoft.com/office/powerpoint/2010/main" val="54784784"/>
+        <p14:creationId xmlns:p14="http://schemas.microsoft.com/office/powerpoint/2010/main" val="1063305578"/>
       </p:ext>
     </p:extLst>
   </p:cSld>
@@ -5789,7 +5789,7 @@
           <p:cNvPr id="7" name="creative_background">
             <a:extLst>
               <a:ext uri="{FF2B5EF4-FFF2-40B4-BE49-F238E27FC236}">
-                <a16:creationId xmlns:a16="http://schemas.microsoft.com/office/drawing/2014/main" id="{65B3D251-9B62-B010-7D4D-AD0F50E3E7F1}"/>
+                <a16:creationId xmlns:a16="http://schemas.microsoft.com/office/drawing/2014/main" id="{B0E41E45-B2D2-A593-E6DC-FEF7DDF8D985}"/>
               </a:ext>
             </a:extLst>
           </p:cNvPr>
@@ -5862,7 +5862,7 @@
           <a:bodyPr/>
           <a:lstStyle/>
           <a:p>
-            <a:fld id="{52C30056-F7E3-48DE-B485-350B3C114D69}" type="datetimeFigureOut">
+            <a:fld id="{22B1A858-2238-4D50-A136-D8298B9D7581}" type="datetimeFigureOut">
               <a:rPr lang="en-US" smtClean="0"/>
               <a:t>10/3/2026</a:t>
             </a:fld>
@@ -5904,7 +5904,7 @@
           <a:bodyPr/>
           <a:lstStyle/>
           <a:p>
-            <a:fld id="{8B33DAD4-768E-42FF-9F37-25C31ACC81D1}" type="slidenum">
+            <a:fld id="{6B7AFC5B-9B31-47DE-8C26-4C4AD0A46382}" type="slidenum">
               <a:rPr lang="en-US" smtClean="0"/>
               <a:t>‹#›</a:t>
             </a:fld>
@@ -5917,7 +5917,7 @@
           <p:cNvPr id="8" name="item_1_title">
             <a:extLst>
               <a:ext uri="{FF2B5EF4-FFF2-40B4-BE49-F238E27FC236}">
-                <a16:creationId xmlns:a16="http://schemas.microsoft.com/office/drawing/2014/main" id="{C2497A2E-98F9-AD20-D0DF-67746A3E69A3}"/>
+                <a16:creationId xmlns:a16="http://schemas.microsoft.com/office/drawing/2014/main" id="{DA43ACCB-7D92-FF84-C963-4066263AD9E9}"/>
               </a:ext>
             </a:extLst>
           </p:cNvPr>
@@ -5967,7 +5967,7 @@
           <p:cNvPr id="9" name="item_1">
             <a:extLst>
               <a:ext uri="{FF2B5EF4-FFF2-40B4-BE49-F238E27FC236}">
-                <a16:creationId xmlns:a16="http://schemas.microsoft.com/office/drawing/2014/main" id="{87BE7007-7C32-B21F-2D64-246A8EDDB23C}"/>
+                <a16:creationId xmlns:a16="http://schemas.microsoft.com/office/drawing/2014/main" id="{EBFCB9CA-4F0C-C3F4-C172-5F3813F19C0F}"/>
               </a:ext>
             </a:extLst>
           </p:cNvPr>
@@ -6015,7 +6015,7 @@
           <p:cNvPr id="10" name="item_2_title">
             <a:extLst>
               <a:ext uri="{FF2B5EF4-FFF2-40B4-BE49-F238E27FC236}">
-                <a16:creationId xmlns:a16="http://schemas.microsoft.com/office/drawing/2014/main" id="{756E7428-A22D-2EB8-B5AD-9850359D88FA}"/>
+                <a16:creationId xmlns:a16="http://schemas.microsoft.com/office/drawing/2014/main" id="{367B17DF-6096-9C9E-9FCD-06695BA7C20C}"/>
               </a:ext>
             </a:extLst>
           </p:cNvPr>
@@ -6068,7 +6068,7 @@
           <p:cNvPr id="11" name="item_2">
             <a:extLst>
               <a:ext uri="{FF2B5EF4-FFF2-40B4-BE49-F238E27FC236}">
-                <a16:creationId xmlns:a16="http://schemas.microsoft.com/office/drawing/2014/main" id="{27AFF6E6-D537-5A97-E604-CF754BFE24CC}"/>
+                <a16:creationId xmlns:a16="http://schemas.microsoft.com/office/drawing/2014/main" id="{65CC1389-5E2B-F265-C85A-AD0B60C9B718}"/>
               </a:ext>
             </a:extLst>
           </p:cNvPr>
@@ -6116,7 +6116,7 @@
           <p:cNvPr id="12" name="item_3_title">
             <a:extLst>
               <a:ext uri="{FF2B5EF4-FFF2-40B4-BE49-F238E27FC236}">
-                <a16:creationId xmlns:a16="http://schemas.microsoft.com/office/drawing/2014/main" id="{ED04DD9A-2F3C-C424-5078-BEED9F9578F6}"/>
+                <a16:creationId xmlns:a16="http://schemas.microsoft.com/office/drawing/2014/main" id="{9AE19869-65C5-2BAB-3BA5-6AE3869802B6}"/>
               </a:ext>
             </a:extLst>
           </p:cNvPr>
@@ -6169,7 +6169,7 @@
           <p:cNvPr id="13" name="item_3">
             <a:extLst>
               <a:ext uri="{FF2B5EF4-FFF2-40B4-BE49-F238E27FC236}">
-                <a16:creationId xmlns:a16="http://schemas.microsoft.com/office/drawing/2014/main" id="{396FD7F4-1184-9CF1-DDDE-8EDDD1CBE09D}"/>
+                <a16:creationId xmlns:a16="http://schemas.microsoft.com/office/drawing/2014/main" id="{83311576-7FEB-5423-FECF-884A118C0F24}"/>
               </a:ext>
             </a:extLst>
           </p:cNvPr>
@@ -6217,7 +6217,7 @@
           <p:cNvPr id="14" name="item_4_title">
             <a:extLst>
               <a:ext uri="{FF2B5EF4-FFF2-40B4-BE49-F238E27FC236}">
-                <a16:creationId xmlns:a16="http://schemas.microsoft.com/office/drawing/2014/main" id="{57558260-4C4A-1BE6-68A9-2B53F0A8DC58}"/>
+                <a16:creationId xmlns:a16="http://schemas.microsoft.com/office/drawing/2014/main" id="{787F075A-A784-FABA-053F-091E4F926226}"/>
               </a:ext>
             </a:extLst>
           </p:cNvPr>
@@ -6270,7 +6270,7 @@
           <p:cNvPr id="15" name="item_4">
             <a:extLst>
               <a:ext uri="{FF2B5EF4-FFF2-40B4-BE49-F238E27FC236}">
-                <a16:creationId xmlns:a16="http://schemas.microsoft.com/office/drawing/2014/main" id="{2C83C0E8-B890-D32A-7754-0A5D39B98FF6}"/>
+                <a16:creationId xmlns:a16="http://schemas.microsoft.com/office/drawing/2014/main" id="{BCE0AD3E-C903-94F0-E19D-006710B6BE10}"/>
               </a:ext>
             </a:extLst>
           </p:cNvPr>
@@ -6318,7 +6318,7 @@
           <p:cNvPr id="16" name="source">
             <a:extLst>
               <a:ext uri="{FF2B5EF4-FFF2-40B4-BE49-F238E27FC236}">
-                <a16:creationId xmlns:a16="http://schemas.microsoft.com/office/drawing/2014/main" id="{9FE437D7-DD45-D408-8A94-5DEABBCCAF50}"/>
+                <a16:creationId xmlns:a16="http://schemas.microsoft.com/office/drawing/2014/main" id="{20955F1D-F4C0-5146-7EB5-E10C6BE741BD}"/>
               </a:ext>
             </a:extLst>
           </p:cNvPr>
@@ -6373,7 +6373,7 @@
     </p:spTree>
     <p:extLst>
       <p:ext uri="{BB962C8B-B14F-4D97-AF65-F5344CB8AC3E}">
-        <p14:creationId xmlns:p14="http://schemas.microsoft.com/office/powerpoint/2010/main" val="25697309"/>
+        <p14:creationId xmlns:p14="http://schemas.microsoft.com/office/powerpoint/2010/main" val="3593567744"/>
       </p:ext>
     </p:extLst>
   </p:cSld>
@@ -6405,7 +6405,7 @@
           <p:cNvPr id="7" name="creative_background">
             <a:extLst>
               <a:ext uri="{FF2B5EF4-FFF2-40B4-BE49-F238E27FC236}">
-                <a16:creationId xmlns:a16="http://schemas.microsoft.com/office/drawing/2014/main" id="{28ED5652-79A3-C950-77B9-256DC35096DE}"/>
+                <a16:creationId xmlns:a16="http://schemas.microsoft.com/office/drawing/2014/main" id="{FEF9649A-584F-EC25-F75F-60C67288AF76}"/>
               </a:ext>
             </a:extLst>
           </p:cNvPr>
@@ -6478,7 +6478,7 @@
           <a:bodyPr/>
           <a:lstStyle/>
           <a:p>
-            <a:fld id="{52C30056-F7E3-48DE-B485-350B3C114D69}" type="datetimeFigureOut">
+            <a:fld id="{22B1A858-2238-4D50-A136-D8298B9D7581}" type="datetimeFigureOut">
               <a:rPr lang="en-US" smtClean="0"/>
               <a:t>10/3/2026</a:t>
             </a:fld>
@@ -6520,7 +6520,7 @@
           <a:bodyPr/>
           <a:lstStyle/>
           <a:p>
-            <a:fld id="{8B33DAD4-768E-42FF-9F37-25C31ACC81D1}" type="slidenum">
+            <a:fld id="{6B7AFC5B-9B31-47DE-8C26-4C4AD0A46382}" type="slidenum">
               <a:rPr lang="en-US" smtClean="0"/>
               <a:t>‹#›</a:t>
             </a:fld>
@@ -6533,7 +6533,7 @@
           <p:cNvPr id="8" name="item_1_title">
             <a:extLst>
               <a:ext uri="{FF2B5EF4-FFF2-40B4-BE49-F238E27FC236}">
-                <a16:creationId xmlns:a16="http://schemas.microsoft.com/office/drawing/2014/main" id="{DEE3D443-B53A-5C13-8696-66E5930FD5E1}"/>
+                <a16:creationId xmlns:a16="http://schemas.microsoft.com/office/drawing/2014/main" id="{6AE206F9-22BB-E89C-668E-BE7E55DA8563}"/>
               </a:ext>
             </a:extLst>
           </p:cNvPr>
@@ -6583,7 +6583,7 @@
           <p:cNvPr id="9" name="item_1">
             <a:extLst>
               <a:ext uri="{FF2B5EF4-FFF2-40B4-BE49-F238E27FC236}">
-                <a16:creationId xmlns:a16="http://schemas.microsoft.com/office/drawing/2014/main" id="{9D8D825C-7BCE-1CB8-C354-75323D60ABD9}"/>
+                <a16:creationId xmlns:a16="http://schemas.microsoft.com/office/drawing/2014/main" id="{D2F8C1A9-1DBD-E0E8-5DA1-C132B50F2661}"/>
               </a:ext>
             </a:extLst>
           </p:cNvPr>
@@ -6631,7 +6631,7 @@
           <p:cNvPr id="10" name="item_2_title">
             <a:extLst>
               <a:ext uri="{FF2B5EF4-FFF2-40B4-BE49-F238E27FC236}">
-                <a16:creationId xmlns:a16="http://schemas.microsoft.com/office/drawing/2014/main" id="{4CE45EF3-CC76-E553-B939-F06E1FA74B67}"/>
+                <a16:creationId xmlns:a16="http://schemas.microsoft.com/office/drawing/2014/main" id="{01F510E0-3593-61C9-734E-228079879C6E}"/>
               </a:ext>
             </a:extLst>
           </p:cNvPr>
@@ -6684,7 +6684,7 @@
           <p:cNvPr id="11" name="item_2">
             <a:extLst>
               <a:ext uri="{FF2B5EF4-FFF2-40B4-BE49-F238E27FC236}">
-                <a16:creationId xmlns:a16="http://schemas.microsoft.com/office/drawing/2014/main" id="{389D2EC4-57AB-BEF5-EB3B-77B9F70F5FF1}"/>
+                <a16:creationId xmlns:a16="http://schemas.microsoft.com/office/drawing/2014/main" id="{C2AFACD3-D71D-7BBD-DBE0-01F34547F00F}"/>
               </a:ext>
             </a:extLst>
           </p:cNvPr>
@@ -6732,7 +6732,7 @@
           <p:cNvPr id="12" name="item_3_title">
             <a:extLst>
               <a:ext uri="{FF2B5EF4-FFF2-40B4-BE49-F238E27FC236}">
-                <a16:creationId xmlns:a16="http://schemas.microsoft.com/office/drawing/2014/main" id="{3FC28D34-CDA0-9B92-9CB7-81A46C73CC4C}"/>
+                <a16:creationId xmlns:a16="http://schemas.microsoft.com/office/drawing/2014/main" id="{9842DF2A-17F2-DFE5-A221-70AB3E7A4F6E}"/>
               </a:ext>
             </a:extLst>
           </p:cNvPr>
@@ -6785,7 +6785,7 @@
           <p:cNvPr id="13" name="item_3">
             <a:extLst>
               <a:ext uri="{FF2B5EF4-FFF2-40B4-BE49-F238E27FC236}">
-                <a16:creationId xmlns:a16="http://schemas.microsoft.com/office/drawing/2014/main" id="{39CB31CA-F5AF-9321-9FEF-1B46213C14A3}"/>
+                <a16:creationId xmlns:a16="http://schemas.microsoft.com/office/drawing/2014/main" id="{7DC419A2-106D-5DCA-D6CF-F5085B48790B}"/>
               </a:ext>
             </a:extLst>
           </p:cNvPr>
@@ -6833,7 +6833,7 @@
           <p:cNvPr id="14" name="item_4_title">
             <a:extLst>
               <a:ext uri="{FF2B5EF4-FFF2-40B4-BE49-F238E27FC236}">
-                <a16:creationId xmlns:a16="http://schemas.microsoft.com/office/drawing/2014/main" id="{C26C42AA-0F3C-0B84-8602-E8CB6A9366E8}"/>
+                <a16:creationId xmlns:a16="http://schemas.microsoft.com/office/drawing/2014/main" id="{7C997BE5-5F22-B797-4BCC-4D100C231913}"/>
               </a:ext>
             </a:extLst>
           </p:cNvPr>
@@ -6886,7 +6886,7 @@
           <p:cNvPr id="15" name="item_4">
             <a:extLst>
               <a:ext uri="{FF2B5EF4-FFF2-40B4-BE49-F238E27FC236}">
-                <a16:creationId xmlns:a16="http://schemas.microsoft.com/office/drawing/2014/main" id="{17E6B061-4B81-298F-8CF6-0BA1B9D46CF4}"/>
+                <a16:creationId xmlns:a16="http://schemas.microsoft.com/office/drawing/2014/main" id="{816C4A43-691B-35B4-15D2-1C2805465289}"/>
               </a:ext>
             </a:extLst>
           </p:cNvPr>
@@ -6934,7 +6934,7 @@
           <p:cNvPr id="16" name="source">
             <a:extLst>
               <a:ext uri="{FF2B5EF4-FFF2-40B4-BE49-F238E27FC236}">
-                <a16:creationId xmlns:a16="http://schemas.microsoft.com/office/drawing/2014/main" id="{A9FED79E-BAFB-6CF2-F0FC-5E95E1E82E27}"/>
+                <a16:creationId xmlns:a16="http://schemas.microsoft.com/office/drawing/2014/main" id="{D2ECB4D7-0123-44A8-0A02-16EE503FAF0B}"/>
               </a:ext>
             </a:extLst>
           </p:cNvPr>
@@ -6989,7 +6989,7 @@
     </p:spTree>
     <p:extLst>
       <p:ext uri="{BB962C8B-B14F-4D97-AF65-F5344CB8AC3E}">
-        <p14:creationId xmlns:p14="http://schemas.microsoft.com/office/powerpoint/2010/main" val="1480426519"/>
+        <p14:creationId xmlns:p14="http://schemas.microsoft.com/office/powerpoint/2010/main" val="3482445124"/>
       </p:ext>
     </p:extLst>
   </p:cSld>
@@ -7021,7 +7021,7 @@
           <p:cNvPr id="7" name="creative_background">
             <a:extLst>
               <a:ext uri="{FF2B5EF4-FFF2-40B4-BE49-F238E27FC236}">
-                <a16:creationId xmlns:a16="http://schemas.microsoft.com/office/drawing/2014/main" id="{15D47360-8C10-875C-7CE1-CB095A3F0988}"/>
+                <a16:creationId xmlns:a16="http://schemas.microsoft.com/office/drawing/2014/main" id="{67655213-7195-8CD0-8967-F3B0D55A8683}"/>
               </a:ext>
             </a:extLst>
           </p:cNvPr>
@@ -7094,7 +7094,7 @@
           <a:bodyPr/>
           <a:lstStyle/>
           <a:p>
-            <a:fld id="{52C30056-F7E3-48DE-B485-350B3C114D69}" type="datetimeFigureOut">
+            <a:fld id="{22B1A858-2238-4D50-A136-D8298B9D7581}" type="datetimeFigureOut">
               <a:rPr lang="en-US" smtClean="0"/>
               <a:t>10/3/2026</a:t>
             </a:fld>
@@ -7136,7 +7136,7 @@
           <a:bodyPr/>
           <a:lstStyle/>
           <a:p>
-            <a:fld id="{8B33DAD4-768E-42FF-9F37-25C31ACC81D1}" type="slidenum">
+            <a:fld id="{6B7AFC5B-9B31-47DE-8C26-4C4AD0A46382}" type="slidenum">
               <a:rPr lang="en-US" smtClean="0"/>
               <a:t>‹#›</a:t>
             </a:fld>
@@ -7149,7 +7149,7 @@
           <p:cNvPr id="8" name="kpi_value_1">
             <a:extLst>
               <a:ext uri="{FF2B5EF4-FFF2-40B4-BE49-F238E27FC236}">
-                <a16:creationId xmlns:a16="http://schemas.microsoft.com/office/drawing/2014/main" id="{2F5C6D09-F23E-A37D-C661-79E1A35B7618}"/>
+                <a16:creationId xmlns:a16="http://schemas.microsoft.com/office/drawing/2014/main" id="{330C60FD-9FB2-91FE-2172-5DC6C8F7E4FB}"/>
               </a:ext>
             </a:extLst>
           </p:cNvPr>
@@ -7199,7 +7199,7 @@
           <p:cNvPr id="9" name="kpi_label_1">
             <a:extLst>
               <a:ext uri="{FF2B5EF4-FFF2-40B4-BE49-F238E27FC236}">
-                <a16:creationId xmlns:a16="http://schemas.microsoft.com/office/drawing/2014/main" id="{BDA3C625-4462-2CA8-0327-2196E048E561}"/>
+                <a16:creationId xmlns:a16="http://schemas.microsoft.com/office/drawing/2014/main" id="{6F174203-613B-2DEE-27CB-EA733DF7593D}"/>
               </a:ext>
             </a:extLst>
           </p:cNvPr>
@@ -7247,7 +7247,7 @@
           <p:cNvPr id="10" name="quote">
             <a:extLst>
               <a:ext uri="{FF2B5EF4-FFF2-40B4-BE49-F238E27FC236}">
-                <a16:creationId xmlns:a16="http://schemas.microsoft.com/office/drawing/2014/main" id="{FE3B7783-393B-BC14-5AB8-0C73AC07C2D2}"/>
+                <a16:creationId xmlns:a16="http://schemas.microsoft.com/office/drawing/2014/main" id="{A9E036FE-BC0D-C8EC-CE9B-B61ED489FC97}"/>
               </a:ext>
             </a:extLst>
           </p:cNvPr>
@@ -7297,7 +7297,7 @@
           <p:cNvPr id="11" name="attribution">
             <a:extLst>
               <a:ext uri="{FF2B5EF4-FFF2-40B4-BE49-F238E27FC236}">
-                <a16:creationId xmlns:a16="http://schemas.microsoft.com/office/drawing/2014/main" id="{E9B4B155-2064-F055-0622-AD4F5A8201DE}"/>
+                <a16:creationId xmlns:a16="http://schemas.microsoft.com/office/drawing/2014/main" id="{F4A5FC94-66D9-D114-1B43-E35975D782A4}"/>
               </a:ext>
             </a:extLst>
           </p:cNvPr>
@@ -7345,7 +7345,7 @@
           <p:cNvPr id="12" name="item_1_title">
             <a:extLst>
               <a:ext uri="{FF2B5EF4-FFF2-40B4-BE49-F238E27FC236}">
-                <a16:creationId xmlns:a16="http://schemas.microsoft.com/office/drawing/2014/main" id="{078B816A-3D2E-2733-5552-E280F5C7B6EC}"/>
+                <a16:creationId xmlns:a16="http://schemas.microsoft.com/office/drawing/2014/main" id="{A861FCD7-FC93-E818-0C40-D1CAC57DABB1}"/>
               </a:ext>
             </a:extLst>
           </p:cNvPr>
@@ -7398,7 +7398,7 @@
           <p:cNvPr id="13" name="item_1">
             <a:extLst>
               <a:ext uri="{FF2B5EF4-FFF2-40B4-BE49-F238E27FC236}">
-                <a16:creationId xmlns:a16="http://schemas.microsoft.com/office/drawing/2014/main" id="{35080BE3-87DA-3422-C720-947F4061C9AA}"/>
+                <a16:creationId xmlns:a16="http://schemas.microsoft.com/office/drawing/2014/main" id="{69D536B6-61A3-B5FD-61E7-898984ED8F1C}"/>
               </a:ext>
             </a:extLst>
           </p:cNvPr>
@@ -7446,7 +7446,7 @@
           <p:cNvPr id="14" name="source">
             <a:extLst>
               <a:ext uri="{FF2B5EF4-FFF2-40B4-BE49-F238E27FC236}">
-                <a16:creationId xmlns:a16="http://schemas.microsoft.com/office/drawing/2014/main" id="{959CCA6B-3B25-3CE4-389F-8DDD2D1040A0}"/>
+                <a16:creationId xmlns:a16="http://schemas.microsoft.com/office/drawing/2014/main" id="{58546F94-B107-5495-9A04-17DD2169FC74}"/>
               </a:ext>
             </a:extLst>
           </p:cNvPr>
@@ -7501,7 +7501,7 @@
     </p:spTree>
     <p:extLst>
       <p:ext uri="{BB962C8B-B14F-4D97-AF65-F5344CB8AC3E}">
-        <p14:creationId xmlns:p14="http://schemas.microsoft.com/office/powerpoint/2010/main" val="2320867645"/>
+        <p14:creationId xmlns:p14="http://schemas.microsoft.com/office/powerpoint/2010/main" val="734481145"/>
       </p:ext>
     </p:extLst>
   </p:cSld>
@@ -7533,7 +7533,7 @@
           <p:cNvPr id="7" name="creative_background">
             <a:extLst>
               <a:ext uri="{FF2B5EF4-FFF2-40B4-BE49-F238E27FC236}">
-                <a16:creationId xmlns:a16="http://schemas.microsoft.com/office/drawing/2014/main" id="{DD8A3404-8781-1CA6-0619-2CF9F7AD5E1F}"/>
+                <a16:creationId xmlns:a16="http://schemas.microsoft.com/office/drawing/2014/main" id="{A9C2A04D-E742-D992-FF48-7D91CE166267}"/>
               </a:ext>
             </a:extLst>
           </p:cNvPr>
@@ -7606,7 +7606,7 @@
           <a:bodyPr/>
           <a:lstStyle/>
           <a:p>
-            <a:fld id="{52C30056-F7E3-48DE-B485-350B3C114D69}" type="datetimeFigureOut">
+            <a:fld id="{22B1A858-2238-4D50-A136-D8298B9D7581}" type="datetimeFigureOut">
               <a:rPr lang="en-US" smtClean="0"/>
               <a:t>10/3/2026</a:t>
             </a:fld>
@@ -7648,7 +7648,7 @@
           <a:bodyPr/>
           <a:lstStyle/>
           <a:p>
-            <a:fld id="{8B33DAD4-768E-42FF-9F37-25C31ACC81D1}" type="slidenum">
+            <a:fld id="{6B7AFC5B-9B31-47DE-8C26-4C4AD0A46382}" type="slidenum">
               <a:rPr lang="en-US" smtClean="0"/>
               <a:t>‹#›</a:t>
             </a:fld>
@@ -7661,7 +7661,7 @@
           <p:cNvPr id="8" name="item_1_title">
             <a:extLst>
               <a:ext uri="{FF2B5EF4-FFF2-40B4-BE49-F238E27FC236}">
-                <a16:creationId xmlns:a16="http://schemas.microsoft.com/office/drawing/2014/main" id="{A0FA3F9F-77EA-8D49-E398-8B45B18D1F58}"/>
+                <a16:creationId xmlns:a16="http://schemas.microsoft.com/office/drawing/2014/main" id="{E516958C-CBC3-A064-61DB-4ADA6C8821AB}"/>
               </a:ext>
             </a:extLst>
           </p:cNvPr>
@@ -7711,7 +7711,7 @@
           <p:cNvPr id="9" name="item_1">
             <a:extLst>
               <a:ext uri="{FF2B5EF4-FFF2-40B4-BE49-F238E27FC236}">
-                <a16:creationId xmlns:a16="http://schemas.microsoft.com/office/drawing/2014/main" id="{E921DA0D-6D9D-6318-72A8-87AF4CCD2CD1}"/>
+                <a16:creationId xmlns:a16="http://schemas.microsoft.com/office/drawing/2014/main" id="{B299A6AA-F0E3-FB2D-E574-E375A058C4B3}"/>
               </a:ext>
             </a:extLst>
           </p:cNvPr>
@@ -7759,7 +7759,7 @@
           <p:cNvPr id="10" name="item_2_title">
             <a:extLst>
               <a:ext uri="{FF2B5EF4-FFF2-40B4-BE49-F238E27FC236}">
-                <a16:creationId xmlns:a16="http://schemas.microsoft.com/office/drawing/2014/main" id="{572ED237-20C6-06DE-002D-2D6489AC97E3}"/>
+                <a16:creationId xmlns:a16="http://schemas.microsoft.com/office/drawing/2014/main" id="{F3CEB3CE-2D3E-A67F-6AFE-051FA371531C}"/>
               </a:ext>
             </a:extLst>
           </p:cNvPr>
@@ -7812,7 +7812,7 @@
           <p:cNvPr id="11" name="item_2">
             <a:extLst>
               <a:ext uri="{FF2B5EF4-FFF2-40B4-BE49-F238E27FC236}">
-                <a16:creationId xmlns:a16="http://schemas.microsoft.com/office/drawing/2014/main" id="{9600DFE7-F96B-B47E-7284-70E3A1099D78}"/>
+                <a16:creationId xmlns:a16="http://schemas.microsoft.com/office/drawing/2014/main" id="{3E06B407-5A0B-24C3-2701-3E5FB08E7D77}"/>
               </a:ext>
             </a:extLst>
           </p:cNvPr>
@@ -7860,7 +7860,7 @@
           <p:cNvPr id="12" name="item_3_title">
             <a:extLst>
               <a:ext uri="{FF2B5EF4-FFF2-40B4-BE49-F238E27FC236}">
-                <a16:creationId xmlns:a16="http://schemas.microsoft.com/office/drawing/2014/main" id="{C4F9CD37-C627-F3AA-9BCC-9198D567E4B6}"/>
+                <a16:creationId xmlns:a16="http://schemas.microsoft.com/office/drawing/2014/main" id="{AED8EEF8-76F1-3E93-7B16-21726558EBA0}"/>
               </a:ext>
             </a:extLst>
           </p:cNvPr>
@@ -7913,7 +7913,7 @@
           <p:cNvPr id="13" name="item_3">
             <a:extLst>
               <a:ext uri="{FF2B5EF4-FFF2-40B4-BE49-F238E27FC236}">
-                <a16:creationId xmlns:a16="http://schemas.microsoft.com/office/drawing/2014/main" id="{41CFBB1A-C948-D545-F7BE-8ACBC41AF1AD}"/>
+                <a16:creationId xmlns:a16="http://schemas.microsoft.com/office/drawing/2014/main" id="{06FD95D9-A0E0-A585-85AB-11BC15ACA288}"/>
               </a:ext>
             </a:extLst>
           </p:cNvPr>
@@ -7961,7 +7961,7 @@
           <p:cNvPr id="14" name="source">
             <a:extLst>
               <a:ext uri="{FF2B5EF4-FFF2-40B4-BE49-F238E27FC236}">
-                <a16:creationId xmlns:a16="http://schemas.microsoft.com/office/drawing/2014/main" id="{728B2119-0105-C696-5A3C-9981056F5AE3}"/>
+                <a16:creationId xmlns:a16="http://schemas.microsoft.com/office/drawing/2014/main" id="{8A456BA0-F811-A3DD-4CFB-CF866C44B2EC}"/>
               </a:ext>
             </a:extLst>
           </p:cNvPr>
@@ -8016,7 +8016,7 @@
     </p:spTree>
     <p:extLst>
       <p:ext uri="{BB962C8B-B14F-4D97-AF65-F5344CB8AC3E}">
-        <p14:creationId xmlns:p14="http://schemas.microsoft.com/office/powerpoint/2010/main" val="3205124038"/>
+        <p14:creationId xmlns:p14="http://schemas.microsoft.com/office/powerpoint/2010/main" val="1472050076"/>
       </p:ext>
     </p:extLst>
   </p:cSld>
@@ -8048,7 +8048,7 @@
           <p:cNvPr id="7" name="creative_background">
             <a:extLst>
               <a:ext uri="{FF2B5EF4-FFF2-40B4-BE49-F238E27FC236}">
-                <a16:creationId xmlns:a16="http://schemas.microsoft.com/office/drawing/2014/main" id="{38CAB4BB-E0D3-D982-270A-24A27FBB9534}"/>
+                <a16:creationId xmlns:a16="http://schemas.microsoft.com/office/drawing/2014/main" id="{81DA9773-DEE3-6885-14BF-BBA1AB698B6A}"/>
               </a:ext>
             </a:extLst>
           </p:cNvPr>
@@ -8121,7 +8121,7 @@
           <a:bodyPr/>
           <a:lstStyle/>
           <a:p>
-            <a:fld id="{52C30056-F7E3-48DE-B485-350B3C114D69}" type="datetimeFigureOut">
+            <a:fld id="{22B1A858-2238-4D50-A136-D8298B9D7581}" type="datetimeFigureOut">
               <a:rPr lang="en-US" smtClean="0"/>
               <a:t>10/3/2026</a:t>
             </a:fld>
@@ -8163,7 +8163,7 @@
           <a:bodyPr/>
           <a:lstStyle/>
           <a:p>
-            <a:fld id="{8B33DAD4-768E-42FF-9F37-25C31ACC81D1}" type="slidenum">
+            <a:fld id="{6B7AFC5B-9B31-47DE-8C26-4C4AD0A46382}" type="slidenum">
               <a:rPr lang="en-US" smtClean="0"/>
               <a:t>‹#›</a:t>
             </a:fld>
@@ -8176,7 +8176,7 @@
           <p:cNvPr id="8" name="marker_1">
             <a:extLst>
               <a:ext uri="{FF2B5EF4-FFF2-40B4-BE49-F238E27FC236}">
-                <a16:creationId xmlns:a16="http://schemas.microsoft.com/office/drawing/2014/main" id="{F71E7937-C9E8-F18E-9C0C-4C82B6A2F3CE}"/>
+                <a16:creationId xmlns:a16="http://schemas.microsoft.com/office/drawing/2014/main" id="{E7FB97F2-2912-A240-7F4D-5CDA0DE270EB}"/>
               </a:ext>
             </a:extLst>
           </p:cNvPr>
@@ -8232,7 +8232,7 @@
           <p:cNvPr id="9" name="item_1_title">
             <a:extLst>
               <a:ext uri="{FF2B5EF4-FFF2-40B4-BE49-F238E27FC236}">
-                <a16:creationId xmlns:a16="http://schemas.microsoft.com/office/drawing/2014/main" id="{E2997D0B-D693-D143-1D83-BA584B8F6F45}"/>
+                <a16:creationId xmlns:a16="http://schemas.microsoft.com/office/drawing/2014/main" id="{6F4F6CD0-0250-EBB6-5F87-B5577B4129C5}"/>
               </a:ext>
             </a:extLst>
           </p:cNvPr>
@@ -8285,7 +8285,7 @@
           <p:cNvPr id="10" name="item_1">
             <a:extLst>
               <a:ext uri="{FF2B5EF4-FFF2-40B4-BE49-F238E27FC236}">
-                <a16:creationId xmlns:a16="http://schemas.microsoft.com/office/drawing/2014/main" id="{6B05A367-F038-8AE3-9E08-626D14973AEB}"/>
+                <a16:creationId xmlns:a16="http://schemas.microsoft.com/office/drawing/2014/main" id="{4F308758-BB17-8486-970D-3C6C443E3C3A}"/>
               </a:ext>
             </a:extLst>
           </p:cNvPr>
@@ -8333,7 +8333,7 @@
           <p:cNvPr id="11" name="marker_2">
             <a:extLst>
               <a:ext uri="{FF2B5EF4-FFF2-40B4-BE49-F238E27FC236}">
-                <a16:creationId xmlns:a16="http://schemas.microsoft.com/office/drawing/2014/main" id="{67C071A5-4330-BE29-F60B-4E7F1B4A6C7A}"/>
+                <a16:creationId xmlns:a16="http://schemas.microsoft.com/office/drawing/2014/main" id="{9460C49C-F339-CDAC-CAFB-B36CAABC1681}"/>
               </a:ext>
             </a:extLst>
           </p:cNvPr>
@@ -8389,7 +8389,7 @@
           <p:cNvPr id="12" name="item_2_title">
             <a:extLst>
               <a:ext uri="{FF2B5EF4-FFF2-40B4-BE49-F238E27FC236}">
-                <a16:creationId xmlns:a16="http://schemas.microsoft.com/office/drawing/2014/main" id="{10F186B3-A27F-6640-7A62-28E58D89EA3D}"/>
+                <a16:creationId xmlns:a16="http://schemas.microsoft.com/office/drawing/2014/main" id="{BFE97362-8A4F-45BD-BDBB-8F72111F89FC}"/>
               </a:ext>
             </a:extLst>
           </p:cNvPr>
@@ -8442,7 +8442,7 @@
           <p:cNvPr id="13" name="item_2">
             <a:extLst>
               <a:ext uri="{FF2B5EF4-FFF2-40B4-BE49-F238E27FC236}">
-                <a16:creationId xmlns:a16="http://schemas.microsoft.com/office/drawing/2014/main" id="{37F3BCAE-7D20-024D-DF49-260A33021A90}"/>
+                <a16:creationId xmlns:a16="http://schemas.microsoft.com/office/drawing/2014/main" id="{02460ADD-C37F-A3BF-C3E2-DD3D47B4CF93}"/>
               </a:ext>
             </a:extLst>
           </p:cNvPr>
@@ -8490,7 +8490,7 @@
           <p:cNvPr id="14" name="source">
             <a:extLst>
               <a:ext uri="{FF2B5EF4-FFF2-40B4-BE49-F238E27FC236}">
-                <a16:creationId xmlns:a16="http://schemas.microsoft.com/office/drawing/2014/main" id="{63331D44-F4E6-B300-0CAA-D55CA97BFE95}"/>
+                <a16:creationId xmlns:a16="http://schemas.microsoft.com/office/drawing/2014/main" id="{B3F76ECE-BAB4-997D-5672-BBAB19832109}"/>
               </a:ext>
             </a:extLst>
           </p:cNvPr>
@@ -8545,7 +8545,7 @@
     </p:spTree>
     <p:extLst>
       <p:ext uri="{BB962C8B-B14F-4D97-AF65-F5344CB8AC3E}">
-        <p14:creationId xmlns:p14="http://schemas.microsoft.com/office/powerpoint/2010/main" val="2563523277"/>
+        <p14:creationId xmlns:p14="http://schemas.microsoft.com/office/powerpoint/2010/main" val="579154628"/>
       </p:ext>
     </p:extLst>
   </p:cSld>
@@ -8577,7 +8577,7 @@
           <p:cNvPr id="7" name="creative_background">
             <a:extLst>
               <a:ext uri="{FF2B5EF4-FFF2-40B4-BE49-F238E27FC236}">
-                <a16:creationId xmlns:a16="http://schemas.microsoft.com/office/drawing/2014/main" id="{B8A836FF-0393-B18F-A722-A549757DA86A}"/>
+                <a16:creationId xmlns:a16="http://schemas.microsoft.com/office/drawing/2014/main" id="{6DAAD4EE-6997-D582-D7A7-2B0AE6A2C120}"/>
               </a:ext>
             </a:extLst>
           </p:cNvPr>
@@ -8650,7 +8650,7 @@
           <a:bodyPr/>
           <a:lstStyle/>
           <a:p>
-            <a:fld id="{52C30056-F7E3-48DE-B485-350B3C114D69}" type="datetimeFigureOut">
+            <a:fld id="{22B1A858-2238-4D50-A136-D8298B9D7581}" type="datetimeFigureOut">
               <a:rPr lang="en-US" smtClean="0"/>
               <a:t>10/3/2026</a:t>
             </a:fld>
@@ -8692,7 +8692,7 @@
           <a:bodyPr/>
           <a:lstStyle/>
           <a:p>
-            <a:fld id="{8B33DAD4-768E-42FF-9F37-25C31ACC81D1}" type="slidenum">
+            <a:fld id="{6B7AFC5B-9B31-47DE-8C26-4C4AD0A46382}" type="slidenum">
               <a:rPr lang="en-US" smtClean="0"/>
               <a:t>‹#›</a:t>
             </a:fld>
@@ -8705,7 +8705,7 @@
           <p:cNvPr id="8" name="kpi_value_1">
             <a:extLst>
               <a:ext uri="{FF2B5EF4-FFF2-40B4-BE49-F238E27FC236}">
-                <a16:creationId xmlns:a16="http://schemas.microsoft.com/office/drawing/2014/main" id="{89D0B4D8-DD3D-6F21-4108-9F610E29E31C}"/>
+                <a16:creationId xmlns:a16="http://schemas.microsoft.com/office/drawing/2014/main" id="{E99D0139-7485-15B4-9E55-CB0AF48C2909}"/>
               </a:ext>
             </a:extLst>
           </p:cNvPr>
@@ -8755,7 +8755,7 @@
           <p:cNvPr id="9" name="kpi_label_1">
             <a:extLst>
               <a:ext uri="{FF2B5EF4-FFF2-40B4-BE49-F238E27FC236}">
-                <a16:creationId xmlns:a16="http://schemas.microsoft.com/office/drawing/2014/main" id="{E21D351A-09C9-CE64-C657-9D5D1DC973CE}"/>
+                <a16:creationId xmlns:a16="http://schemas.microsoft.com/office/drawing/2014/main" id="{17BB2D7D-08DA-51FE-CAE2-3E98238F5693}"/>
               </a:ext>
             </a:extLst>
           </p:cNvPr>
@@ -8803,7 +8803,7 @@
           <p:cNvPr id="10" name="quote">
             <a:extLst>
               <a:ext uri="{FF2B5EF4-FFF2-40B4-BE49-F238E27FC236}">
-                <a16:creationId xmlns:a16="http://schemas.microsoft.com/office/drawing/2014/main" id="{09C7B905-7C6D-4B90-EF21-B835403682E2}"/>
+                <a16:creationId xmlns:a16="http://schemas.microsoft.com/office/drawing/2014/main" id="{A03AC47D-5107-A44C-2EF0-BA445E7F10E8}"/>
               </a:ext>
             </a:extLst>
           </p:cNvPr>
@@ -8853,7 +8853,7 @@
           <p:cNvPr id="11" name="attribution">
             <a:extLst>
               <a:ext uri="{FF2B5EF4-FFF2-40B4-BE49-F238E27FC236}">
-                <a16:creationId xmlns:a16="http://schemas.microsoft.com/office/drawing/2014/main" id="{65E7F53A-DEE0-89E4-0CED-B2F478843496}"/>
+                <a16:creationId xmlns:a16="http://schemas.microsoft.com/office/drawing/2014/main" id="{CCDA5796-7753-4A2E-B4E0-7332750705CF}"/>
               </a:ext>
             </a:extLst>
           </p:cNvPr>
@@ -8901,7 +8901,7 @@
           <p:cNvPr id="12" name="item_1_title">
             <a:extLst>
               <a:ext uri="{FF2B5EF4-FFF2-40B4-BE49-F238E27FC236}">
-                <a16:creationId xmlns:a16="http://schemas.microsoft.com/office/drawing/2014/main" id="{7F82AE37-183D-B051-9058-26ED56F9C686}"/>
+                <a16:creationId xmlns:a16="http://schemas.microsoft.com/office/drawing/2014/main" id="{92C371D3-25B9-D238-4CD5-6BE7023987E1}"/>
               </a:ext>
             </a:extLst>
           </p:cNvPr>
@@ -8954,7 +8954,7 @@
           <p:cNvPr id="13" name="item_1">
             <a:extLst>
               <a:ext uri="{FF2B5EF4-FFF2-40B4-BE49-F238E27FC236}">
-                <a16:creationId xmlns:a16="http://schemas.microsoft.com/office/drawing/2014/main" id="{FAB25ECD-EF1F-84E6-8973-6FC249F180B8}"/>
+                <a16:creationId xmlns:a16="http://schemas.microsoft.com/office/drawing/2014/main" id="{0D2FA677-DD37-6F2A-27D0-EEEE93072828}"/>
               </a:ext>
             </a:extLst>
           </p:cNvPr>
@@ -9002,7 +9002,7 @@
           <p:cNvPr id="14" name="source">
             <a:extLst>
               <a:ext uri="{FF2B5EF4-FFF2-40B4-BE49-F238E27FC236}">
-                <a16:creationId xmlns:a16="http://schemas.microsoft.com/office/drawing/2014/main" id="{207D806D-BEBA-1685-7E13-B67258B4BB7C}"/>
+                <a16:creationId xmlns:a16="http://schemas.microsoft.com/office/drawing/2014/main" id="{EA5FD906-6393-C619-64EF-FED216482030}"/>
               </a:ext>
             </a:extLst>
           </p:cNvPr>
@@ -9057,7 +9057,7 @@
     </p:spTree>
     <p:extLst>
       <p:ext uri="{BB962C8B-B14F-4D97-AF65-F5344CB8AC3E}">
-        <p14:creationId xmlns:p14="http://schemas.microsoft.com/office/powerpoint/2010/main" val="3546946089"/>
+        <p14:creationId xmlns:p14="http://schemas.microsoft.com/office/powerpoint/2010/main" val="68521996"/>
       </p:ext>
     </p:extLst>
   </p:cSld>
@@ -9089,7 +9089,7 @@
           <p:cNvPr id="7" name="creative_background">
             <a:extLst>
               <a:ext uri="{FF2B5EF4-FFF2-40B4-BE49-F238E27FC236}">
-                <a16:creationId xmlns:a16="http://schemas.microsoft.com/office/drawing/2014/main" id="{DF6D7368-8E39-4827-896F-7D940EA1C127}"/>
+                <a16:creationId xmlns:a16="http://schemas.microsoft.com/office/drawing/2014/main" id="{9BBBE296-F43C-15E5-3A1C-00E2816527F9}"/>
               </a:ext>
             </a:extLst>
           </p:cNvPr>
@@ -9162,7 +9162,7 @@
           <a:bodyPr/>
           <a:lstStyle/>
           <a:p>
-            <a:fld id="{52C30056-F7E3-48DE-B485-350B3C114D69}" type="datetimeFigureOut">
+            <a:fld id="{22B1A858-2238-4D50-A136-D8298B9D7581}" type="datetimeFigureOut">
               <a:rPr lang="en-US" smtClean="0"/>
               <a:t>10/3/2026</a:t>
             </a:fld>
@@ -9204,7 +9204,7 @@
           <a:bodyPr/>
           <a:lstStyle/>
           <a:p>
-            <a:fld id="{8B33DAD4-768E-42FF-9F37-25C31ACC81D1}" type="slidenum">
+            <a:fld id="{6B7AFC5B-9B31-47DE-8C26-4C4AD0A46382}" type="slidenum">
               <a:rPr lang="en-US" smtClean="0"/>
               <a:t>‹#›</a:t>
             </a:fld>
@@ -9217,7 +9217,7 @@
           <p:cNvPr id="8" name="marker_1">
             <a:extLst>
               <a:ext uri="{FF2B5EF4-FFF2-40B4-BE49-F238E27FC236}">
-                <a16:creationId xmlns:a16="http://schemas.microsoft.com/office/drawing/2014/main" id="{F11AB9EE-BE6E-6482-DC99-6614DB4BF1CD}"/>
+                <a16:creationId xmlns:a16="http://schemas.microsoft.com/office/drawing/2014/main" id="{8F4E043C-8F26-BEE3-6046-FF3BA5ECEA69}"/>
               </a:ext>
             </a:extLst>
           </p:cNvPr>
@@ -9273,7 +9273,7 @@
           <p:cNvPr id="9" name="item_1">
             <a:extLst>
               <a:ext uri="{FF2B5EF4-FFF2-40B4-BE49-F238E27FC236}">
-                <a16:creationId xmlns:a16="http://schemas.microsoft.com/office/drawing/2014/main" id="{2AB7549E-95BE-C409-576C-40CD991FFAE8}"/>
+                <a16:creationId xmlns:a16="http://schemas.microsoft.com/office/drawing/2014/main" id="{A191CD1E-577F-DD88-CA86-5457BC7D81B6}"/>
               </a:ext>
             </a:extLst>
           </p:cNvPr>
@@ -9321,7 +9321,7 @@
           <p:cNvPr id="10" name="marker_2">
             <a:extLst>
               <a:ext uri="{FF2B5EF4-FFF2-40B4-BE49-F238E27FC236}">
-                <a16:creationId xmlns:a16="http://schemas.microsoft.com/office/drawing/2014/main" id="{C46E6A98-B4A2-D3AD-A2D7-AE041A1B4AA6}"/>
+                <a16:creationId xmlns:a16="http://schemas.microsoft.com/office/drawing/2014/main" id="{ED503F27-7425-4019-4F25-65C244A3D31F}"/>
               </a:ext>
             </a:extLst>
           </p:cNvPr>
@@ -9377,7 +9377,7 @@
           <p:cNvPr id="11" name="item_2">
             <a:extLst>
               <a:ext uri="{FF2B5EF4-FFF2-40B4-BE49-F238E27FC236}">
-                <a16:creationId xmlns:a16="http://schemas.microsoft.com/office/drawing/2014/main" id="{0B8CD2ED-541F-CA5A-E51E-52B9E72E127B}"/>
+                <a16:creationId xmlns:a16="http://schemas.microsoft.com/office/drawing/2014/main" id="{882A4DEB-6978-8674-A067-C1FBC0B6366E}"/>
               </a:ext>
             </a:extLst>
           </p:cNvPr>
@@ -9425,7 +9425,7 @@
           <p:cNvPr id="12" name="marker_3">
             <a:extLst>
               <a:ext uri="{FF2B5EF4-FFF2-40B4-BE49-F238E27FC236}">
-                <a16:creationId xmlns:a16="http://schemas.microsoft.com/office/drawing/2014/main" id="{A5A0D7EE-B6AB-DA9F-1C24-3D005E68853A}"/>
+                <a16:creationId xmlns:a16="http://schemas.microsoft.com/office/drawing/2014/main" id="{8FA657CD-05D4-DF88-F9BB-E1084043115F}"/>
               </a:ext>
             </a:extLst>
           </p:cNvPr>
@@ -9481,7 +9481,7 @@
           <p:cNvPr id="13" name="item_3">
             <a:extLst>
               <a:ext uri="{FF2B5EF4-FFF2-40B4-BE49-F238E27FC236}">
-                <a16:creationId xmlns:a16="http://schemas.microsoft.com/office/drawing/2014/main" id="{E5AD973A-B39B-0C14-6121-4CDAB53E82E1}"/>
+                <a16:creationId xmlns:a16="http://schemas.microsoft.com/office/drawing/2014/main" id="{80C10F75-7397-93E3-E493-60041210AD70}"/>
               </a:ext>
             </a:extLst>
           </p:cNvPr>
@@ -9529,7 +9529,7 @@
           <p:cNvPr id="14" name="marker_4">
             <a:extLst>
               <a:ext uri="{FF2B5EF4-FFF2-40B4-BE49-F238E27FC236}">
-                <a16:creationId xmlns:a16="http://schemas.microsoft.com/office/drawing/2014/main" id="{63CF45E6-A296-69C9-C576-034260444B77}"/>
+                <a16:creationId xmlns:a16="http://schemas.microsoft.com/office/drawing/2014/main" id="{2B18F3D1-592B-1E89-B3C3-D00E35B39958}"/>
               </a:ext>
             </a:extLst>
           </p:cNvPr>
@@ -9585,7 +9585,7 @@
           <p:cNvPr id="15" name="item_4">
             <a:extLst>
               <a:ext uri="{FF2B5EF4-FFF2-40B4-BE49-F238E27FC236}">
-                <a16:creationId xmlns:a16="http://schemas.microsoft.com/office/drawing/2014/main" id="{36DE6CE3-1600-D433-2826-162162603601}"/>
+                <a16:creationId xmlns:a16="http://schemas.microsoft.com/office/drawing/2014/main" id="{268863DA-7951-6C09-4FF2-4C21D90516B7}"/>
               </a:ext>
             </a:extLst>
           </p:cNvPr>
@@ -9633,7 +9633,7 @@
           <p:cNvPr id="16" name="source">
             <a:extLst>
               <a:ext uri="{FF2B5EF4-FFF2-40B4-BE49-F238E27FC236}">
-                <a16:creationId xmlns:a16="http://schemas.microsoft.com/office/drawing/2014/main" id="{FF663D66-6FCC-9A67-71EE-ACB3DD922C07}"/>
+                <a16:creationId xmlns:a16="http://schemas.microsoft.com/office/drawing/2014/main" id="{80937C49-2658-47D8-2BA5-1F971F82CDD7}"/>
               </a:ext>
             </a:extLst>
           </p:cNvPr>
@@ -9688,7 +9688,7 @@
     </p:spTree>
     <p:extLst>
       <p:ext uri="{BB962C8B-B14F-4D97-AF65-F5344CB8AC3E}">
-        <p14:creationId xmlns:p14="http://schemas.microsoft.com/office/powerpoint/2010/main" val="535565551"/>
+        <p14:creationId xmlns:p14="http://schemas.microsoft.com/office/powerpoint/2010/main" val="1620936896"/>
       </p:ext>
     </p:extLst>
   </p:cSld>
@@ -9720,7 +9720,7 @@
           <p:cNvPr id="7" name="creative_background">
             <a:extLst>
               <a:ext uri="{FF2B5EF4-FFF2-40B4-BE49-F238E27FC236}">
-                <a16:creationId xmlns:a16="http://schemas.microsoft.com/office/drawing/2014/main" id="{19C96F84-7132-FBFE-3AF9-54DD1828041C}"/>
+                <a16:creationId xmlns:a16="http://schemas.microsoft.com/office/drawing/2014/main" id="{B76BD4EC-9B49-12B8-97B3-0540C3917D10}"/>
               </a:ext>
             </a:extLst>
           </p:cNvPr>
@@ -9793,7 +9793,7 @@
           <a:bodyPr/>
           <a:lstStyle/>
           <a:p>
-            <a:fld id="{52C30056-F7E3-48DE-B485-350B3C114D69}" type="datetimeFigureOut">
+            <a:fld id="{22B1A858-2238-4D50-A136-D8298B9D7581}" type="datetimeFigureOut">
               <a:rPr lang="en-US" smtClean="0"/>
               <a:t>10/3/2026</a:t>
             </a:fld>
@@ -9835,7 +9835,7 @@
           <a:bodyPr/>
           <a:lstStyle/>
           <a:p>
-            <a:fld id="{8B33DAD4-768E-42FF-9F37-25C31ACC81D1}" type="slidenum">
+            <a:fld id="{6B7AFC5B-9B31-47DE-8C26-4C4AD0A46382}" type="slidenum">
               <a:rPr lang="en-US" smtClean="0"/>
               <a:t>‹#›</a:t>
             </a:fld>
@@ -9848,7 +9848,7 @@
           <p:cNvPr id="8" name="decisions_title">
             <a:extLst>
               <a:ext uri="{FF2B5EF4-FFF2-40B4-BE49-F238E27FC236}">
-                <a16:creationId xmlns:a16="http://schemas.microsoft.com/office/drawing/2014/main" id="{459906E0-5969-5D3F-7C3A-8DC62B90325C}"/>
+                <a16:creationId xmlns:a16="http://schemas.microsoft.com/office/drawing/2014/main" id="{C92123D6-286B-283E-5C9D-8AA4BBD0CD88}"/>
               </a:ext>
             </a:extLst>
           </p:cNvPr>
@@ -9898,7 +9898,7 @@
           <p:cNvPr id="9" name="decisions">
             <a:extLst>
               <a:ext uri="{FF2B5EF4-FFF2-40B4-BE49-F238E27FC236}">
-                <a16:creationId xmlns:a16="http://schemas.microsoft.com/office/drawing/2014/main" id="{97CD23B3-7298-1275-09F1-1DDACD3D690A}"/>
+                <a16:creationId xmlns:a16="http://schemas.microsoft.com/office/drawing/2014/main" id="{4A8D850E-5962-06E3-3ABC-0BA21C2C1DE4}"/>
               </a:ext>
             </a:extLst>
           </p:cNvPr>
@@ -9941,7 +9941,7 @@
           <p:cNvPr id="10" name="item_1_title">
             <a:extLst>
               <a:ext uri="{FF2B5EF4-FFF2-40B4-BE49-F238E27FC236}">
-                <a16:creationId xmlns:a16="http://schemas.microsoft.com/office/drawing/2014/main" id="{83B57EB6-07A0-90F0-C770-74F9D0E4DDCB}"/>
+                <a16:creationId xmlns:a16="http://schemas.microsoft.com/office/drawing/2014/main" id="{2BF8F81C-AECA-9F6F-877A-7EC0DE6813CC}"/>
               </a:ext>
             </a:extLst>
           </p:cNvPr>
@@ -9994,7 +9994,7 @@
           <p:cNvPr id="11" name="item_1">
             <a:extLst>
               <a:ext uri="{FF2B5EF4-FFF2-40B4-BE49-F238E27FC236}">
-                <a16:creationId xmlns:a16="http://schemas.microsoft.com/office/drawing/2014/main" id="{1B725EF4-643B-8E3B-1556-2B849970B0AB}"/>
+                <a16:creationId xmlns:a16="http://schemas.microsoft.com/office/drawing/2014/main" id="{4BC378CE-A830-6014-3DE2-3BF5604BB790}"/>
               </a:ext>
             </a:extLst>
           </p:cNvPr>
@@ -10042,7 +10042,7 @@
           <p:cNvPr id="12" name="item_2_title">
             <a:extLst>
               <a:ext uri="{FF2B5EF4-FFF2-40B4-BE49-F238E27FC236}">
-                <a16:creationId xmlns:a16="http://schemas.microsoft.com/office/drawing/2014/main" id="{F8A0FAB8-7678-5E30-54A9-B59428BC77D8}"/>
+                <a16:creationId xmlns:a16="http://schemas.microsoft.com/office/drawing/2014/main" id="{6EE00D1F-F86C-B050-1775-82AC929D885B}"/>
               </a:ext>
             </a:extLst>
           </p:cNvPr>
@@ -10095,7 +10095,7 @@
           <p:cNvPr id="13" name="item_2">
             <a:extLst>
               <a:ext uri="{FF2B5EF4-FFF2-40B4-BE49-F238E27FC236}">
-                <a16:creationId xmlns:a16="http://schemas.microsoft.com/office/drawing/2014/main" id="{B5E4B379-6020-041C-D5B9-08AA6EDB0F8B}"/>
+                <a16:creationId xmlns:a16="http://schemas.microsoft.com/office/drawing/2014/main" id="{72B22263-321C-AC8D-A355-7AFD3A2C8E6C}"/>
               </a:ext>
             </a:extLst>
           </p:cNvPr>
@@ -10143,7 +10143,7 @@
           <p:cNvPr id="14" name="item_3_title">
             <a:extLst>
               <a:ext uri="{FF2B5EF4-FFF2-40B4-BE49-F238E27FC236}">
-                <a16:creationId xmlns:a16="http://schemas.microsoft.com/office/drawing/2014/main" id="{D3F139B5-210F-2919-E8E0-0878439A1DD5}"/>
+                <a16:creationId xmlns:a16="http://schemas.microsoft.com/office/drawing/2014/main" id="{07ED4051-5847-EEDB-60E9-DFA6F64E9DBA}"/>
               </a:ext>
             </a:extLst>
           </p:cNvPr>
@@ -10196,7 +10196,7 @@
           <p:cNvPr id="15" name="item_3">
             <a:extLst>
               <a:ext uri="{FF2B5EF4-FFF2-40B4-BE49-F238E27FC236}">
-                <a16:creationId xmlns:a16="http://schemas.microsoft.com/office/drawing/2014/main" id="{C6247314-C9B8-02A2-8E89-8F0C502D3A08}"/>
+                <a16:creationId xmlns:a16="http://schemas.microsoft.com/office/drawing/2014/main" id="{2BD8A056-DF48-ABCC-7D1D-0916D3D3C2A1}"/>
               </a:ext>
             </a:extLst>
           </p:cNvPr>
@@ -10244,7 +10244,7 @@
           <p:cNvPr id="16" name="source">
             <a:extLst>
               <a:ext uri="{FF2B5EF4-FFF2-40B4-BE49-F238E27FC236}">
-                <a16:creationId xmlns:a16="http://schemas.microsoft.com/office/drawing/2014/main" id="{8760482B-F0FF-398C-AD0E-C479F3F63E2B}"/>
+                <a16:creationId xmlns:a16="http://schemas.microsoft.com/office/drawing/2014/main" id="{8ACF6886-B63E-DA20-5BDE-5A9EEDD8341C}"/>
               </a:ext>
             </a:extLst>
           </p:cNvPr>
@@ -10299,7 +10299,7 @@
     </p:spTree>
     <p:extLst>
       <p:ext uri="{BB962C8B-B14F-4D97-AF65-F5344CB8AC3E}">
-        <p14:creationId xmlns:p14="http://schemas.microsoft.com/office/powerpoint/2010/main" val="1285481790"/>
+        <p14:creationId xmlns:p14="http://schemas.microsoft.com/office/powerpoint/2010/main" val="3652090918"/>
       </p:ext>
     </p:extLst>
   </p:cSld>
@@ -10331,7 +10331,7 @@
           <p:cNvPr id="7" name="creative_background">
             <a:extLst>
               <a:ext uri="{FF2B5EF4-FFF2-40B4-BE49-F238E27FC236}">
-                <a16:creationId xmlns:a16="http://schemas.microsoft.com/office/drawing/2014/main" id="{F07FF9D4-8BE8-FF77-991E-64F8873001C0}"/>
+                <a16:creationId xmlns:a16="http://schemas.microsoft.com/office/drawing/2014/main" id="{3517074E-9FE8-379E-3F03-1C2D96159851}"/>
               </a:ext>
             </a:extLst>
           </p:cNvPr>
@@ -10404,7 +10404,7 @@
           <a:bodyPr/>
           <a:lstStyle/>
           <a:p>
-            <a:fld id="{52C30056-F7E3-48DE-B485-350B3C114D69}" type="datetimeFigureOut">
+            <a:fld id="{22B1A858-2238-4D50-A136-D8298B9D7581}" type="datetimeFigureOut">
               <a:rPr lang="en-US" smtClean="0"/>
               <a:t>10/3/2026</a:t>
             </a:fld>
@@ -10446,7 +10446,7 @@
           <a:bodyPr/>
           <a:lstStyle/>
           <a:p>
-            <a:fld id="{8B33DAD4-768E-42FF-9F37-25C31ACC81D1}" type="slidenum">
+            <a:fld id="{6B7AFC5B-9B31-47DE-8C26-4C4AD0A46382}" type="slidenum">
               <a:rPr lang="en-US" smtClean="0"/>
               <a:t>‹#›</a:t>
             </a:fld>
@@ -10459,7 +10459,7 @@
           <p:cNvPr id="8" name="body">
             <a:extLst>
               <a:ext uri="{FF2B5EF4-FFF2-40B4-BE49-F238E27FC236}">
-                <a16:creationId xmlns:a16="http://schemas.microsoft.com/office/drawing/2014/main" id="{47DD7A03-08E0-DC06-11E0-7607197B89FE}"/>
+                <a16:creationId xmlns:a16="http://schemas.microsoft.com/office/drawing/2014/main" id="{67149880-57C8-166F-2B26-EDD9B6D8EC00}"/>
               </a:ext>
             </a:extLst>
           </p:cNvPr>
@@ -10499,7 +10499,7 @@
           <p:cNvPr id="9" name="kpi_value_1">
             <a:extLst>
               <a:ext uri="{FF2B5EF4-FFF2-40B4-BE49-F238E27FC236}">
-                <a16:creationId xmlns:a16="http://schemas.microsoft.com/office/drawing/2014/main" id="{57ED20C6-F5B7-B183-0E0C-F48DCE9351BE}"/>
+                <a16:creationId xmlns:a16="http://schemas.microsoft.com/office/drawing/2014/main" id="{6AE0704B-0CAF-16CC-AA91-B776CEC3CF6A}"/>
               </a:ext>
             </a:extLst>
           </p:cNvPr>
@@ -10552,7 +10552,7 @@
           <p:cNvPr id="10" name="kpi_label_1">
             <a:extLst>
               <a:ext uri="{FF2B5EF4-FFF2-40B4-BE49-F238E27FC236}">
-                <a16:creationId xmlns:a16="http://schemas.microsoft.com/office/drawing/2014/main" id="{09B687D8-FB59-BD40-5EDD-5F9960F4E00F}"/>
+                <a16:creationId xmlns:a16="http://schemas.microsoft.com/office/drawing/2014/main" id="{3F3FCF94-B427-3978-82AB-C140DCD7D92F}"/>
               </a:ext>
             </a:extLst>
           </p:cNvPr>
@@ -10600,7 +10600,7 @@
           <p:cNvPr id="11" name="kpi_value_2">
             <a:extLst>
               <a:ext uri="{FF2B5EF4-FFF2-40B4-BE49-F238E27FC236}">
-                <a16:creationId xmlns:a16="http://schemas.microsoft.com/office/drawing/2014/main" id="{C3A8F8F3-D56E-B524-387B-1A8A26F5D216}"/>
+                <a16:creationId xmlns:a16="http://schemas.microsoft.com/office/drawing/2014/main" id="{0584A1E5-942A-08BC-2D3C-E0F86D72249F}"/>
               </a:ext>
             </a:extLst>
           </p:cNvPr>
@@ -10653,7 +10653,7 @@
           <p:cNvPr id="12" name="kpi_label_2">
             <a:extLst>
               <a:ext uri="{FF2B5EF4-FFF2-40B4-BE49-F238E27FC236}">
-                <a16:creationId xmlns:a16="http://schemas.microsoft.com/office/drawing/2014/main" id="{673DBDB7-48A0-E94D-DE8C-9C59AD0C123D}"/>
+                <a16:creationId xmlns:a16="http://schemas.microsoft.com/office/drawing/2014/main" id="{000896A7-A820-82FA-47D8-76F7D4C1E2D5}"/>
               </a:ext>
             </a:extLst>
           </p:cNvPr>
@@ -10701,7 +10701,7 @@
           <p:cNvPr id="13" name="source">
             <a:extLst>
               <a:ext uri="{FF2B5EF4-FFF2-40B4-BE49-F238E27FC236}">
-                <a16:creationId xmlns:a16="http://schemas.microsoft.com/office/drawing/2014/main" id="{9EC94AE1-FA3F-1364-208B-515F279653FF}"/>
+                <a16:creationId xmlns:a16="http://schemas.microsoft.com/office/drawing/2014/main" id="{B4FCFE75-8885-1741-22EB-A9D01CE9D736}"/>
               </a:ext>
             </a:extLst>
           </p:cNvPr>
@@ -10756,7 +10756,7 @@
     </p:spTree>
     <p:extLst>
       <p:ext uri="{BB962C8B-B14F-4D97-AF65-F5344CB8AC3E}">
-        <p14:creationId xmlns:p14="http://schemas.microsoft.com/office/powerpoint/2010/main" val="437570303"/>
+        <p14:creationId xmlns:p14="http://schemas.microsoft.com/office/powerpoint/2010/main" val="1994588277"/>
       </p:ext>
     </p:extLst>
   </p:cSld>
@@ -10788,7 +10788,7 @@
           <p:cNvPr id="7" name="creative_background">
             <a:extLst>
               <a:ext uri="{FF2B5EF4-FFF2-40B4-BE49-F238E27FC236}">
-                <a16:creationId xmlns:a16="http://schemas.microsoft.com/office/drawing/2014/main" id="{CE7EFE9D-D3BC-9B09-EC50-3A3ECF611401}"/>
+                <a16:creationId xmlns:a16="http://schemas.microsoft.com/office/drawing/2014/main" id="{28A45FFD-7FC3-31E1-D181-800AA671E520}"/>
               </a:ext>
             </a:extLst>
           </p:cNvPr>
@@ -10861,7 +10861,7 @@
           <a:bodyPr/>
           <a:lstStyle/>
           <a:p>
-            <a:fld id="{52C30056-F7E3-48DE-B485-350B3C114D69}" type="datetimeFigureOut">
+            <a:fld id="{22B1A858-2238-4D50-A136-D8298B9D7581}" type="datetimeFigureOut">
               <a:rPr lang="en-US" smtClean="0"/>
               <a:t>10/3/2026</a:t>
             </a:fld>
@@ -10903,7 +10903,7 @@
           <a:bodyPr/>
           <a:lstStyle/>
           <a:p>
-            <a:fld id="{8B33DAD4-768E-42FF-9F37-25C31ACC81D1}" type="slidenum">
+            <a:fld id="{6B7AFC5B-9B31-47DE-8C26-4C4AD0A46382}" type="slidenum">
               <a:rPr lang="en-US" smtClean="0"/>
               <a:t>‹#›</a:t>
             </a:fld>
@@ -10916,7 +10916,7 @@
           <p:cNvPr id="8" name="body">
             <a:extLst>
               <a:ext uri="{FF2B5EF4-FFF2-40B4-BE49-F238E27FC236}">
-                <a16:creationId xmlns:a16="http://schemas.microsoft.com/office/drawing/2014/main" id="{B01E27F8-D938-9601-E2A6-E63297BCFC3E}"/>
+                <a16:creationId xmlns:a16="http://schemas.microsoft.com/office/drawing/2014/main" id="{62A2FC82-84C9-36C8-0698-5A2136AA61FC}"/>
               </a:ext>
             </a:extLst>
           </p:cNvPr>
@@ -10956,7 +10956,7 @@
           <p:cNvPr id="9" name="kpi_value_1">
             <a:extLst>
               <a:ext uri="{FF2B5EF4-FFF2-40B4-BE49-F238E27FC236}">
-                <a16:creationId xmlns:a16="http://schemas.microsoft.com/office/drawing/2014/main" id="{95E1A0AD-8677-4F36-7563-3BE2195E4492}"/>
+                <a16:creationId xmlns:a16="http://schemas.microsoft.com/office/drawing/2014/main" id="{7F832769-D804-2122-F583-EBD4597166A3}"/>
               </a:ext>
             </a:extLst>
           </p:cNvPr>
@@ -11009,7 +11009,7 @@
           <p:cNvPr id="10" name="kpi_label_1">
             <a:extLst>
               <a:ext uri="{FF2B5EF4-FFF2-40B4-BE49-F238E27FC236}">
-                <a16:creationId xmlns:a16="http://schemas.microsoft.com/office/drawing/2014/main" id="{E03BF808-391D-3EB6-15F6-074E28DB325E}"/>
+                <a16:creationId xmlns:a16="http://schemas.microsoft.com/office/drawing/2014/main" id="{EABD4D24-C2E9-88E5-3561-07200348D15C}"/>
               </a:ext>
             </a:extLst>
           </p:cNvPr>
@@ -11057,7 +11057,7 @@
           <p:cNvPr id="11" name="kpi_value_2">
             <a:extLst>
               <a:ext uri="{FF2B5EF4-FFF2-40B4-BE49-F238E27FC236}">
-                <a16:creationId xmlns:a16="http://schemas.microsoft.com/office/drawing/2014/main" id="{9FA1F4E7-FE92-EE56-7DE1-ABC4D9B6E6F5}"/>
+                <a16:creationId xmlns:a16="http://schemas.microsoft.com/office/drawing/2014/main" id="{FF491BFF-5B43-74E4-2D06-40D545F177A7}"/>
               </a:ext>
             </a:extLst>
           </p:cNvPr>
@@ -11110,7 +11110,7 @@
           <p:cNvPr id="12" name="kpi_label_2">
             <a:extLst>
               <a:ext uri="{FF2B5EF4-FFF2-40B4-BE49-F238E27FC236}">
-                <a16:creationId xmlns:a16="http://schemas.microsoft.com/office/drawing/2014/main" id="{E81A1B3F-8FED-2CA4-9B0C-D08A98248AF1}"/>
+                <a16:creationId xmlns:a16="http://schemas.microsoft.com/office/drawing/2014/main" id="{D7993837-2778-F2C6-7A0C-4D004ACBA0BD}"/>
               </a:ext>
             </a:extLst>
           </p:cNvPr>
@@ -11158,7 +11158,7 @@
           <p:cNvPr id="13" name="kpi_value_3">
             <a:extLst>
               <a:ext uri="{FF2B5EF4-FFF2-40B4-BE49-F238E27FC236}">
-                <a16:creationId xmlns:a16="http://schemas.microsoft.com/office/drawing/2014/main" id="{121B4E63-DFA3-87D3-A297-06972F184290}"/>
+                <a16:creationId xmlns:a16="http://schemas.microsoft.com/office/drawing/2014/main" id="{88D131DD-3769-D9C9-D420-5B2D3E3936E8}"/>
               </a:ext>
             </a:extLst>
           </p:cNvPr>
@@ -11211,7 +11211,7 @@
           <p:cNvPr id="14" name="kpi_label_3">
             <a:extLst>
               <a:ext uri="{FF2B5EF4-FFF2-40B4-BE49-F238E27FC236}">
-                <a16:creationId xmlns:a16="http://schemas.microsoft.com/office/drawing/2014/main" id="{63255445-3854-EB68-F3C4-21DF57A6ABEE}"/>
+                <a16:creationId xmlns:a16="http://schemas.microsoft.com/office/drawing/2014/main" id="{8F3EA48A-886E-1821-8404-ED2BE5FA0957}"/>
               </a:ext>
             </a:extLst>
           </p:cNvPr>
@@ -11259,7 +11259,7 @@
           <p:cNvPr id="15" name="kpi_value_4">
             <a:extLst>
               <a:ext uri="{FF2B5EF4-FFF2-40B4-BE49-F238E27FC236}">
-                <a16:creationId xmlns:a16="http://schemas.microsoft.com/office/drawing/2014/main" id="{50B1F05B-13F9-5DA5-BC28-DEDB3A16AEAF}"/>
+                <a16:creationId xmlns:a16="http://schemas.microsoft.com/office/drawing/2014/main" id="{CA034875-10DD-A351-5FAC-FE2180ABF9C8}"/>
               </a:ext>
             </a:extLst>
           </p:cNvPr>
@@ -11312,7 +11312,7 @@
           <p:cNvPr id="16" name="kpi_label_4">
             <a:extLst>
               <a:ext uri="{FF2B5EF4-FFF2-40B4-BE49-F238E27FC236}">
-                <a16:creationId xmlns:a16="http://schemas.microsoft.com/office/drawing/2014/main" id="{CEE7D770-16BB-4D18-0607-F1448C2D7B8A}"/>
+                <a16:creationId xmlns:a16="http://schemas.microsoft.com/office/drawing/2014/main" id="{2686C83F-6147-8482-3BB8-387317FCD734}"/>
               </a:ext>
             </a:extLst>
           </p:cNvPr>
@@ -11360,7 +11360,7 @@
           <p:cNvPr id="17" name="source">
             <a:extLst>
               <a:ext uri="{FF2B5EF4-FFF2-40B4-BE49-F238E27FC236}">
-                <a16:creationId xmlns:a16="http://schemas.microsoft.com/office/drawing/2014/main" id="{DB2EF079-9120-87EF-C33E-0F5929DDD91C}"/>
+                <a16:creationId xmlns:a16="http://schemas.microsoft.com/office/drawing/2014/main" id="{E1124C41-9EDC-0583-C38E-14B72BE7AEEF}"/>
               </a:ext>
             </a:extLst>
           </p:cNvPr>
@@ -11415,7 +11415,7 @@
     </p:spTree>
     <p:extLst>
       <p:ext uri="{BB962C8B-B14F-4D97-AF65-F5344CB8AC3E}">
-        <p14:creationId xmlns:p14="http://schemas.microsoft.com/office/powerpoint/2010/main" val="671740575"/>
+        <p14:creationId xmlns:p14="http://schemas.microsoft.com/office/powerpoint/2010/main" val="2863797342"/>
       </p:ext>
     </p:extLst>
   </p:cSld>
@@ -11447,7 +11447,7 @@
           <p:cNvPr id="7" name="creative_background">
             <a:extLst>
               <a:ext uri="{FF2B5EF4-FFF2-40B4-BE49-F238E27FC236}">
-                <a16:creationId xmlns:a16="http://schemas.microsoft.com/office/drawing/2014/main" id="{233210FB-F73D-09CB-9DB3-CC5E0003D08D}"/>
+                <a16:creationId xmlns:a16="http://schemas.microsoft.com/office/drawing/2014/main" id="{16B8688A-E7AB-43B9-D144-868A928BE227}"/>
               </a:ext>
             </a:extLst>
           </p:cNvPr>
@@ -11520,7 +11520,7 @@
           <a:bodyPr/>
           <a:lstStyle/>
           <a:p>
-            <a:fld id="{52C30056-F7E3-48DE-B485-350B3C114D69}" type="datetimeFigureOut">
+            <a:fld id="{22B1A858-2238-4D50-A136-D8298B9D7581}" type="datetimeFigureOut">
               <a:rPr lang="en-US" smtClean="0"/>
               <a:t>10/3/2026</a:t>
             </a:fld>
@@ -11562,7 +11562,7 @@
           <a:bodyPr/>
           <a:lstStyle/>
           <a:p>
-            <a:fld id="{8B33DAD4-768E-42FF-9F37-25C31ACC81D1}" type="slidenum">
+            <a:fld id="{6B7AFC5B-9B31-47DE-8C26-4C4AD0A46382}" type="slidenum">
               <a:rPr lang="en-US" smtClean="0"/>
               <a:t>‹#›</a:t>
             </a:fld>
@@ -11575,7 +11575,7 @@
           <p:cNvPr id="8" name="body">
             <a:extLst>
               <a:ext uri="{FF2B5EF4-FFF2-40B4-BE49-F238E27FC236}">
-                <a16:creationId xmlns:a16="http://schemas.microsoft.com/office/drawing/2014/main" id="{69BE197D-DA35-59E7-2485-316E9CA22498}"/>
+                <a16:creationId xmlns:a16="http://schemas.microsoft.com/office/drawing/2014/main" id="{100EAE11-5551-2B03-D1AF-61D9A292B6B7}"/>
               </a:ext>
             </a:extLst>
           </p:cNvPr>
@@ -11615,7 +11615,7 @@
           <p:cNvPr id="9" name="quote">
             <a:extLst>
               <a:ext uri="{FF2B5EF4-FFF2-40B4-BE49-F238E27FC236}">
-                <a16:creationId xmlns:a16="http://schemas.microsoft.com/office/drawing/2014/main" id="{16C88F5E-C4C2-2769-C092-2FF57FF48676}"/>
+                <a16:creationId xmlns:a16="http://schemas.microsoft.com/office/drawing/2014/main" id="{F0BB55BF-AFA8-A70C-0A1D-0B89A7AED04D}"/>
               </a:ext>
             </a:extLst>
           </p:cNvPr>
@@ -11665,7 +11665,7 @@
           <p:cNvPr id="10" name="attribution">
             <a:extLst>
               <a:ext uri="{FF2B5EF4-FFF2-40B4-BE49-F238E27FC236}">
-                <a16:creationId xmlns:a16="http://schemas.microsoft.com/office/drawing/2014/main" id="{9AC71953-9B11-9FD2-5ADE-EEDF236D2FEA}"/>
+                <a16:creationId xmlns:a16="http://schemas.microsoft.com/office/drawing/2014/main" id="{CA514214-98C6-3B72-FA84-672B6894CD2D}"/>
               </a:ext>
             </a:extLst>
           </p:cNvPr>
@@ -11713,7 +11713,7 @@
           <p:cNvPr id="11" name="source">
             <a:extLst>
               <a:ext uri="{FF2B5EF4-FFF2-40B4-BE49-F238E27FC236}">
-                <a16:creationId xmlns:a16="http://schemas.microsoft.com/office/drawing/2014/main" id="{F7F02497-7906-1483-046C-186D93E82546}"/>
+                <a16:creationId xmlns:a16="http://schemas.microsoft.com/office/drawing/2014/main" id="{EE707243-341A-E376-BD27-F87F504DFA69}"/>
               </a:ext>
             </a:extLst>
           </p:cNvPr>
@@ -11768,7 +11768,7 @@
     </p:spTree>
     <p:extLst>
       <p:ext uri="{BB962C8B-B14F-4D97-AF65-F5344CB8AC3E}">
-        <p14:creationId xmlns:p14="http://schemas.microsoft.com/office/powerpoint/2010/main" val="3083444632"/>
+        <p14:creationId xmlns:p14="http://schemas.microsoft.com/office/powerpoint/2010/main" val="1472326859"/>
       </p:ext>
     </p:extLst>
   </p:cSld>
@@ -11800,7 +11800,7 @@
           <p:cNvPr id="7" name="creative_background">
             <a:extLst>
               <a:ext uri="{FF2B5EF4-FFF2-40B4-BE49-F238E27FC236}">
-                <a16:creationId xmlns:a16="http://schemas.microsoft.com/office/drawing/2014/main" id="{EDD15A50-DAD0-D0DA-20DB-7BCDC76D2013}"/>
+                <a16:creationId xmlns:a16="http://schemas.microsoft.com/office/drawing/2014/main" id="{880DDD59-E0ED-6D40-F969-64EEF3713F0E}"/>
               </a:ext>
             </a:extLst>
           </p:cNvPr>
@@ -11873,7 +11873,7 @@
           <a:bodyPr/>
           <a:lstStyle/>
           <a:p>
-            <a:fld id="{52C30056-F7E3-48DE-B485-350B3C114D69}" type="datetimeFigureOut">
+            <a:fld id="{22B1A858-2238-4D50-A136-D8298B9D7581}" type="datetimeFigureOut">
               <a:rPr lang="en-US" smtClean="0"/>
               <a:t>10/3/2026</a:t>
             </a:fld>
@@ -11915,7 +11915,7 @@
           <a:bodyPr/>
           <a:lstStyle/>
           <a:p>
-            <a:fld id="{8B33DAD4-768E-42FF-9F37-25C31ACC81D1}" type="slidenum">
+            <a:fld id="{6B7AFC5B-9B31-47DE-8C26-4C4AD0A46382}" type="slidenum">
               <a:rPr lang="en-US" smtClean="0"/>
               <a:t>‹#›</a:t>
             </a:fld>
@@ -11928,7 +11928,7 @@
           <p:cNvPr id="8" name="item_1_title">
             <a:extLst>
               <a:ext uri="{FF2B5EF4-FFF2-40B4-BE49-F238E27FC236}">
-                <a16:creationId xmlns:a16="http://schemas.microsoft.com/office/drawing/2014/main" id="{00E63611-85FD-CFFC-8CCB-D603597EA642}"/>
+                <a16:creationId xmlns:a16="http://schemas.microsoft.com/office/drawing/2014/main" id="{206268EB-247B-D2F9-8380-103B36538437}"/>
               </a:ext>
             </a:extLst>
           </p:cNvPr>
@@ -11978,7 +11978,7 @@
           <p:cNvPr id="9" name="item_1">
             <a:extLst>
               <a:ext uri="{FF2B5EF4-FFF2-40B4-BE49-F238E27FC236}">
-                <a16:creationId xmlns:a16="http://schemas.microsoft.com/office/drawing/2014/main" id="{CF3439B1-4464-E3AC-1982-D734DAD25CF4}"/>
+                <a16:creationId xmlns:a16="http://schemas.microsoft.com/office/drawing/2014/main" id="{1428D04E-463C-C2E3-50DA-55DEA4EC9888}"/>
               </a:ext>
             </a:extLst>
           </p:cNvPr>
@@ -12026,7 +12026,7 @@
           <p:cNvPr id="10" name="item_2_title">
             <a:extLst>
               <a:ext uri="{FF2B5EF4-FFF2-40B4-BE49-F238E27FC236}">
-                <a16:creationId xmlns:a16="http://schemas.microsoft.com/office/drawing/2014/main" id="{F39A3303-2536-E2E3-AEA1-226EDAB83AE5}"/>
+                <a16:creationId xmlns:a16="http://schemas.microsoft.com/office/drawing/2014/main" id="{A062077E-057E-E964-6EAE-E41E17E3EF1A}"/>
               </a:ext>
             </a:extLst>
           </p:cNvPr>
@@ -12079,7 +12079,7 @@
           <p:cNvPr id="11" name="item_2">
             <a:extLst>
               <a:ext uri="{FF2B5EF4-FFF2-40B4-BE49-F238E27FC236}">
-                <a16:creationId xmlns:a16="http://schemas.microsoft.com/office/drawing/2014/main" id="{08DE489F-1740-7C51-B055-B33233166831}"/>
+                <a16:creationId xmlns:a16="http://schemas.microsoft.com/office/drawing/2014/main" id="{26DDECCA-76BD-E0DE-7005-9AA47487AC24}"/>
               </a:ext>
             </a:extLst>
           </p:cNvPr>
@@ -12127,7 +12127,7 @@
           <p:cNvPr id="12" name="item_3_title">
             <a:extLst>
               <a:ext uri="{FF2B5EF4-FFF2-40B4-BE49-F238E27FC236}">
-                <a16:creationId xmlns:a16="http://schemas.microsoft.com/office/drawing/2014/main" id="{42A7DEB4-A35C-9DF3-6456-7ADCB0142E02}"/>
+                <a16:creationId xmlns:a16="http://schemas.microsoft.com/office/drawing/2014/main" id="{9B7DD530-8C0B-E044-4A06-BFCA6EE313A0}"/>
               </a:ext>
             </a:extLst>
           </p:cNvPr>
@@ -12180,7 +12180,7 @@
           <p:cNvPr id="13" name="item_3">
             <a:extLst>
               <a:ext uri="{FF2B5EF4-FFF2-40B4-BE49-F238E27FC236}">
-                <a16:creationId xmlns:a16="http://schemas.microsoft.com/office/drawing/2014/main" id="{EC201BD5-AD6C-0503-F2D2-9B1E523B4981}"/>
+                <a16:creationId xmlns:a16="http://schemas.microsoft.com/office/drawing/2014/main" id="{FFE3583D-EB89-6BC8-98FA-5A2003157053}"/>
               </a:ext>
             </a:extLst>
           </p:cNvPr>
@@ -12228,7 +12228,7 @@
           <p:cNvPr id="14" name="source">
             <a:extLst>
               <a:ext uri="{FF2B5EF4-FFF2-40B4-BE49-F238E27FC236}">
-                <a16:creationId xmlns:a16="http://schemas.microsoft.com/office/drawing/2014/main" id="{5E3AB22E-0DD6-236E-87A4-490071F22944}"/>
+                <a16:creationId xmlns:a16="http://schemas.microsoft.com/office/drawing/2014/main" id="{ED863A7E-9AA2-6DCB-6A01-AE1EB1D540F2}"/>
               </a:ext>
             </a:extLst>
           </p:cNvPr>
@@ -12283,7 +12283,7 @@
     </p:spTree>
     <p:extLst>
       <p:ext uri="{BB962C8B-B14F-4D97-AF65-F5344CB8AC3E}">
-        <p14:creationId xmlns:p14="http://schemas.microsoft.com/office/powerpoint/2010/main" val="1260266258"/>
+        <p14:creationId xmlns:p14="http://schemas.microsoft.com/office/powerpoint/2010/main" val="79445632"/>
       </p:ext>
     </p:extLst>
   </p:cSld>
@@ -12315,7 +12315,7 @@
           <p:cNvPr id="7" name="creative_background">
             <a:extLst>
               <a:ext uri="{FF2B5EF4-FFF2-40B4-BE49-F238E27FC236}">
-                <a16:creationId xmlns:a16="http://schemas.microsoft.com/office/drawing/2014/main" id="{528664A6-F95A-DEFF-B4E0-F3E0DE960DFA}"/>
+                <a16:creationId xmlns:a16="http://schemas.microsoft.com/office/drawing/2014/main" id="{E3158B78-1A4B-0288-5B47-282229C1204C}"/>
               </a:ext>
             </a:extLst>
           </p:cNvPr>
@@ -12388,7 +12388,7 @@
           <a:bodyPr/>
           <a:lstStyle/>
           <a:p>
-            <a:fld id="{52C30056-F7E3-48DE-B485-350B3C114D69}" type="datetimeFigureOut">
+            <a:fld id="{22B1A858-2238-4D50-A136-D8298B9D7581}" type="datetimeFigureOut">
               <a:rPr lang="en-US" smtClean="0"/>
               <a:t>10/3/2026</a:t>
             </a:fld>
@@ -12430,7 +12430,7 @@
           <a:bodyPr/>
           <a:lstStyle/>
           <a:p>
-            <a:fld id="{8B33DAD4-768E-42FF-9F37-25C31ACC81D1}" type="slidenum">
+            <a:fld id="{6B7AFC5B-9B31-47DE-8C26-4C4AD0A46382}" type="slidenum">
               <a:rPr lang="en-US" smtClean="0"/>
               <a:t>‹#›</a:t>
             </a:fld>
@@ -12443,7 +12443,7 @@
           <p:cNvPr id="8" name="item_1_title">
             <a:extLst>
               <a:ext uri="{FF2B5EF4-FFF2-40B4-BE49-F238E27FC236}">
-                <a16:creationId xmlns:a16="http://schemas.microsoft.com/office/drawing/2014/main" id="{80350DA2-F414-25D3-1556-06A58547D2FC}"/>
+                <a16:creationId xmlns:a16="http://schemas.microsoft.com/office/drawing/2014/main" id="{D4CA715D-B210-C80E-F4AC-08C34C31AA0D}"/>
               </a:ext>
             </a:extLst>
           </p:cNvPr>
@@ -12493,7 +12493,7 @@
           <p:cNvPr id="9" name="item_1">
             <a:extLst>
               <a:ext uri="{FF2B5EF4-FFF2-40B4-BE49-F238E27FC236}">
-                <a16:creationId xmlns:a16="http://schemas.microsoft.com/office/drawing/2014/main" id="{C6E3F971-443B-0649-F9A9-F716D4B5592C}"/>
+                <a16:creationId xmlns:a16="http://schemas.microsoft.com/office/drawing/2014/main" id="{498CFA12-8805-ED92-2FDD-32146A80F834}"/>
               </a:ext>
             </a:extLst>
           </p:cNvPr>
@@ -12541,7 +12541,7 @@
           <p:cNvPr id="10" name="item_2_title">
             <a:extLst>
               <a:ext uri="{FF2B5EF4-FFF2-40B4-BE49-F238E27FC236}">
-                <a16:creationId xmlns:a16="http://schemas.microsoft.com/office/drawing/2014/main" id="{25657633-824D-B6D5-8BE2-1C7C67B650FA}"/>
+                <a16:creationId xmlns:a16="http://schemas.microsoft.com/office/drawing/2014/main" id="{2E9051D5-04E9-4058-5866-4C25E0DAB837}"/>
               </a:ext>
             </a:extLst>
           </p:cNvPr>
@@ -12594,7 +12594,7 @@
           <p:cNvPr id="11" name="item_2">
             <a:extLst>
               <a:ext uri="{FF2B5EF4-FFF2-40B4-BE49-F238E27FC236}">
-                <a16:creationId xmlns:a16="http://schemas.microsoft.com/office/drawing/2014/main" id="{247966AE-DDB8-8D7F-124F-F55A29B8D938}"/>
+                <a16:creationId xmlns:a16="http://schemas.microsoft.com/office/drawing/2014/main" id="{8346347C-5668-14D8-BB57-160583572C97}"/>
               </a:ext>
             </a:extLst>
           </p:cNvPr>
@@ -12642,7 +12642,7 @@
           <p:cNvPr id="12" name="source">
             <a:extLst>
               <a:ext uri="{FF2B5EF4-FFF2-40B4-BE49-F238E27FC236}">
-                <a16:creationId xmlns:a16="http://schemas.microsoft.com/office/drawing/2014/main" id="{96DE1F8C-FC99-6717-0B6F-E0116D5260F8}"/>
+                <a16:creationId xmlns:a16="http://schemas.microsoft.com/office/drawing/2014/main" id="{3538C4F8-2E43-F2E9-4355-288568703AD7}"/>
               </a:ext>
             </a:extLst>
           </p:cNvPr>
@@ -12697,7 +12697,7 @@
     </p:spTree>
     <p:extLst>
       <p:ext uri="{BB962C8B-B14F-4D97-AF65-F5344CB8AC3E}">
-        <p14:creationId xmlns:p14="http://schemas.microsoft.com/office/powerpoint/2010/main" val="2224787972"/>
+        <p14:creationId xmlns:p14="http://schemas.microsoft.com/office/powerpoint/2010/main" val="2631215432"/>
       </p:ext>
     </p:extLst>
   </p:cSld>
@@ -12729,7 +12729,7 @@
           <p:cNvPr id="7" name="creative_background">
             <a:extLst>
               <a:ext uri="{FF2B5EF4-FFF2-40B4-BE49-F238E27FC236}">
-                <a16:creationId xmlns:a16="http://schemas.microsoft.com/office/drawing/2014/main" id="{8E3A698F-61AF-F129-6ADD-C21915555A80}"/>
+                <a16:creationId xmlns:a16="http://schemas.microsoft.com/office/drawing/2014/main" id="{3EAA6A14-7D22-575A-6FE9-B6B71601B984}"/>
               </a:ext>
             </a:extLst>
           </p:cNvPr>
@@ -12802,7 +12802,7 @@
           <a:bodyPr/>
           <a:lstStyle/>
           <a:p>
-            <a:fld id="{52C30056-F7E3-48DE-B485-350B3C114D69}" type="datetimeFigureOut">
+            <a:fld id="{22B1A858-2238-4D50-A136-D8298B9D7581}" type="datetimeFigureOut">
               <a:rPr lang="en-US" smtClean="0"/>
               <a:t>10/3/2026</a:t>
             </a:fld>
@@ -12844,7 +12844,7 @@
           <a:bodyPr/>
           <a:lstStyle/>
           <a:p>
-            <a:fld id="{8B33DAD4-768E-42FF-9F37-25C31ACC81D1}" type="slidenum">
+            <a:fld id="{6B7AFC5B-9B31-47DE-8C26-4C4AD0A46382}" type="slidenum">
               <a:rPr lang="en-US" smtClean="0"/>
               <a:t>‹#›</a:t>
             </a:fld>
@@ -12857,7 +12857,7 @@
           <p:cNvPr id="8" name="chart">
             <a:extLst>
               <a:ext uri="{FF2B5EF4-FFF2-40B4-BE49-F238E27FC236}">
-                <a16:creationId xmlns:a16="http://schemas.microsoft.com/office/drawing/2014/main" id="{56BCB541-78F6-5922-0A8E-F3F6C03E3089}"/>
+                <a16:creationId xmlns:a16="http://schemas.microsoft.com/office/drawing/2014/main" id="{1D99954A-DE13-8749-B049-7A32DB8C9655}"/>
               </a:ext>
             </a:extLst>
           </p:cNvPr>
@@ -12887,7 +12887,7 @@
           <p:cNvPr id="9" name="body">
             <a:extLst>
               <a:ext uri="{FF2B5EF4-FFF2-40B4-BE49-F238E27FC236}">
-                <a16:creationId xmlns:a16="http://schemas.microsoft.com/office/drawing/2014/main" id="{D349507A-D6BC-0039-B886-1A20941A3AA0}"/>
+                <a16:creationId xmlns:a16="http://schemas.microsoft.com/office/drawing/2014/main" id="{FF8EE5EF-DF9B-4503-4BCF-48C20DF9AA54}"/>
               </a:ext>
             </a:extLst>
           </p:cNvPr>
@@ -12930,7 +12930,7 @@
           <p:cNvPr id="10" name="source">
             <a:extLst>
               <a:ext uri="{FF2B5EF4-FFF2-40B4-BE49-F238E27FC236}">
-                <a16:creationId xmlns:a16="http://schemas.microsoft.com/office/drawing/2014/main" id="{97E990D7-C8DF-D3EC-B496-853DB5994950}"/>
+                <a16:creationId xmlns:a16="http://schemas.microsoft.com/office/drawing/2014/main" id="{78798F6A-B2BB-C532-D280-B374BFEC2917}"/>
               </a:ext>
             </a:extLst>
           </p:cNvPr>
@@ -12985,7 +12985,7 @@
     </p:spTree>
     <p:extLst>
       <p:ext uri="{BB962C8B-B14F-4D97-AF65-F5344CB8AC3E}">
-        <p14:creationId xmlns:p14="http://schemas.microsoft.com/office/powerpoint/2010/main" val="3840504380"/>
+        <p14:creationId xmlns:p14="http://schemas.microsoft.com/office/powerpoint/2010/main" val="3610868350"/>
       </p:ext>
     </p:extLst>
   </p:cSld>
@@ -13017,7 +13017,7 @@
           <p:cNvPr id="7" name="creative_background">
             <a:extLst>
               <a:ext uri="{FF2B5EF4-FFF2-40B4-BE49-F238E27FC236}">
-                <a16:creationId xmlns:a16="http://schemas.microsoft.com/office/drawing/2014/main" id="{1F4142E6-435E-7501-95A8-1F1268667FE0}"/>
+                <a16:creationId xmlns:a16="http://schemas.microsoft.com/office/drawing/2014/main" id="{2E3ED189-9AC9-3E39-A27C-931584A1B412}"/>
               </a:ext>
             </a:extLst>
           </p:cNvPr>
@@ -13090,7 +13090,7 @@
           <a:bodyPr/>
           <a:lstStyle/>
           <a:p>
-            <a:fld id="{52C30056-F7E3-48DE-B485-350B3C114D69}" type="datetimeFigureOut">
+            <a:fld id="{22B1A858-2238-4D50-A136-D8298B9D7581}" type="datetimeFigureOut">
               <a:rPr lang="en-US" smtClean="0"/>
               <a:t>10/3/2026</a:t>
             </a:fld>
@@ -13132,7 +13132,7 @@
           <a:bodyPr/>
           <a:lstStyle/>
           <a:p>
-            <a:fld id="{8B33DAD4-768E-42FF-9F37-25C31ACC81D1}" type="slidenum">
+            <a:fld id="{6B7AFC5B-9B31-47DE-8C26-4C4AD0A46382}" type="slidenum">
               <a:rPr lang="en-US" smtClean="0"/>
               <a:t>‹#›</a:t>
             </a:fld>
@@ -13145,7 +13145,7 @@
           <p:cNvPr id="8" name="item_1_title">
             <a:extLst>
               <a:ext uri="{FF2B5EF4-FFF2-40B4-BE49-F238E27FC236}">
-                <a16:creationId xmlns:a16="http://schemas.microsoft.com/office/drawing/2014/main" id="{973E2FFF-CC28-6A2E-9773-40235B1621B5}"/>
+                <a16:creationId xmlns:a16="http://schemas.microsoft.com/office/drawing/2014/main" id="{0A9D7B1F-70C9-72F5-094D-30BA96FEDFDB}"/>
               </a:ext>
             </a:extLst>
           </p:cNvPr>
@@ -13195,7 +13195,7 @@
           <p:cNvPr id="9" name="item_1">
             <a:extLst>
               <a:ext uri="{FF2B5EF4-FFF2-40B4-BE49-F238E27FC236}">
-                <a16:creationId xmlns:a16="http://schemas.microsoft.com/office/drawing/2014/main" id="{8684A0D1-A224-7ED9-520A-61562C4F760B}"/>
+                <a16:creationId xmlns:a16="http://schemas.microsoft.com/office/drawing/2014/main" id="{43BD8F85-949A-5A85-5106-08AE7BAC49C2}"/>
               </a:ext>
             </a:extLst>
           </p:cNvPr>
@@ -13243,7 +13243,7 @@
           <p:cNvPr id="10" name="item_2_title">
             <a:extLst>
               <a:ext uri="{FF2B5EF4-FFF2-40B4-BE49-F238E27FC236}">
-                <a16:creationId xmlns:a16="http://schemas.microsoft.com/office/drawing/2014/main" id="{FC1EB294-FCBE-3A3C-9B26-C4640E9CE020}"/>
+                <a16:creationId xmlns:a16="http://schemas.microsoft.com/office/drawing/2014/main" id="{333AF435-24CD-00D5-0DE5-CB38C28B0B39}"/>
               </a:ext>
             </a:extLst>
           </p:cNvPr>
@@ -13296,7 +13296,7 @@
           <p:cNvPr id="11" name="item_2">
             <a:extLst>
               <a:ext uri="{FF2B5EF4-FFF2-40B4-BE49-F238E27FC236}">
-                <a16:creationId xmlns:a16="http://schemas.microsoft.com/office/drawing/2014/main" id="{51143486-C6E1-43A1-96FB-29DBE844C3EA}"/>
+                <a16:creationId xmlns:a16="http://schemas.microsoft.com/office/drawing/2014/main" id="{9EECE6C4-8D40-A03D-E624-7EEFEE8D33D9}"/>
               </a:ext>
             </a:extLst>
           </p:cNvPr>
@@ -13344,7 +13344,7 @@
           <p:cNvPr id="12" name="item_3_title">
             <a:extLst>
               <a:ext uri="{FF2B5EF4-FFF2-40B4-BE49-F238E27FC236}">
-                <a16:creationId xmlns:a16="http://schemas.microsoft.com/office/drawing/2014/main" id="{B659661C-FE01-EF95-ABAA-7A7820F388C1}"/>
+                <a16:creationId xmlns:a16="http://schemas.microsoft.com/office/drawing/2014/main" id="{CE6D3A95-BE28-E8F9-F6BF-6528085D90E5}"/>
               </a:ext>
             </a:extLst>
           </p:cNvPr>
@@ -13397,7 +13397,7 @@
           <p:cNvPr id="13" name="item_3">
             <a:extLst>
               <a:ext uri="{FF2B5EF4-FFF2-40B4-BE49-F238E27FC236}">
-                <a16:creationId xmlns:a16="http://schemas.microsoft.com/office/drawing/2014/main" id="{F000DF2D-0416-8BF0-502D-FA0CE99BC99C}"/>
+                <a16:creationId xmlns:a16="http://schemas.microsoft.com/office/drawing/2014/main" id="{93A1A8D4-2BDE-0EB6-E1D3-FCFA0A708ED7}"/>
               </a:ext>
             </a:extLst>
           </p:cNvPr>
@@ -13445,7 +13445,7 @@
           <p:cNvPr id="14" name="item_4_title">
             <a:extLst>
               <a:ext uri="{FF2B5EF4-FFF2-40B4-BE49-F238E27FC236}">
-                <a16:creationId xmlns:a16="http://schemas.microsoft.com/office/drawing/2014/main" id="{71CA3AD0-78E8-395D-F764-AA0A0A7A85A4}"/>
+                <a16:creationId xmlns:a16="http://schemas.microsoft.com/office/drawing/2014/main" id="{D6A73622-80DD-F102-FC18-5F99C14AB834}"/>
               </a:ext>
             </a:extLst>
           </p:cNvPr>
@@ -13498,7 +13498,7 @@
           <p:cNvPr id="15" name="item_4">
             <a:extLst>
               <a:ext uri="{FF2B5EF4-FFF2-40B4-BE49-F238E27FC236}">
-                <a16:creationId xmlns:a16="http://schemas.microsoft.com/office/drawing/2014/main" id="{AC4601D4-E135-8F74-E01A-4A142BA1ED31}"/>
+                <a16:creationId xmlns:a16="http://schemas.microsoft.com/office/drawing/2014/main" id="{B25A799E-6772-59F2-2002-AEC96B815E5F}"/>
               </a:ext>
             </a:extLst>
           </p:cNvPr>
@@ -13546,7 +13546,7 @@
           <p:cNvPr id="16" name="source">
             <a:extLst>
               <a:ext uri="{FF2B5EF4-FFF2-40B4-BE49-F238E27FC236}">
-                <a16:creationId xmlns:a16="http://schemas.microsoft.com/office/drawing/2014/main" id="{80CABF2E-595F-C4D5-E173-6D1BFA52A20F}"/>
+                <a16:creationId xmlns:a16="http://schemas.microsoft.com/office/drawing/2014/main" id="{1DEB1B2D-3B81-CE02-3C34-59B8D94C9002}"/>
               </a:ext>
             </a:extLst>
           </p:cNvPr>
@@ -13601,7 +13601,7 @@
     </p:spTree>
     <p:extLst>
       <p:ext uri="{BB962C8B-B14F-4D97-AF65-F5344CB8AC3E}">
-        <p14:creationId xmlns:p14="http://schemas.microsoft.com/office/powerpoint/2010/main" val="3953458247"/>
+        <p14:creationId xmlns:p14="http://schemas.microsoft.com/office/powerpoint/2010/main" val="1430506310"/>
       </p:ext>
     </p:extLst>
   </p:cSld>
@@ -13638,7 +13638,7 @@
           <p:cNvPr id="9" name="creative_background_master">
             <a:extLst>
               <a:ext uri="{FF2B5EF4-FFF2-40B4-BE49-F238E27FC236}">
-                <a16:creationId xmlns:a16="http://schemas.microsoft.com/office/drawing/2014/main" id="{02DAD354-1894-5237-3C0C-7693A309E88E}"/>
+                <a16:creationId xmlns:a16="http://schemas.microsoft.com/office/drawing/2014/main" id="{0545D690-5AA7-D8A3-5EBF-2AF0E3A50385}"/>
               </a:ext>
             </a:extLst>
           </p:cNvPr>
@@ -13799,7 +13799,7 @@
             </a:lvl1pPr>
           </a:lstStyle>
           <a:p>
-            <a:fld id="{52C30056-F7E3-48DE-B485-350B3C114D69}" type="datetimeFigureOut">
+            <a:fld id="{22B1A858-2238-4D50-A136-D8298B9D7581}" type="datetimeFigureOut">
               <a:rPr lang="en-US" smtClean="0"/>
               <a:t>10/3/2026</a:t>
             </a:fld>
@@ -13881,7 +13881,7 @@
             </a:lvl1pPr>
           </a:lstStyle>
           <a:p>
-            <a:fld id="{8B33DAD4-768E-42FF-9F37-25C31ACC81D1}" type="slidenum">
+            <a:fld id="{6B7AFC5B-9B31-47DE-8C26-4C4AD0A46382}" type="slidenum">
               <a:rPr lang="en-US" smtClean="0"/>
               <a:t>‹#›</a:t>
             </a:fld>
@@ -13892,7 +13892,7 @@
     </p:spTree>
     <p:extLst>
       <p:ext uri="{BB962C8B-B14F-4D97-AF65-F5344CB8AC3E}">
-        <p14:creationId xmlns:p14="http://schemas.microsoft.com/office/powerpoint/2010/main" val="3722416022"/>
+        <p14:creationId xmlns:p14="http://schemas.microsoft.com/office/powerpoint/2010/main" val="2190563019"/>
       </p:ext>
     </p:extLst>
   </p:cSld>
@@ -14273,7 +14273,7 @@
   <a:themeElements>
     <a:clrScheme name="Integral">
       <a:dk1>
-        <a:srgbClr val="188592"/>
+        <a:srgbClr val="298F9C"/>
       </a:dk1>
       <a:lt1>
         <a:srgbClr val="050809"/>
@@ -14288,7 +14288,7 @@
         <a:srgbClr val="D9A441"/>
       </a:accent1>
       <a:accent2>
-        <a:srgbClr val="188592"/>
+        <a:srgbClr val="D9A441"/>
       </a:accent2>
       <a:accent3>
         <a:srgbClr val="97A8AB"/>

--- a/design/templates/nile-night-teal/template.pptx
+++ b/design/templates/nile-night-teal/template.pptx
@@ -126,7 +126,7 @@
           <p:cNvPr id="9" name="creative_background">
             <a:extLst>
               <a:ext uri="{FF2B5EF4-FFF2-40B4-BE49-F238E27FC236}">
-                <a16:creationId xmlns:a16="http://schemas.microsoft.com/office/drawing/2014/main" id="{B53AF03F-2A24-25DB-4159-A63990FB7D8E}"/>
+                <a16:creationId xmlns:a16="http://schemas.microsoft.com/office/drawing/2014/main" id="{08AC5D9A-01C4-080C-64E4-2C75E24C0AA1}"/>
               </a:ext>
             </a:extLst>
           </p:cNvPr>
@@ -290,9 +290,9 @@
             </a:lvl1pPr>
           </a:lstStyle>
           <a:p>
-            <a:fld id="{22B1A858-2238-4D50-A136-D8298B9D7581}" type="datetimeFigureOut">
+            <a:fld id="{17E755F5-25E9-4D58-8061-E75C01E49922}" type="datetimeFigureOut">
               <a:rPr lang="en-US" smtClean="0"/>
-              <a:t>10/3/2026</a:t>
+              <a:t>10/4/2026</a:t>
             </a:fld>
             <a:endParaRPr lang="en-US"/>
           </a:p>
@@ -332,7 +332,7 @@
           <a:bodyPr/>
           <a:lstStyle/>
           <a:p>
-            <a:fld id="{6B7AFC5B-9B31-47DE-8C26-4C4AD0A46382}" type="slidenum">
+            <a:fld id="{878B5E31-6775-4496-83E7-82D86CBA16EC}" type="slidenum">
               <a:rPr lang="en-US" smtClean="0"/>
               <a:t>‹#›</a:t>
             </a:fld>
@@ -343,7 +343,7 @@
     </p:spTree>
     <p:extLst>
       <p:ext uri="{BB962C8B-B14F-4D97-AF65-F5344CB8AC3E}">
-        <p14:creationId xmlns:p14="http://schemas.microsoft.com/office/powerpoint/2010/main" val="1133264696"/>
+        <p14:creationId xmlns:p14="http://schemas.microsoft.com/office/powerpoint/2010/main" val="2812745323"/>
       </p:ext>
     </p:extLst>
   </p:cSld>
@@ -375,7 +375,7 @@
           <p:cNvPr id="7" name="creative_background">
             <a:extLst>
               <a:ext uri="{FF2B5EF4-FFF2-40B4-BE49-F238E27FC236}">
-                <a16:creationId xmlns:a16="http://schemas.microsoft.com/office/drawing/2014/main" id="{E4C15C58-4B25-2E99-5FA9-E251E15AD301}"/>
+                <a16:creationId xmlns:a16="http://schemas.microsoft.com/office/drawing/2014/main" id="{EE1DEE47-ECD0-0097-CD3A-FF180ACF8758}"/>
               </a:ext>
             </a:extLst>
           </p:cNvPr>
@@ -448,9 +448,9 @@
           <a:bodyPr/>
           <a:lstStyle/>
           <a:p>
-            <a:fld id="{22B1A858-2238-4D50-A136-D8298B9D7581}" type="datetimeFigureOut">
+            <a:fld id="{17E755F5-25E9-4D58-8061-E75C01E49922}" type="datetimeFigureOut">
               <a:rPr lang="en-US" smtClean="0"/>
-              <a:t>10/3/2026</a:t>
+              <a:t>10/4/2026</a:t>
             </a:fld>
             <a:endParaRPr lang="en-US"/>
           </a:p>
@@ -490,7 +490,7 @@
           <a:bodyPr/>
           <a:lstStyle/>
           <a:p>
-            <a:fld id="{6B7AFC5B-9B31-47DE-8C26-4C4AD0A46382}" type="slidenum">
+            <a:fld id="{878B5E31-6775-4496-83E7-82D86CBA16EC}" type="slidenum">
               <a:rPr lang="en-US" smtClean="0"/>
               <a:t>‹#›</a:t>
             </a:fld>
@@ -503,7 +503,7 @@
           <p:cNvPr id="8" name="body">
             <a:extLst>
               <a:ext uri="{FF2B5EF4-FFF2-40B4-BE49-F238E27FC236}">
-                <a16:creationId xmlns:a16="http://schemas.microsoft.com/office/drawing/2014/main" id="{97EBE968-B88F-F24B-D741-E077D1081EE7}"/>
+                <a16:creationId xmlns:a16="http://schemas.microsoft.com/office/drawing/2014/main" id="{A5E1F49D-7B9D-3619-CD45-444E4A35D9DE}"/>
               </a:ext>
             </a:extLst>
           </p:cNvPr>
@@ -543,7 +543,7 @@
           <p:cNvPr id="9" name="source">
             <a:extLst>
               <a:ext uri="{FF2B5EF4-FFF2-40B4-BE49-F238E27FC236}">
-                <a16:creationId xmlns:a16="http://schemas.microsoft.com/office/drawing/2014/main" id="{A034B728-CB34-B697-BA6D-3F96376014D4}"/>
+                <a16:creationId xmlns:a16="http://schemas.microsoft.com/office/drawing/2014/main" id="{EF5D005B-6871-4364-F36F-80C20ECEE66B}"/>
               </a:ext>
             </a:extLst>
           </p:cNvPr>
@@ -598,7 +598,7 @@
     </p:spTree>
     <p:extLst>
       <p:ext uri="{BB962C8B-B14F-4D97-AF65-F5344CB8AC3E}">
-        <p14:creationId xmlns:p14="http://schemas.microsoft.com/office/powerpoint/2010/main" val="443170250"/>
+        <p14:creationId xmlns:p14="http://schemas.microsoft.com/office/powerpoint/2010/main" val="221166398"/>
       </p:ext>
     </p:extLst>
   </p:cSld>
@@ -630,7 +630,7 @@
           <p:cNvPr id="7" name="creative_background">
             <a:extLst>
               <a:ext uri="{FF2B5EF4-FFF2-40B4-BE49-F238E27FC236}">
-                <a16:creationId xmlns:a16="http://schemas.microsoft.com/office/drawing/2014/main" id="{BD3E1CE5-6565-8733-6DFC-4AC892464320}"/>
+                <a16:creationId xmlns:a16="http://schemas.microsoft.com/office/drawing/2014/main" id="{9B0FC975-3817-FCB6-9FC0-B8ED84F2A5DE}"/>
               </a:ext>
             </a:extLst>
           </p:cNvPr>
@@ -703,9 +703,9 @@
           <a:bodyPr/>
           <a:lstStyle/>
           <a:p>
-            <a:fld id="{22B1A858-2238-4D50-A136-D8298B9D7581}" type="datetimeFigureOut">
+            <a:fld id="{17E755F5-25E9-4D58-8061-E75C01E49922}" type="datetimeFigureOut">
               <a:rPr lang="en-US" smtClean="0"/>
-              <a:t>10/3/2026</a:t>
+              <a:t>10/4/2026</a:t>
             </a:fld>
             <a:endParaRPr lang="en-US"/>
           </a:p>
@@ -745,7 +745,7 @@
           <a:bodyPr/>
           <a:lstStyle/>
           <a:p>
-            <a:fld id="{6B7AFC5B-9B31-47DE-8C26-4C4AD0A46382}" type="slidenum">
+            <a:fld id="{878B5E31-6775-4496-83E7-82D86CBA16EC}" type="slidenum">
               <a:rPr lang="en-US" smtClean="0"/>
               <a:t>‹#›</a:t>
             </a:fld>
@@ -758,7 +758,7 @@
           <p:cNvPr id="8" name="body">
             <a:extLst>
               <a:ext uri="{FF2B5EF4-FFF2-40B4-BE49-F238E27FC236}">
-                <a16:creationId xmlns:a16="http://schemas.microsoft.com/office/drawing/2014/main" id="{F04AEBDC-2C14-429B-39EE-E897ADC52C04}"/>
+                <a16:creationId xmlns:a16="http://schemas.microsoft.com/office/drawing/2014/main" id="{C6A61D3E-898A-A923-55A6-6370BA59A3E9}"/>
               </a:ext>
             </a:extLst>
           </p:cNvPr>
@@ -801,7 +801,7 @@
     </p:spTree>
     <p:extLst>
       <p:ext uri="{BB962C8B-B14F-4D97-AF65-F5344CB8AC3E}">
-        <p14:creationId xmlns:p14="http://schemas.microsoft.com/office/powerpoint/2010/main" val="761092590"/>
+        <p14:creationId xmlns:p14="http://schemas.microsoft.com/office/powerpoint/2010/main" val="3924257500"/>
       </p:ext>
     </p:extLst>
   </p:cSld>
@@ -886,7 +886,7 @@
           <p:cNvPr id="6" name="section_number">
             <a:extLst>
               <a:ext uri="{FF2B5EF4-FFF2-40B4-BE49-F238E27FC236}">
-                <a16:creationId xmlns:a16="http://schemas.microsoft.com/office/drawing/2014/main" id="{A959FC7B-18C0-DBA0-9961-39244E770A70}"/>
+                <a16:creationId xmlns:a16="http://schemas.microsoft.com/office/drawing/2014/main" id="{AF80428E-75B7-D333-CD6F-689CE238C23E}"/>
               </a:ext>
             </a:extLst>
           </p:cNvPr>
@@ -939,7 +939,7 @@
           <p:cNvPr id="7" name="subtitle">
             <a:extLst>
               <a:ext uri="{FF2B5EF4-FFF2-40B4-BE49-F238E27FC236}">
-                <a16:creationId xmlns:a16="http://schemas.microsoft.com/office/drawing/2014/main" id="{66E1BD05-3723-ABE7-D2D9-4585193832FF}"/>
+                <a16:creationId xmlns:a16="http://schemas.microsoft.com/office/drawing/2014/main" id="{C9EB316C-E761-EB05-9E6F-EDC12BBA0F89}"/>
               </a:ext>
             </a:extLst>
           </p:cNvPr>
@@ -989,7 +989,7 @@
     </p:spTree>
     <p:extLst>
       <p:ext uri="{BB962C8B-B14F-4D97-AF65-F5344CB8AC3E}">
-        <p14:creationId xmlns:p14="http://schemas.microsoft.com/office/powerpoint/2010/main" val="481995957"/>
+        <p14:creationId xmlns:p14="http://schemas.microsoft.com/office/powerpoint/2010/main" val="2681178073"/>
       </p:ext>
     </p:extLst>
   </p:cSld>
@@ -1021,7 +1021,7 @@
           <p:cNvPr id="7" name="creative_background">
             <a:extLst>
               <a:ext uri="{FF2B5EF4-FFF2-40B4-BE49-F238E27FC236}">
-                <a16:creationId xmlns:a16="http://schemas.microsoft.com/office/drawing/2014/main" id="{9BBA9B33-1926-5751-A19D-8C4A44D91C17}"/>
+                <a16:creationId xmlns:a16="http://schemas.microsoft.com/office/drawing/2014/main" id="{2547D6B2-22E2-744C-CFED-E1A844532A6A}"/>
               </a:ext>
             </a:extLst>
           </p:cNvPr>
@@ -1094,9 +1094,9 @@
           <a:bodyPr/>
           <a:lstStyle/>
           <a:p>
-            <a:fld id="{22B1A858-2238-4D50-A136-D8298B9D7581}" type="datetimeFigureOut">
+            <a:fld id="{17E755F5-25E9-4D58-8061-E75C01E49922}" type="datetimeFigureOut">
               <a:rPr lang="en-US" smtClean="0"/>
-              <a:t>10/3/2026</a:t>
+              <a:t>10/4/2026</a:t>
             </a:fld>
             <a:endParaRPr lang="en-US"/>
           </a:p>
@@ -1136,7 +1136,7 @@
           <a:bodyPr/>
           <a:lstStyle/>
           <a:p>
-            <a:fld id="{6B7AFC5B-9B31-47DE-8C26-4C4AD0A46382}" type="slidenum">
+            <a:fld id="{878B5E31-6775-4496-83E7-82D86CBA16EC}" type="slidenum">
               <a:rPr lang="en-US" smtClean="0"/>
               <a:t>‹#›</a:t>
             </a:fld>
@@ -1149,7 +1149,7 @@
           <p:cNvPr id="8" name="item_1_title">
             <a:extLst>
               <a:ext uri="{FF2B5EF4-FFF2-40B4-BE49-F238E27FC236}">
-                <a16:creationId xmlns:a16="http://schemas.microsoft.com/office/drawing/2014/main" id="{131077D6-EE38-DC50-0DA4-420D170B4BD9}"/>
+                <a16:creationId xmlns:a16="http://schemas.microsoft.com/office/drawing/2014/main" id="{338E57C2-65DE-3B51-99C5-132B81D27172}"/>
               </a:ext>
             </a:extLst>
           </p:cNvPr>
@@ -1199,7 +1199,7 @@
           <p:cNvPr id="9" name="item_1">
             <a:extLst>
               <a:ext uri="{FF2B5EF4-FFF2-40B4-BE49-F238E27FC236}">
-                <a16:creationId xmlns:a16="http://schemas.microsoft.com/office/drawing/2014/main" id="{AC9070DE-1CF6-4D0C-B3F7-37E0996DCEF2}"/>
+                <a16:creationId xmlns:a16="http://schemas.microsoft.com/office/drawing/2014/main" id="{25675800-CB5E-E276-8CF0-7A548CC933F8}"/>
               </a:ext>
             </a:extLst>
           </p:cNvPr>
@@ -1247,7 +1247,7 @@
           <p:cNvPr id="10" name="item_2_title">
             <a:extLst>
               <a:ext uri="{FF2B5EF4-FFF2-40B4-BE49-F238E27FC236}">
-                <a16:creationId xmlns:a16="http://schemas.microsoft.com/office/drawing/2014/main" id="{3171DD0E-50D8-0412-37BE-F887800EA3BA}"/>
+                <a16:creationId xmlns:a16="http://schemas.microsoft.com/office/drawing/2014/main" id="{4306EF31-F2D0-0FB5-F5AA-89B2D01124A6}"/>
               </a:ext>
             </a:extLst>
           </p:cNvPr>
@@ -1300,7 +1300,7 @@
           <p:cNvPr id="11" name="item_2">
             <a:extLst>
               <a:ext uri="{FF2B5EF4-FFF2-40B4-BE49-F238E27FC236}">
-                <a16:creationId xmlns:a16="http://schemas.microsoft.com/office/drawing/2014/main" id="{0E643AA3-5013-C53B-311A-AEB8EAB86FD6}"/>
+                <a16:creationId xmlns:a16="http://schemas.microsoft.com/office/drawing/2014/main" id="{76D62423-5F0C-937D-2D60-33879E7BD11B}"/>
               </a:ext>
             </a:extLst>
           </p:cNvPr>
@@ -1348,7 +1348,7 @@
           <p:cNvPr id="12" name="item_3_title">
             <a:extLst>
               <a:ext uri="{FF2B5EF4-FFF2-40B4-BE49-F238E27FC236}">
-                <a16:creationId xmlns:a16="http://schemas.microsoft.com/office/drawing/2014/main" id="{CF1E9033-E5C0-A6F4-0F53-3200D4CCE3F9}"/>
+                <a16:creationId xmlns:a16="http://schemas.microsoft.com/office/drawing/2014/main" id="{C2AE576E-CA54-8918-4CF4-E43A7D125990}"/>
               </a:ext>
             </a:extLst>
           </p:cNvPr>
@@ -1401,7 +1401,7 @@
           <p:cNvPr id="13" name="item_3">
             <a:extLst>
               <a:ext uri="{FF2B5EF4-FFF2-40B4-BE49-F238E27FC236}">
-                <a16:creationId xmlns:a16="http://schemas.microsoft.com/office/drawing/2014/main" id="{B3FC64FF-69E1-FA35-DE17-567040519ECC}"/>
+                <a16:creationId xmlns:a16="http://schemas.microsoft.com/office/drawing/2014/main" id="{E0D67DBF-E3AB-ECDC-0D14-34EA2A9EFE95}"/>
               </a:ext>
             </a:extLst>
           </p:cNvPr>
@@ -1449,7 +1449,7 @@
           <p:cNvPr id="14" name="item_4_title">
             <a:extLst>
               <a:ext uri="{FF2B5EF4-FFF2-40B4-BE49-F238E27FC236}">
-                <a16:creationId xmlns:a16="http://schemas.microsoft.com/office/drawing/2014/main" id="{FEE8007D-543D-F18A-006C-D4802255B6B3}"/>
+                <a16:creationId xmlns:a16="http://schemas.microsoft.com/office/drawing/2014/main" id="{2262B895-575A-4BB2-ABC3-3783E6E21F88}"/>
               </a:ext>
             </a:extLst>
           </p:cNvPr>
@@ -1502,7 +1502,7 @@
           <p:cNvPr id="15" name="item_4">
             <a:extLst>
               <a:ext uri="{FF2B5EF4-FFF2-40B4-BE49-F238E27FC236}">
-                <a16:creationId xmlns:a16="http://schemas.microsoft.com/office/drawing/2014/main" id="{BC6A4E5F-A0DD-0DB1-820E-7D665127D2E2}"/>
+                <a16:creationId xmlns:a16="http://schemas.microsoft.com/office/drawing/2014/main" id="{406D221F-24FE-88B9-3476-E8983AA6CFA8}"/>
               </a:ext>
             </a:extLst>
           </p:cNvPr>
@@ -1550,7 +1550,7 @@
           <p:cNvPr id="16" name="source">
             <a:extLst>
               <a:ext uri="{FF2B5EF4-FFF2-40B4-BE49-F238E27FC236}">
-                <a16:creationId xmlns:a16="http://schemas.microsoft.com/office/drawing/2014/main" id="{31BBD24D-C025-1B72-0B42-5C1FAA21BA82}"/>
+                <a16:creationId xmlns:a16="http://schemas.microsoft.com/office/drawing/2014/main" id="{ED343A59-D44C-6098-31A4-0D1914554013}"/>
               </a:ext>
             </a:extLst>
           </p:cNvPr>
@@ -1605,7 +1605,7 @@
     </p:spTree>
     <p:extLst>
       <p:ext uri="{BB962C8B-B14F-4D97-AF65-F5344CB8AC3E}">
-        <p14:creationId xmlns:p14="http://schemas.microsoft.com/office/powerpoint/2010/main" val="1638505544"/>
+        <p14:creationId xmlns:p14="http://schemas.microsoft.com/office/powerpoint/2010/main" val="1184999620"/>
       </p:ext>
     </p:extLst>
   </p:cSld>
@@ -1637,7 +1637,7 @@
           <p:cNvPr id="7" name="creative_background">
             <a:extLst>
               <a:ext uri="{FF2B5EF4-FFF2-40B4-BE49-F238E27FC236}">
-                <a16:creationId xmlns:a16="http://schemas.microsoft.com/office/drawing/2014/main" id="{D7F55EC6-F81B-2CE9-9A2F-AC65FC5777CC}"/>
+                <a16:creationId xmlns:a16="http://schemas.microsoft.com/office/drawing/2014/main" id="{756AA517-0F86-BCD2-B293-383E98FDB6B3}"/>
               </a:ext>
             </a:extLst>
           </p:cNvPr>
@@ -1710,9 +1710,9 @@
           <a:bodyPr/>
           <a:lstStyle/>
           <a:p>
-            <a:fld id="{22B1A858-2238-4D50-A136-D8298B9D7581}" type="datetimeFigureOut">
+            <a:fld id="{17E755F5-25E9-4D58-8061-E75C01E49922}" type="datetimeFigureOut">
               <a:rPr lang="en-US" smtClean="0"/>
-              <a:t>10/3/2026</a:t>
+              <a:t>10/4/2026</a:t>
             </a:fld>
             <a:endParaRPr lang="en-US"/>
           </a:p>
@@ -1752,7 +1752,7 @@
           <a:bodyPr/>
           <a:lstStyle/>
           <a:p>
-            <a:fld id="{6B7AFC5B-9B31-47DE-8C26-4C4AD0A46382}" type="slidenum">
+            <a:fld id="{878B5E31-6775-4496-83E7-82D86CBA16EC}" type="slidenum">
               <a:rPr lang="en-US" smtClean="0"/>
               <a:t>‹#›</a:t>
             </a:fld>
@@ -1765,7 +1765,7 @@
           <p:cNvPr id="8" name="body">
             <a:extLst>
               <a:ext uri="{FF2B5EF4-FFF2-40B4-BE49-F238E27FC236}">
-                <a16:creationId xmlns:a16="http://schemas.microsoft.com/office/drawing/2014/main" id="{344A3378-4831-023E-B5E8-BE09BD441819}"/>
+                <a16:creationId xmlns:a16="http://schemas.microsoft.com/office/drawing/2014/main" id="{16EBC65E-2981-4422-7E31-8E3EB65AB880}"/>
               </a:ext>
             </a:extLst>
           </p:cNvPr>
@@ -1810,7 +1810,7 @@
           <p:cNvPr id="9" name="source">
             <a:extLst>
               <a:ext uri="{FF2B5EF4-FFF2-40B4-BE49-F238E27FC236}">
-                <a16:creationId xmlns:a16="http://schemas.microsoft.com/office/drawing/2014/main" id="{34EBD3B9-4F4A-0C96-942B-60B47D2AAA1F}"/>
+                <a16:creationId xmlns:a16="http://schemas.microsoft.com/office/drawing/2014/main" id="{37205E8C-478E-375C-2E0A-50401EA0D37F}"/>
               </a:ext>
             </a:extLst>
           </p:cNvPr>
@@ -1865,7 +1865,7 @@
     </p:spTree>
     <p:extLst>
       <p:ext uri="{BB962C8B-B14F-4D97-AF65-F5344CB8AC3E}">
-        <p14:creationId xmlns:p14="http://schemas.microsoft.com/office/powerpoint/2010/main" val="1690653024"/>
+        <p14:creationId xmlns:p14="http://schemas.microsoft.com/office/powerpoint/2010/main" val="2860833957"/>
       </p:ext>
     </p:extLst>
   </p:cSld>
@@ -1897,7 +1897,7 @@
           <p:cNvPr id="7" name="creative_background">
             <a:extLst>
               <a:ext uri="{FF2B5EF4-FFF2-40B4-BE49-F238E27FC236}">
-                <a16:creationId xmlns:a16="http://schemas.microsoft.com/office/drawing/2014/main" id="{2EE56F8B-5DD2-EEDF-C3F4-C3DC5BA52481}"/>
+                <a16:creationId xmlns:a16="http://schemas.microsoft.com/office/drawing/2014/main" id="{7B2AC3A7-19D7-E90C-B448-373E16B43E15}"/>
               </a:ext>
             </a:extLst>
           </p:cNvPr>
@@ -1970,9 +1970,9 @@
           <a:bodyPr/>
           <a:lstStyle/>
           <a:p>
-            <a:fld id="{22B1A858-2238-4D50-A136-D8298B9D7581}" type="datetimeFigureOut">
+            <a:fld id="{17E755F5-25E9-4D58-8061-E75C01E49922}" type="datetimeFigureOut">
               <a:rPr lang="en-US" smtClean="0"/>
-              <a:t>10/3/2026</a:t>
+              <a:t>10/4/2026</a:t>
             </a:fld>
             <a:endParaRPr lang="en-US"/>
           </a:p>
@@ -2012,7 +2012,7 @@
           <a:bodyPr/>
           <a:lstStyle/>
           <a:p>
-            <a:fld id="{6B7AFC5B-9B31-47DE-8C26-4C4AD0A46382}" type="slidenum">
+            <a:fld id="{878B5E31-6775-4496-83E7-82D86CBA16EC}" type="slidenum">
               <a:rPr lang="en-US" smtClean="0"/>
               <a:t>‹#›</a:t>
             </a:fld>
@@ -2025,7 +2025,7 @@
           <p:cNvPr id="8" name="item_1_title">
             <a:extLst>
               <a:ext uri="{FF2B5EF4-FFF2-40B4-BE49-F238E27FC236}">
-                <a16:creationId xmlns:a16="http://schemas.microsoft.com/office/drawing/2014/main" id="{AF7DABD0-9A1C-3EE0-5498-0CEE612799FD}"/>
+                <a16:creationId xmlns:a16="http://schemas.microsoft.com/office/drawing/2014/main" id="{F49251A2-07F8-3458-10DC-00BEEA06B7DB}"/>
               </a:ext>
             </a:extLst>
           </p:cNvPr>
@@ -2075,7 +2075,7 @@
           <p:cNvPr id="9" name="item_1">
             <a:extLst>
               <a:ext uri="{FF2B5EF4-FFF2-40B4-BE49-F238E27FC236}">
-                <a16:creationId xmlns:a16="http://schemas.microsoft.com/office/drawing/2014/main" id="{D360901D-A403-8356-B6BA-F88A8BABB83A}"/>
+                <a16:creationId xmlns:a16="http://schemas.microsoft.com/office/drawing/2014/main" id="{90850416-017D-84DF-16EE-29D1DA04307C}"/>
               </a:ext>
             </a:extLst>
           </p:cNvPr>
@@ -2123,7 +2123,7 @@
           <p:cNvPr id="10" name="item_2_title">
             <a:extLst>
               <a:ext uri="{FF2B5EF4-FFF2-40B4-BE49-F238E27FC236}">
-                <a16:creationId xmlns:a16="http://schemas.microsoft.com/office/drawing/2014/main" id="{C27CD614-48C9-4C1D-54F1-6265A38D5F53}"/>
+                <a16:creationId xmlns:a16="http://schemas.microsoft.com/office/drawing/2014/main" id="{8ECB9241-5969-CCF4-8900-CD87643AA5E9}"/>
               </a:ext>
             </a:extLst>
           </p:cNvPr>
@@ -2176,7 +2176,7 @@
           <p:cNvPr id="11" name="item_2">
             <a:extLst>
               <a:ext uri="{FF2B5EF4-FFF2-40B4-BE49-F238E27FC236}">
-                <a16:creationId xmlns:a16="http://schemas.microsoft.com/office/drawing/2014/main" id="{EF759483-CA72-C8FE-9810-DB94E3C9090A}"/>
+                <a16:creationId xmlns:a16="http://schemas.microsoft.com/office/drawing/2014/main" id="{4DE40C0A-A3C3-3ADC-D3F4-39600D821EED}"/>
               </a:ext>
             </a:extLst>
           </p:cNvPr>
@@ -2224,7 +2224,7 @@
           <p:cNvPr id="12" name="item_3_title">
             <a:extLst>
               <a:ext uri="{FF2B5EF4-FFF2-40B4-BE49-F238E27FC236}">
-                <a16:creationId xmlns:a16="http://schemas.microsoft.com/office/drawing/2014/main" id="{5245A036-D439-2DA9-CA46-1DC40B4ED749}"/>
+                <a16:creationId xmlns:a16="http://schemas.microsoft.com/office/drawing/2014/main" id="{D619E3A9-7208-6D2B-47E9-5587A34A3882}"/>
               </a:ext>
             </a:extLst>
           </p:cNvPr>
@@ -2277,7 +2277,7 @@
           <p:cNvPr id="13" name="item_3">
             <a:extLst>
               <a:ext uri="{FF2B5EF4-FFF2-40B4-BE49-F238E27FC236}">
-                <a16:creationId xmlns:a16="http://schemas.microsoft.com/office/drawing/2014/main" id="{2FDC5D4B-D492-D944-5F77-D71D4131AD90}"/>
+                <a16:creationId xmlns:a16="http://schemas.microsoft.com/office/drawing/2014/main" id="{14D54313-0C1B-3105-45AF-F85F15938C76}"/>
               </a:ext>
             </a:extLst>
           </p:cNvPr>
@@ -2325,7 +2325,7 @@
           <p:cNvPr id="14" name="item_4_title">
             <a:extLst>
               <a:ext uri="{FF2B5EF4-FFF2-40B4-BE49-F238E27FC236}">
-                <a16:creationId xmlns:a16="http://schemas.microsoft.com/office/drawing/2014/main" id="{655CB419-F6DD-BDA9-AD35-B1F675C13706}"/>
+                <a16:creationId xmlns:a16="http://schemas.microsoft.com/office/drawing/2014/main" id="{386A09EA-E9BD-856F-2F93-0516677B1074}"/>
               </a:ext>
             </a:extLst>
           </p:cNvPr>
@@ -2378,7 +2378,7 @@
           <p:cNvPr id="15" name="item_4">
             <a:extLst>
               <a:ext uri="{FF2B5EF4-FFF2-40B4-BE49-F238E27FC236}">
-                <a16:creationId xmlns:a16="http://schemas.microsoft.com/office/drawing/2014/main" id="{0B64F68E-2DE7-775A-9360-C1E8DD7EB379}"/>
+                <a16:creationId xmlns:a16="http://schemas.microsoft.com/office/drawing/2014/main" id="{19AADABA-EBAF-38C7-99CF-1ACF33D154A4}"/>
               </a:ext>
             </a:extLst>
           </p:cNvPr>
@@ -2426,7 +2426,7 @@
           <p:cNvPr id="16" name="source">
             <a:extLst>
               <a:ext uri="{FF2B5EF4-FFF2-40B4-BE49-F238E27FC236}">
-                <a16:creationId xmlns:a16="http://schemas.microsoft.com/office/drawing/2014/main" id="{8636D59B-3AD5-DC99-0556-916F6518C7B5}"/>
+                <a16:creationId xmlns:a16="http://schemas.microsoft.com/office/drawing/2014/main" id="{EE3C79B8-6525-C1CA-A9C5-484EF85E3051}"/>
               </a:ext>
             </a:extLst>
           </p:cNvPr>
@@ -2481,7 +2481,7 @@
     </p:spTree>
     <p:extLst>
       <p:ext uri="{BB962C8B-B14F-4D97-AF65-F5344CB8AC3E}">
-        <p14:creationId xmlns:p14="http://schemas.microsoft.com/office/powerpoint/2010/main" val="2643442347"/>
+        <p14:creationId xmlns:p14="http://schemas.microsoft.com/office/powerpoint/2010/main" val="765822408"/>
       </p:ext>
     </p:extLst>
   </p:cSld>
@@ -2513,7 +2513,7 @@
           <p:cNvPr id="7" name="creative_background">
             <a:extLst>
               <a:ext uri="{FF2B5EF4-FFF2-40B4-BE49-F238E27FC236}">
-                <a16:creationId xmlns:a16="http://schemas.microsoft.com/office/drawing/2014/main" id="{D6360C29-B8D9-7F56-CD8D-3EF5EBA4644E}"/>
+                <a16:creationId xmlns:a16="http://schemas.microsoft.com/office/drawing/2014/main" id="{6AF673B5-ECA1-3705-DF95-2B2D53FCADD5}"/>
               </a:ext>
             </a:extLst>
           </p:cNvPr>
@@ -2586,9 +2586,9 @@
           <a:bodyPr/>
           <a:lstStyle/>
           <a:p>
-            <a:fld id="{22B1A858-2238-4D50-A136-D8298B9D7581}" type="datetimeFigureOut">
+            <a:fld id="{17E755F5-25E9-4D58-8061-E75C01E49922}" type="datetimeFigureOut">
               <a:rPr lang="en-US" smtClean="0"/>
-              <a:t>10/3/2026</a:t>
+              <a:t>10/4/2026</a:t>
             </a:fld>
             <a:endParaRPr lang="en-US"/>
           </a:p>
@@ -2628,7 +2628,7 @@
           <a:bodyPr/>
           <a:lstStyle/>
           <a:p>
-            <a:fld id="{6B7AFC5B-9B31-47DE-8C26-4C4AD0A46382}" type="slidenum">
+            <a:fld id="{878B5E31-6775-4496-83E7-82D86CBA16EC}" type="slidenum">
               <a:rPr lang="en-US" smtClean="0"/>
               <a:t>‹#›</a:t>
             </a:fld>
@@ -2641,7 +2641,7 @@
           <p:cNvPr id="8" name="body">
             <a:extLst>
               <a:ext uri="{FF2B5EF4-FFF2-40B4-BE49-F238E27FC236}">
-                <a16:creationId xmlns:a16="http://schemas.microsoft.com/office/drawing/2014/main" id="{7D7AC3ED-9DD2-7121-F352-B848733D06E1}"/>
+                <a16:creationId xmlns:a16="http://schemas.microsoft.com/office/drawing/2014/main" id="{465E3FDD-56F7-C04A-1B5C-E16E2C329B51}"/>
               </a:ext>
             </a:extLst>
           </p:cNvPr>
@@ -2681,7 +2681,7 @@
           <p:cNvPr id="9" name="kpi_value_1">
             <a:extLst>
               <a:ext uri="{FF2B5EF4-FFF2-40B4-BE49-F238E27FC236}">
-                <a16:creationId xmlns:a16="http://schemas.microsoft.com/office/drawing/2014/main" id="{44BFD109-CFF0-495F-BE5F-BAB969FB1E7D}"/>
+                <a16:creationId xmlns:a16="http://schemas.microsoft.com/office/drawing/2014/main" id="{1D9990B8-A579-2D91-7627-C3F88B0B4035}"/>
               </a:ext>
             </a:extLst>
           </p:cNvPr>
@@ -2734,7 +2734,7 @@
           <p:cNvPr id="10" name="kpi_label_1">
             <a:extLst>
               <a:ext uri="{FF2B5EF4-FFF2-40B4-BE49-F238E27FC236}">
-                <a16:creationId xmlns:a16="http://schemas.microsoft.com/office/drawing/2014/main" id="{01D4F321-B721-228B-02A7-D8EFC3929D2A}"/>
+                <a16:creationId xmlns:a16="http://schemas.microsoft.com/office/drawing/2014/main" id="{6D0E29F8-E766-4913-7F87-954411D37E39}"/>
               </a:ext>
             </a:extLst>
           </p:cNvPr>
@@ -2782,7 +2782,7 @@
           <p:cNvPr id="11" name="source">
             <a:extLst>
               <a:ext uri="{FF2B5EF4-FFF2-40B4-BE49-F238E27FC236}">
-                <a16:creationId xmlns:a16="http://schemas.microsoft.com/office/drawing/2014/main" id="{38916106-C873-4AEE-03D8-A38B3291E8ED}"/>
+                <a16:creationId xmlns:a16="http://schemas.microsoft.com/office/drawing/2014/main" id="{99A40FF5-8D70-73B9-C55A-D1FC7460A78B}"/>
               </a:ext>
             </a:extLst>
           </p:cNvPr>
@@ -2837,7 +2837,7 @@
     </p:spTree>
     <p:extLst>
       <p:ext uri="{BB962C8B-B14F-4D97-AF65-F5344CB8AC3E}">
-        <p14:creationId xmlns:p14="http://schemas.microsoft.com/office/powerpoint/2010/main" val="3167086359"/>
+        <p14:creationId xmlns:p14="http://schemas.microsoft.com/office/powerpoint/2010/main" val="424922047"/>
       </p:ext>
     </p:extLst>
   </p:cSld>
@@ -2869,7 +2869,7 @@
           <p:cNvPr id="7" name="creative_background">
             <a:extLst>
               <a:ext uri="{FF2B5EF4-FFF2-40B4-BE49-F238E27FC236}">
-                <a16:creationId xmlns:a16="http://schemas.microsoft.com/office/drawing/2014/main" id="{927D54FC-5FBC-C88C-A33A-58518A5B74C6}"/>
+                <a16:creationId xmlns:a16="http://schemas.microsoft.com/office/drawing/2014/main" id="{0ABD7322-EEC0-1726-A00E-D6DB397B5AEB}"/>
               </a:ext>
             </a:extLst>
           </p:cNvPr>
@@ -2942,9 +2942,9 @@
           <a:bodyPr/>
           <a:lstStyle/>
           <a:p>
-            <a:fld id="{22B1A858-2238-4D50-A136-D8298B9D7581}" type="datetimeFigureOut">
+            <a:fld id="{17E755F5-25E9-4D58-8061-E75C01E49922}" type="datetimeFigureOut">
               <a:rPr lang="en-US" smtClean="0"/>
-              <a:t>10/3/2026</a:t>
+              <a:t>10/4/2026</a:t>
             </a:fld>
             <a:endParaRPr lang="en-US"/>
           </a:p>
@@ -2984,7 +2984,7 @@
           <a:bodyPr/>
           <a:lstStyle/>
           <a:p>
-            <a:fld id="{6B7AFC5B-9B31-47DE-8C26-4C4AD0A46382}" type="slidenum">
+            <a:fld id="{878B5E31-6775-4496-83E7-82D86CBA16EC}" type="slidenum">
               <a:rPr lang="en-US" smtClean="0"/>
               <a:t>‹#›</a:t>
             </a:fld>
@@ -2997,7 +2997,7 @@
           <p:cNvPr id="8" name="body">
             <a:extLst>
               <a:ext uri="{FF2B5EF4-FFF2-40B4-BE49-F238E27FC236}">
-                <a16:creationId xmlns:a16="http://schemas.microsoft.com/office/drawing/2014/main" id="{584921CA-2DFE-5F2F-CBF5-7A9DE5733931}"/>
+                <a16:creationId xmlns:a16="http://schemas.microsoft.com/office/drawing/2014/main" id="{076D55B3-ABEF-719F-A387-9B920B1564F5}"/>
               </a:ext>
             </a:extLst>
           </p:cNvPr>
@@ -3037,7 +3037,7 @@
           <p:cNvPr id="9" name="kpi_value_1">
             <a:extLst>
               <a:ext uri="{FF2B5EF4-FFF2-40B4-BE49-F238E27FC236}">
-                <a16:creationId xmlns:a16="http://schemas.microsoft.com/office/drawing/2014/main" id="{3C6BFA87-3A4F-E2B0-20AB-FCE80629A967}"/>
+                <a16:creationId xmlns:a16="http://schemas.microsoft.com/office/drawing/2014/main" id="{F435D489-DB2B-B9F5-E2D9-58956E12C3DA}"/>
               </a:ext>
             </a:extLst>
           </p:cNvPr>
@@ -3090,7 +3090,7 @@
           <p:cNvPr id="10" name="kpi_label_1">
             <a:extLst>
               <a:ext uri="{FF2B5EF4-FFF2-40B4-BE49-F238E27FC236}">
-                <a16:creationId xmlns:a16="http://schemas.microsoft.com/office/drawing/2014/main" id="{EB3D7B72-555B-B742-F268-945A02B86678}"/>
+                <a16:creationId xmlns:a16="http://schemas.microsoft.com/office/drawing/2014/main" id="{66FB3670-7FDA-19B0-825E-2FAF71EC9F62}"/>
               </a:ext>
             </a:extLst>
           </p:cNvPr>
@@ -3138,7 +3138,7 @@
           <p:cNvPr id="11" name="kpi_value_2">
             <a:extLst>
               <a:ext uri="{FF2B5EF4-FFF2-40B4-BE49-F238E27FC236}">
-                <a16:creationId xmlns:a16="http://schemas.microsoft.com/office/drawing/2014/main" id="{A626DB9F-6466-14C5-BA60-2A611D6123EE}"/>
+                <a16:creationId xmlns:a16="http://schemas.microsoft.com/office/drawing/2014/main" id="{16CE2F37-00C7-A50E-3B19-B2ACA540392D}"/>
               </a:ext>
             </a:extLst>
           </p:cNvPr>
@@ -3191,7 +3191,7 @@
           <p:cNvPr id="12" name="kpi_label_2">
             <a:extLst>
               <a:ext uri="{FF2B5EF4-FFF2-40B4-BE49-F238E27FC236}">
-                <a16:creationId xmlns:a16="http://schemas.microsoft.com/office/drawing/2014/main" id="{33D9B51E-6E6E-6EA7-9BF6-3C10B7B2F65E}"/>
+                <a16:creationId xmlns:a16="http://schemas.microsoft.com/office/drawing/2014/main" id="{31401F69-9700-9F43-4E6D-9C86CA61FABA}"/>
               </a:ext>
             </a:extLst>
           </p:cNvPr>
@@ -3239,7 +3239,7 @@
           <p:cNvPr id="13" name="kpi_value_3">
             <a:extLst>
               <a:ext uri="{FF2B5EF4-FFF2-40B4-BE49-F238E27FC236}">
-                <a16:creationId xmlns:a16="http://schemas.microsoft.com/office/drawing/2014/main" id="{A66C80A0-A581-FE09-FCEB-4B4E81E2088D}"/>
+                <a16:creationId xmlns:a16="http://schemas.microsoft.com/office/drawing/2014/main" id="{15667192-25B4-B3C3-4BF0-619EC56B6738}"/>
               </a:ext>
             </a:extLst>
           </p:cNvPr>
@@ -3292,7 +3292,7 @@
           <p:cNvPr id="14" name="kpi_label_3">
             <a:extLst>
               <a:ext uri="{FF2B5EF4-FFF2-40B4-BE49-F238E27FC236}">
-                <a16:creationId xmlns:a16="http://schemas.microsoft.com/office/drawing/2014/main" id="{4D5B13A9-ECA2-33E1-0461-68372B2B8B98}"/>
+                <a16:creationId xmlns:a16="http://schemas.microsoft.com/office/drawing/2014/main" id="{F4A80B17-3B01-36DE-4141-C26081EA3937}"/>
               </a:ext>
             </a:extLst>
           </p:cNvPr>
@@ -3340,7 +3340,7 @@
           <p:cNvPr id="15" name="kpi_value_4">
             <a:extLst>
               <a:ext uri="{FF2B5EF4-FFF2-40B4-BE49-F238E27FC236}">
-                <a16:creationId xmlns:a16="http://schemas.microsoft.com/office/drawing/2014/main" id="{840E128D-9A4E-239F-BA64-20112BF81792}"/>
+                <a16:creationId xmlns:a16="http://schemas.microsoft.com/office/drawing/2014/main" id="{49759D5B-B278-11F9-C3AB-72184468C556}"/>
               </a:ext>
             </a:extLst>
           </p:cNvPr>
@@ -3393,7 +3393,7 @@
           <p:cNvPr id="16" name="kpi_label_4">
             <a:extLst>
               <a:ext uri="{FF2B5EF4-FFF2-40B4-BE49-F238E27FC236}">
-                <a16:creationId xmlns:a16="http://schemas.microsoft.com/office/drawing/2014/main" id="{475DB2EF-D918-0A25-017E-D454F72B78A5}"/>
+                <a16:creationId xmlns:a16="http://schemas.microsoft.com/office/drawing/2014/main" id="{1A26B178-A38F-A3D1-3A62-0DBA962A9C75}"/>
               </a:ext>
             </a:extLst>
           </p:cNvPr>
@@ -3441,7 +3441,7 @@
           <p:cNvPr id="17" name="source">
             <a:extLst>
               <a:ext uri="{FF2B5EF4-FFF2-40B4-BE49-F238E27FC236}">
-                <a16:creationId xmlns:a16="http://schemas.microsoft.com/office/drawing/2014/main" id="{E0891126-EA10-B7AF-C7BD-4AEC71D097E0}"/>
+                <a16:creationId xmlns:a16="http://schemas.microsoft.com/office/drawing/2014/main" id="{D09BC33C-F7F8-DE63-3A7D-631D1AFE4EFC}"/>
               </a:ext>
             </a:extLst>
           </p:cNvPr>
@@ -3496,7 +3496,7 @@
     </p:spTree>
     <p:extLst>
       <p:ext uri="{BB962C8B-B14F-4D97-AF65-F5344CB8AC3E}">
-        <p14:creationId xmlns:p14="http://schemas.microsoft.com/office/powerpoint/2010/main" val="1768892213"/>
+        <p14:creationId xmlns:p14="http://schemas.microsoft.com/office/powerpoint/2010/main" val="2994202929"/>
       </p:ext>
     </p:extLst>
   </p:cSld>
@@ -3528,7 +3528,7 @@
           <p:cNvPr id="7" name="creative_background">
             <a:extLst>
               <a:ext uri="{FF2B5EF4-FFF2-40B4-BE49-F238E27FC236}">
-                <a16:creationId xmlns:a16="http://schemas.microsoft.com/office/drawing/2014/main" id="{7CF551A8-916C-6EFC-8999-7AFDAFE4F4C3}"/>
+                <a16:creationId xmlns:a16="http://schemas.microsoft.com/office/drawing/2014/main" id="{1413EC88-17E1-0C60-6775-BF26B45970C1}"/>
               </a:ext>
             </a:extLst>
           </p:cNvPr>
@@ -3601,9 +3601,9 @@
           <a:bodyPr/>
           <a:lstStyle/>
           <a:p>
-            <a:fld id="{22B1A858-2238-4D50-A136-D8298B9D7581}" type="datetimeFigureOut">
+            <a:fld id="{17E755F5-25E9-4D58-8061-E75C01E49922}" type="datetimeFigureOut">
               <a:rPr lang="en-US" smtClean="0"/>
-              <a:t>10/3/2026</a:t>
+              <a:t>10/4/2026</a:t>
             </a:fld>
             <a:endParaRPr lang="en-US"/>
           </a:p>
@@ -3643,7 +3643,7 @@
           <a:bodyPr/>
           <a:lstStyle/>
           <a:p>
-            <a:fld id="{6B7AFC5B-9B31-47DE-8C26-4C4AD0A46382}" type="slidenum">
+            <a:fld id="{878B5E31-6775-4496-83E7-82D86CBA16EC}" type="slidenum">
               <a:rPr lang="en-US" smtClean="0"/>
               <a:t>‹#›</a:t>
             </a:fld>
@@ -3656,7 +3656,7 @@
           <p:cNvPr id="8" name="body">
             <a:extLst>
               <a:ext uri="{FF2B5EF4-FFF2-40B4-BE49-F238E27FC236}">
-                <a16:creationId xmlns:a16="http://schemas.microsoft.com/office/drawing/2014/main" id="{C4DD5711-0D5A-9B6B-8D95-4AB2B9D3D8B7}"/>
+                <a16:creationId xmlns:a16="http://schemas.microsoft.com/office/drawing/2014/main" id="{5A71D750-1320-C72A-2E09-A08897E0FA1C}"/>
               </a:ext>
             </a:extLst>
           </p:cNvPr>
@@ -3696,7 +3696,7 @@
           <p:cNvPr id="9" name="kpi_value_1">
             <a:extLst>
               <a:ext uri="{FF2B5EF4-FFF2-40B4-BE49-F238E27FC236}">
-                <a16:creationId xmlns:a16="http://schemas.microsoft.com/office/drawing/2014/main" id="{4EC592D5-8EFC-863A-9F2D-1C7D8A54F784}"/>
+                <a16:creationId xmlns:a16="http://schemas.microsoft.com/office/drawing/2014/main" id="{E67A2CFC-AF32-3CC8-742D-B1CED6E1BA05}"/>
               </a:ext>
             </a:extLst>
           </p:cNvPr>
@@ -3749,7 +3749,7 @@
           <p:cNvPr id="10" name="kpi_label_1">
             <a:extLst>
               <a:ext uri="{FF2B5EF4-FFF2-40B4-BE49-F238E27FC236}">
-                <a16:creationId xmlns:a16="http://schemas.microsoft.com/office/drawing/2014/main" id="{8D743105-E935-8FF3-FBDB-67FC910840E7}"/>
+                <a16:creationId xmlns:a16="http://schemas.microsoft.com/office/drawing/2014/main" id="{0AE10E51-210E-4F65-A7C2-F096EDA006C2}"/>
               </a:ext>
             </a:extLst>
           </p:cNvPr>
@@ -3797,7 +3797,7 @@
           <p:cNvPr id="11" name="kpi_value_2">
             <a:extLst>
               <a:ext uri="{FF2B5EF4-FFF2-40B4-BE49-F238E27FC236}">
-                <a16:creationId xmlns:a16="http://schemas.microsoft.com/office/drawing/2014/main" id="{C86578F7-847A-66C0-E8A6-A0E2BEAEB464}"/>
+                <a16:creationId xmlns:a16="http://schemas.microsoft.com/office/drawing/2014/main" id="{D7246699-E780-386E-56AF-FF3128A7C012}"/>
               </a:ext>
             </a:extLst>
           </p:cNvPr>
@@ -3850,7 +3850,7 @@
           <p:cNvPr id="12" name="kpi_label_2">
             <a:extLst>
               <a:ext uri="{FF2B5EF4-FFF2-40B4-BE49-F238E27FC236}">
-                <a16:creationId xmlns:a16="http://schemas.microsoft.com/office/drawing/2014/main" id="{CFE8A12C-7806-C3B8-B869-75CBEAB18231}"/>
+                <a16:creationId xmlns:a16="http://schemas.microsoft.com/office/drawing/2014/main" id="{E6E22060-2B50-CCE2-A6D1-078E76902E40}"/>
               </a:ext>
             </a:extLst>
           </p:cNvPr>
@@ -3898,7 +3898,7 @@
           <p:cNvPr id="13" name="source">
             <a:extLst>
               <a:ext uri="{FF2B5EF4-FFF2-40B4-BE49-F238E27FC236}">
-                <a16:creationId xmlns:a16="http://schemas.microsoft.com/office/drawing/2014/main" id="{302658F9-956C-90B3-AA3E-EC03FF2D373D}"/>
+                <a16:creationId xmlns:a16="http://schemas.microsoft.com/office/drawing/2014/main" id="{8A9FDF57-95CC-A00E-A3A2-1BEAB142E3BC}"/>
               </a:ext>
             </a:extLst>
           </p:cNvPr>
@@ -3953,7 +3953,7 @@
     </p:spTree>
     <p:extLst>
       <p:ext uri="{BB962C8B-B14F-4D97-AF65-F5344CB8AC3E}">
-        <p14:creationId xmlns:p14="http://schemas.microsoft.com/office/powerpoint/2010/main" val="2120906685"/>
+        <p14:creationId xmlns:p14="http://schemas.microsoft.com/office/powerpoint/2010/main" val="1969205391"/>
       </p:ext>
     </p:extLst>
   </p:cSld>
@@ -3985,7 +3985,7 @@
           <p:cNvPr id="7" name="creative_background">
             <a:extLst>
               <a:ext uri="{FF2B5EF4-FFF2-40B4-BE49-F238E27FC236}">
-                <a16:creationId xmlns:a16="http://schemas.microsoft.com/office/drawing/2014/main" id="{6D5AFA5C-8B22-E79C-F783-96493D0A7207}"/>
+                <a16:creationId xmlns:a16="http://schemas.microsoft.com/office/drawing/2014/main" id="{AD3AAFA5-8472-BFF4-0C5E-54A128220628}"/>
               </a:ext>
             </a:extLst>
           </p:cNvPr>
@@ -4058,9 +4058,9 @@
           <a:bodyPr/>
           <a:lstStyle/>
           <a:p>
-            <a:fld id="{22B1A858-2238-4D50-A136-D8298B9D7581}" type="datetimeFigureOut">
+            <a:fld id="{17E755F5-25E9-4D58-8061-E75C01E49922}" type="datetimeFigureOut">
               <a:rPr lang="en-US" smtClean="0"/>
-              <a:t>10/3/2026</a:t>
+              <a:t>10/4/2026</a:t>
             </a:fld>
             <a:endParaRPr lang="en-US"/>
           </a:p>
@@ -4100,7 +4100,7 @@
           <a:bodyPr/>
           <a:lstStyle/>
           <a:p>
-            <a:fld id="{6B7AFC5B-9B31-47DE-8C26-4C4AD0A46382}" type="slidenum">
+            <a:fld id="{878B5E31-6775-4496-83E7-82D86CBA16EC}" type="slidenum">
               <a:rPr lang="en-US" smtClean="0"/>
               <a:t>‹#›</a:t>
             </a:fld>
@@ -4113,7 +4113,7 @@
           <p:cNvPr id="8" name="body">
             <a:extLst>
               <a:ext uri="{FF2B5EF4-FFF2-40B4-BE49-F238E27FC236}">
-                <a16:creationId xmlns:a16="http://schemas.microsoft.com/office/drawing/2014/main" id="{F3FE6717-20B5-A805-6271-7B68D338C664}"/>
+                <a16:creationId xmlns:a16="http://schemas.microsoft.com/office/drawing/2014/main" id="{24738ED9-886D-87A2-94C3-FCE45DB8D493}"/>
               </a:ext>
             </a:extLst>
           </p:cNvPr>
@@ -4153,7 +4153,7 @@
           <p:cNvPr id="9" name="kpi_value_1">
             <a:extLst>
               <a:ext uri="{FF2B5EF4-FFF2-40B4-BE49-F238E27FC236}">
-                <a16:creationId xmlns:a16="http://schemas.microsoft.com/office/drawing/2014/main" id="{5D725A1D-614E-B9E0-332D-0A9E7DE392ED}"/>
+                <a16:creationId xmlns:a16="http://schemas.microsoft.com/office/drawing/2014/main" id="{EFA732E3-67AE-54FA-CF59-16B891498389}"/>
               </a:ext>
             </a:extLst>
           </p:cNvPr>
@@ -4206,7 +4206,7 @@
           <p:cNvPr id="10" name="kpi_label_1">
             <a:extLst>
               <a:ext uri="{FF2B5EF4-FFF2-40B4-BE49-F238E27FC236}">
-                <a16:creationId xmlns:a16="http://schemas.microsoft.com/office/drawing/2014/main" id="{B3BCF85C-2658-FF44-048D-85FA55508CA9}"/>
+                <a16:creationId xmlns:a16="http://schemas.microsoft.com/office/drawing/2014/main" id="{E4387024-2118-4422-88AB-8A4FCE75ED40}"/>
               </a:ext>
             </a:extLst>
           </p:cNvPr>
@@ -4254,7 +4254,7 @@
           <p:cNvPr id="11" name="kpi_value_2">
             <a:extLst>
               <a:ext uri="{FF2B5EF4-FFF2-40B4-BE49-F238E27FC236}">
-                <a16:creationId xmlns:a16="http://schemas.microsoft.com/office/drawing/2014/main" id="{D0D34A42-128B-B14F-9A1C-0ED9C74ECC64}"/>
+                <a16:creationId xmlns:a16="http://schemas.microsoft.com/office/drawing/2014/main" id="{139BF4FD-DB85-1642-2F5D-E198FBDB90DC}"/>
               </a:ext>
             </a:extLst>
           </p:cNvPr>
@@ -4307,7 +4307,7 @@
           <p:cNvPr id="12" name="kpi_label_2">
             <a:extLst>
               <a:ext uri="{FF2B5EF4-FFF2-40B4-BE49-F238E27FC236}">
-                <a16:creationId xmlns:a16="http://schemas.microsoft.com/office/drawing/2014/main" id="{B56FDAE5-11E5-42B9-0216-FBB4CF14FC16}"/>
+                <a16:creationId xmlns:a16="http://schemas.microsoft.com/office/drawing/2014/main" id="{CB03AD23-8AEF-F375-B744-EE49C4F561B6}"/>
               </a:ext>
             </a:extLst>
           </p:cNvPr>
@@ -4355,7 +4355,7 @@
           <p:cNvPr id="13" name="kpi_value_3">
             <a:extLst>
               <a:ext uri="{FF2B5EF4-FFF2-40B4-BE49-F238E27FC236}">
-                <a16:creationId xmlns:a16="http://schemas.microsoft.com/office/drawing/2014/main" id="{9452C64C-7768-C146-E3D3-917653E71B51}"/>
+                <a16:creationId xmlns:a16="http://schemas.microsoft.com/office/drawing/2014/main" id="{124ED023-A265-4D49-CF2D-8E71A654609C}"/>
               </a:ext>
             </a:extLst>
           </p:cNvPr>
@@ -4408,7 +4408,7 @@
           <p:cNvPr id="14" name="kpi_label_3">
             <a:extLst>
               <a:ext uri="{FF2B5EF4-FFF2-40B4-BE49-F238E27FC236}">
-                <a16:creationId xmlns:a16="http://schemas.microsoft.com/office/drawing/2014/main" id="{A145C4E1-3FF2-EE2E-FBA0-CAD87D37B873}"/>
+                <a16:creationId xmlns:a16="http://schemas.microsoft.com/office/drawing/2014/main" id="{4EA28F56-9FC7-32BC-A900-CDD2DBFD2348}"/>
               </a:ext>
             </a:extLst>
           </p:cNvPr>
@@ -4456,7 +4456,7 @@
           <p:cNvPr id="15" name="kpi_value_4">
             <a:extLst>
               <a:ext uri="{FF2B5EF4-FFF2-40B4-BE49-F238E27FC236}">
-                <a16:creationId xmlns:a16="http://schemas.microsoft.com/office/drawing/2014/main" id="{3DC827B3-4AF0-CECB-951A-F353BB35F46E}"/>
+                <a16:creationId xmlns:a16="http://schemas.microsoft.com/office/drawing/2014/main" id="{7D73159D-C01F-3984-423A-4E025DB2CB69}"/>
               </a:ext>
             </a:extLst>
           </p:cNvPr>
@@ -4509,7 +4509,7 @@
           <p:cNvPr id="16" name="kpi_label_4">
             <a:extLst>
               <a:ext uri="{FF2B5EF4-FFF2-40B4-BE49-F238E27FC236}">
-                <a16:creationId xmlns:a16="http://schemas.microsoft.com/office/drawing/2014/main" id="{0B6A6107-1ADC-7048-6055-02EE6FFDB034}"/>
+                <a16:creationId xmlns:a16="http://schemas.microsoft.com/office/drawing/2014/main" id="{C13AB6AF-94DE-C847-B9A9-BACB6670CB27}"/>
               </a:ext>
             </a:extLst>
           </p:cNvPr>
@@ -4557,7 +4557,7 @@
           <p:cNvPr id="17" name="source">
             <a:extLst>
               <a:ext uri="{FF2B5EF4-FFF2-40B4-BE49-F238E27FC236}">
-                <a16:creationId xmlns:a16="http://schemas.microsoft.com/office/drawing/2014/main" id="{361CED1C-9177-3499-2208-2949BE85309C}"/>
+                <a16:creationId xmlns:a16="http://schemas.microsoft.com/office/drawing/2014/main" id="{E67B91F7-7E1D-6620-FDEB-96B9A21D0BBD}"/>
               </a:ext>
             </a:extLst>
           </p:cNvPr>
@@ -4612,7 +4612,7 @@
     </p:spTree>
     <p:extLst>
       <p:ext uri="{BB962C8B-B14F-4D97-AF65-F5344CB8AC3E}">
-        <p14:creationId xmlns:p14="http://schemas.microsoft.com/office/powerpoint/2010/main" val="2775566711"/>
+        <p14:creationId xmlns:p14="http://schemas.microsoft.com/office/powerpoint/2010/main" val="860031698"/>
       </p:ext>
     </p:extLst>
   </p:cSld>
@@ -4644,7 +4644,7 @@
           <p:cNvPr id="7" name="creative_background">
             <a:extLst>
               <a:ext uri="{FF2B5EF4-FFF2-40B4-BE49-F238E27FC236}">
-                <a16:creationId xmlns:a16="http://schemas.microsoft.com/office/drawing/2014/main" id="{DB28B238-58CF-86E0-C2B2-06468EB672DD}"/>
+                <a16:creationId xmlns:a16="http://schemas.microsoft.com/office/drawing/2014/main" id="{1C0F85AF-DD6F-6A04-80AA-74014BD15672}"/>
               </a:ext>
             </a:extLst>
           </p:cNvPr>
@@ -4717,9 +4717,9 @@
           <a:bodyPr/>
           <a:lstStyle/>
           <a:p>
-            <a:fld id="{22B1A858-2238-4D50-A136-D8298B9D7581}" type="datetimeFigureOut">
+            <a:fld id="{17E755F5-25E9-4D58-8061-E75C01E49922}" type="datetimeFigureOut">
               <a:rPr lang="en-US" smtClean="0"/>
-              <a:t>10/3/2026</a:t>
+              <a:t>10/4/2026</a:t>
             </a:fld>
             <a:endParaRPr lang="en-US"/>
           </a:p>
@@ -4759,7 +4759,7 @@
           <a:bodyPr/>
           <a:lstStyle/>
           <a:p>
-            <a:fld id="{6B7AFC5B-9B31-47DE-8C26-4C4AD0A46382}" type="slidenum">
+            <a:fld id="{878B5E31-6775-4496-83E7-82D86CBA16EC}" type="slidenum">
               <a:rPr lang="en-US" smtClean="0"/>
               <a:t>‹#›</a:t>
             </a:fld>
@@ -4772,7 +4772,7 @@
           <p:cNvPr id="8" name="item_1_title">
             <a:extLst>
               <a:ext uri="{FF2B5EF4-FFF2-40B4-BE49-F238E27FC236}">
-                <a16:creationId xmlns:a16="http://schemas.microsoft.com/office/drawing/2014/main" id="{56651330-A0B7-4F24-5872-57DA32A7FC8E}"/>
+                <a16:creationId xmlns:a16="http://schemas.microsoft.com/office/drawing/2014/main" id="{1254F827-8B86-A57B-142A-1CE414DFB0D3}"/>
               </a:ext>
             </a:extLst>
           </p:cNvPr>
@@ -4822,7 +4822,7 @@
           <p:cNvPr id="9" name="item_1">
             <a:extLst>
               <a:ext uri="{FF2B5EF4-FFF2-40B4-BE49-F238E27FC236}">
-                <a16:creationId xmlns:a16="http://schemas.microsoft.com/office/drawing/2014/main" id="{DF773B96-2BCD-E7BE-CB81-4D37E63EBD47}"/>
+                <a16:creationId xmlns:a16="http://schemas.microsoft.com/office/drawing/2014/main" id="{532EF3C5-684B-2CB6-8496-E1951E141F3A}"/>
               </a:ext>
             </a:extLst>
           </p:cNvPr>
@@ -4870,7 +4870,7 @@
           <p:cNvPr id="10" name="item_2_title">
             <a:extLst>
               <a:ext uri="{FF2B5EF4-FFF2-40B4-BE49-F238E27FC236}">
-                <a16:creationId xmlns:a16="http://schemas.microsoft.com/office/drawing/2014/main" id="{B1559678-40D2-79C1-C8D5-D1BD2896CFA6}"/>
+                <a16:creationId xmlns:a16="http://schemas.microsoft.com/office/drawing/2014/main" id="{95D742DA-4FBD-2925-C309-7D8CFAAA7C9A}"/>
               </a:ext>
             </a:extLst>
           </p:cNvPr>
@@ -4923,7 +4923,7 @@
           <p:cNvPr id="11" name="item_2">
             <a:extLst>
               <a:ext uri="{FF2B5EF4-FFF2-40B4-BE49-F238E27FC236}">
-                <a16:creationId xmlns:a16="http://schemas.microsoft.com/office/drawing/2014/main" id="{211D3A30-645F-2117-FCD9-27306A93E2F7}"/>
+                <a16:creationId xmlns:a16="http://schemas.microsoft.com/office/drawing/2014/main" id="{FA47579A-C506-F76A-0EBB-4269B3D6130F}"/>
               </a:ext>
             </a:extLst>
           </p:cNvPr>
@@ -4971,7 +4971,7 @@
           <p:cNvPr id="12" name="item_3_title">
             <a:extLst>
               <a:ext uri="{FF2B5EF4-FFF2-40B4-BE49-F238E27FC236}">
-                <a16:creationId xmlns:a16="http://schemas.microsoft.com/office/drawing/2014/main" id="{C8356413-F3CB-A31C-3DE0-36D4AE94D47C}"/>
+                <a16:creationId xmlns:a16="http://schemas.microsoft.com/office/drawing/2014/main" id="{3E71C905-6A77-CFA8-066D-67897050B4A8}"/>
               </a:ext>
             </a:extLst>
           </p:cNvPr>
@@ -5024,7 +5024,7 @@
           <p:cNvPr id="13" name="item_3">
             <a:extLst>
               <a:ext uri="{FF2B5EF4-FFF2-40B4-BE49-F238E27FC236}">
-                <a16:creationId xmlns:a16="http://schemas.microsoft.com/office/drawing/2014/main" id="{3BC13045-187C-840A-6BFC-1FCDAF44F02C}"/>
+                <a16:creationId xmlns:a16="http://schemas.microsoft.com/office/drawing/2014/main" id="{7A692F5A-36FA-DD35-CE7D-FDC011E6D7F5}"/>
               </a:ext>
             </a:extLst>
           </p:cNvPr>
@@ -5072,7 +5072,7 @@
           <p:cNvPr id="14" name="item_4_title">
             <a:extLst>
               <a:ext uri="{FF2B5EF4-FFF2-40B4-BE49-F238E27FC236}">
-                <a16:creationId xmlns:a16="http://schemas.microsoft.com/office/drawing/2014/main" id="{2D63756E-4BD8-818E-F576-9E6FCB52DD4F}"/>
+                <a16:creationId xmlns:a16="http://schemas.microsoft.com/office/drawing/2014/main" id="{DBAFE4D8-CC33-F8E0-0C49-22CF06C9ACF7}"/>
               </a:ext>
             </a:extLst>
           </p:cNvPr>
@@ -5125,7 +5125,7 @@
           <p:cNvPr id="15" name="item_4">
             <a:extLst>
               <a:ext uri="{FF2B5EF4-FFF2-40B4-BE49-F238E27FC236}">
-                <a16:creationId xmlns:a16="http://schemas.microsoft.com/office/drawing/2014/main" id="{3E45AD2A-0552-9654-8E91-AADC3A293E3C}"/>
+                <a16:creationId xmlns:a16="http://schemas.microsoft.com/office/drawing/2014/main" id="{0ED26E2E-DE2C-F2E7-0F09-3B4861A80ED2}"/>
               </a:ext>
             </a:extLst>
           </p:cNvPr>
@@ -5173,7 +5173,7 @@
           <p:cNvPr id="16" name="source">
             <a:extLst>
               <a:ext uri="{FF2B5EF4-FFF2-40B4-BE49-F238E27FC236}">
-                <a16:creationId xmlns:a16="http://schemas.microsoft.com/office/drawing/2014/main" id="{BCF7376B-C818-1481-14BD-AFEFDF1E9318}"/>
+                <a16:creationId xmlns:a16="http://schemas.microsoft.com/office/drawing/2014/main" id="{FE94E854-927E-46D4-4293-E934E7272A1E}"/>
               </a:ext>
             </a:extLst>
           </p:cNvPr>
@@ -5228,7 +5228,7 @@
     </p:spTree>
     <p:extLst>
       <p:ext uri="{BB962C8B-B14F-4D97-AF65-F5344CB8AC3E}">
-        <p14:creationId xmlns:p14="http://schemas.microsoft.com/office/powerpoint/2010/main" val="3820611050"/>
+        <p14:creationId xmlns:p14="http://schemas.microsoft.com/office/powerpoint/2010/main" val="3191756801"/>
       </p:ext>
     </p:extLst>
   </p:cSld>
@@ -5260,7 +5260,7 @@
           <p:cNvPr id="7" name="creative_background">
             <a:extLst>
               <a:ext uri="{FF2B5EF4-FFF2-40B4-BE49-F238E27FC236}">
-                <a16:creationId xmlns:a16="http://schemas.microsoft.com/office/drawing/2014/main" id="{B7D9C6F3-7863-083C-F038-CFF24D22B097}"/>
+                <a16:creationId xmlns:a16="http://schemas.microsoft.com/office/drawing/2014/main" id="{1392307A-C0BA-3EAB-3E09-6DE23CB3136D}"/>
               </a:ext>
             </a:extLst>
           </p:cNvPr>
@@ -5333,9 +5333,9 @@
           <a:bodyPr/>
           <a:lstStyle/>
           <a:p>
-            <a:fld id="{22B1A858-2238-4D50-A136-D8298B9D7581}" type="datetimeFigureOut">
+            <a:fld id="{17E755F5-25E9-4D58-8061-E75C01E49922}" type="datetimeFigureOut">
               <a:rPr lang="en-US" smtClean="0"/>
-              <a:t>10/3/2026</a:t>
+              <a:t>10/4/2026</a:t>
             </a:fld>
             <a:endParaRPr lang="en-US"/>
           </a:p>
@@ -5375,7 +5375,7 @@
           <a:bodyPr/>
           <a:lstStyle/>
           <a:p>
-            <a:fld id="{6B7AFC5B-9B31-47DE-8C26-4C4AD0A46382}" type="slidenum">
+            <a:fld id="{878B5E31-6775-4496-83E7-82D86CBA16EC}" type="slidenum">
               <a:rPr lang="en-US" smtClean="0"/>
               <a:t>‹#›</a:t>
             </a:fld>
@@ -5388,7 +5388,7 @@
           <p:cNvPr id="8" name="marker_1">
             <a:extLst>
               <a:ext uri="{FF2B5EF4-FFF2-40B4-BE49-F238E27FC236}">
-                <a16:creationId xmlns:a16="http://schemas.microsoft.com/office/drawing/2014/main" id="{E5339670-FBBB-7F13-4FA5-5DA0EB355280}"/>
+                <a16:creationId xmlns:a16="http://schemas.microsoft.com/office/drawing/2014/main" id="{967519F8-6C59-FAB3-A503-5CE3C64ACE8C}"/>
               </a:ext>
             </a:extLst>
           </p:cNvPr>
@@ -5444,7 +5444,7 @@
           <p:cNvPr id="9" name="item_1_title">
             <a:extLst>
               <a:ext uri="{FF2B5EF4-FFF2-40B4-BE49-F238E27FC236}">
-                <a16:creationId xmlns:a16="http://schemas.microsoft.com/office/drawing/2014/main" id="{5774AF0D-978D-6B09-6AAF-A3558F4D65BD}"/>
+                <a16:creationId xmlns:a16="http://schemas.microsoft.com/office/drawing/2014/main" id="{3D330100-9CE6-E471-F148-6AD08D720364}"/>
               </a:ext>
             </a:extLst>
           </p:cNvPr>
@@ -5497,7 +5497,7 @@
           <p:cNvPr id="10" name="item_1">
             <a:extLst>
               <a:ext uri="{FF2B5EF4-FFF2-40B4-BE49-F238E27FC236}">
-                <a16:creationId xmlns:a16="http://schemas.microsoft.com/office/drawing/2014/main" id="{9BC52F97-8324-CA0F-934B-C77297DDD945}"/>
+                <a16:creationId xmlns:a16="http://schemas.microsoft.com/office/drawing/2014/main" id="{F7CE45A6-BCFE-9415-89CB-D03E10617E61}"/>
               </a:ext>
             </a:extLst>
           </p:cNvPr>
@@ -5545,7 +5545,7 @@
           <p:cNvPr id="11" name="marker_2">
             <a:extLst>
               <a:ext uri="{FF2B5EF4-FFF2-40B4-BE49-F238E27FC236}">
-                <a16:creationId xmlns:a16="http://schemas.microsoft.com/office/drawing/2014/main" id="{13EC149A-1547-AB82-DA63-8CF417BE2810}"/>
+                <a16:creationId xmlns:a16="http://schemas.microsoft.com/office/drawing/2014/main" id="{6007DE7D-6DA7-D05E-B7B4-C75562EE3708}"/>
               </a:ext>
             </a:extLst>
           </p:cNvPr>
@@ -5601,7 +5601,7 @@
           <p:cNvPr id="12" name="item_2_title">
             <a:extLst>
               <a:ext uri="{FF2B5EF4-FFF2-40B4-BE49-F238E27FC236}">
-                <a16:creationId xmlns:a16="http://schemas.microsoft.com/office/drawing/2014/main" id="{7274B344-44B9-6DA4-4400-1BCBDD0500E6}"/>
+                <a16:creationId xmlns:a16="http://schemas.microsoft.com/office/drawing/2014/main" id="{6446F999-76D5-0D29-41DE-6C8621DCD126}"/>
               </a:ext>
             </a:extLst>
           </p:cNvPr>
@@ -5654,7 +5654,7 @@
           <p:cNvPr id="13" name="item_2">
             <a:extLst>
               <a:ext uri="{FF2B5EF4-FFF2-40B4-BE49-F238E27FC236}">
-                <a16:creationId xmlns:a16="http://schemas.microsoft.com/office/drawing/2014/main" id="{AE799014-F165-FA6F-724D-BCE8CF55CA23}"/>
+                <a16:creationId xmlns:a16="http://schemas.microsoft.com/office/drawing/2014/main" id="{1CD3633B-5A8C-99F7-EB14-A55116C1F64E}"/>
               </a:ext>
             </a:extLst>
           </p:cNvPr>
@@ -5702,7 +5702,7 @@
           <p:cNvPr id="14" name="source">
             <a:extLst>
               <a:ext uri="{FF2B5EF4-FFF2-40B4-BE49-F238E27FC236}">
-                <a16:creationId xmlns:a16="http://schemas.microsoft.com/office/drawing/2014/main" id="{096C47EC-4FC9-5EF5-FCBB-D5D94FF2CC4C}"/>
+                <a16:creationId xmlns:a16="http://schemas.microsoft.com/office/drawing/2014/main" id="{81D4FACD-B445-73BE-0558-C227B7CCD28D}"/>
               </a:ext>
             </a:extLst>
           </p:cNvPr>
@@ -5757,7 +5757,7 @@
     </p:spTree>
     <p:extLst>
       <p:ext uri="{BB962C8B-B14F-4D97-AF65-F5344CB8AC3E}">
-        <p14:creationId xmlns:p14="http://schemas.microsoft.com/office/powerpoint/2010/main" val="1063305578"/>
+        <p14:creationId xmlns:p14="http://schemas.microsoft.com/office/powerpoint/2010/main" val="757324824"/>
       </p:ext>
     </p:extLst>
   </p:cSld>
@@ -5789,7 +5789,7 @@
           <p:cNvPr id="7" name="creative_background">
             <a:extLst>
               <a:ext uri="{FF2B5EF4-FFF2-40B4-BE49-F238E27FC236}">
-                <a16:creationId xmlns:a16="http://schemas.microsoft.com/office/drawing/2014/main" id="{B0E41E45-B2D2-A593-E6DC-FEF7DDF8D985}"/>
+                <a16:creationId xmlns:a16="http://schemas.microsoft.com/office/drawing/2014/main" id="{263BBA8B-0B7A-0470-59EC-B670CC2142FE}"/>
               </a:ext>
             </a:extLst>
           </p:cNvPr>
@@ -5862,9 +5862,9 @@
           <a:bodyPr/>
           <a:lstStyle/>
           <a:p>
-            <a:fld id="{22B1A858-2238-4D50-A136-D8298B9D7581}" type="datetimeFigureOut">
+            <a:fld id="{17E755F5-25E9-4D58-8061-E75C01E49922}" type="datetimeFigureOut">
               <a:rPr lang="en-US" smtClean="0"/>
-              <a:t>10/3/2026</a:t>
+              <a:t>10/4/2026</a:t>
             </a:fld>
             <a:endParaRPr lang="en-US"/>
           </a:p>
@@ -5904,7 +5904,7 @@
           <a:bodyPr/>
           <a:lstStyle/>
           <a:p>
-            <a:fld id="{6B7AFC5B-9B31-47DE-8C26-4C4AD0A46382}" type="slidenum">
+            <a:fld id="{878B5E31-6775-4496-83E7-82D86CBA16EC}" type="slidenum">
               <a:rPr lang="en-US" smtClean="0"/>
               <a:t>‹#›</a:t>
             </a:fld>
@@ -5917,7 +5917,7 @@
           <p:cNvPr id="8" name="item_1_title">
             <a:extLst>
               <a:ext uri="{FF2B5EF4-FFF2-40B4-BE49-F238E27FC236}">
-                <a16:creationId xmlns:a16="http://schemas.microsoft.com/office/drawing/2014/main" id="{DA43ACCB-7D92-FF84-C963-4066263AD9E9}"/>
+                <a16:creationId xmlns:a16="http://schemas.microsoft.com/office/drawing/2014/main" id="{22ACE144-2A76-C65D-AB85-D96BB2EC07DC}"/>
               </a:ext>
             </a:extLst>
           </p:cNvPr>
@@ -5967,7 +5967,7 @@
           <p:cNvPr id="9" name="item_1">
             <a:extLst>
               <a:ext uri="{FF2B5EF4-FFF2-40B4-BE49-F238E27FC236}">
-                <a16:creationId xmlns:a16="http://schemas.microsoft.com/office/drawing/2014/main" id="{EBFCB9CA-4F0C-C3F4-C172-5F3813F19C0F}"/>
+                <a16:creationId xmlns:a16="http://schemas.microsoft.com/office/drawing/2014/main" id="{EAB30F29-680E-5175-3EE6-81889581E1F1}"/>
               </a:ext>
             </a:extLst>
           </p:cNvPr>
@@ -6015,7 +6015,7 @@
           <p:cNvPr id="10" name="item_2_title">
             <a:extLst>
               <a:ext uri="{FF2B5EF4-FFF2-40B4-BE49-F238E27FC236}">
-                <a16:creationId xmlns:a16="http://schemas.microsoft.com/office/drawing/2014/main" id="{367B17DF-6096-9C9E-9FCD-06695BA7C20C}"/>
+                <a16:creationId xmlns:a16="http://schemas.microsoft.com/office/drawing/2014/main" id="{3ED4D89B-FA4A-E7C5-44E6-1617F6C28D3B}"/>
               </a:ext>
             </a:extLst>
           </p:cNvPr>
@@ -6068,7 +6068,7 @@
           <p:cNvPr id="11" name="item_2">
             <a:extLst>
               <a:ext uri="{FF2B5EF4-FFF2-40B4-BE49-F238E27FC236}">
-                <a16:creationId xmlns:a16="http://schemas.microsoft.com/office/drawing/2014/main" id="{65CC1389-5E2B-F265-C85A-AD0B60C9B718}"/>
+                <a16:creationId xmlns:a16="http://schemas.microsoft.com/office/drawing/2014/main" id="{7F93252E-9015-63A1-BA01-F5D0A43D0BF9}"/>
               </a:ext>
             </a:extLst>
           </p:cNvPr>
@@ -6116,7 +6116,7 @@
           <p:cNvPr id="12" name="item_3_title">
             <a:extLst>
               <a:ext uri="{FF2B5EF4-FFF2-40B4-BE49-F238E27FC236}">
-                <a16:creationId xmlns:a16="http://schemas.microsoft.com/office/drawing/2014/main" id="{9AE19869-65C5-2BAB-3BA5-6AE3869802B6}"/>
+                <a16:creationId xmlns:a16="http://schemas.microsoft.com/office/drawing/2014/main" id="{23294143-6FF0-DB72-2F2F-5A549A28B259}"/>
               </a:ext>
             </a:extLst>
           </p:cNvPr>
@@ -6169,7 +6169,7 @@
           <p:cNvPr id="13" name="item_3">
             <a:extLst>
               <a:ext uri="{FF2B5EF4-FFF2-40B4-BE49-F238E27FC236}">
-                <a16:creationId xmlns:a16="http://schemas.microsoft.com/office/drawing/2014/main" id="{83311576-7FEB-5423-FECF-884A118C0F24}"/>
+                <a16:creationId xmlns:a16="http://schemas.microsoft.com/office/drawing/2014/main" id="{22CDE611-4142-FB59-BDDF-B43C50C994F0}"/>
               </a:ext>
             </a:extLst>
           </p:cNvPr>
@@ -6217,7 +6217,7 @@
           <p:cNvPr id="14" name="item_4_title">
             <a:extLst>
               <a:ext uri="{FF2B5EF4-FFF2-40B4-BE49-F238E27FC236}">
-                <a16:creationId xmlns:a16="http://schemas.microsoft.com/office/drawing/2014/main" id="{787F075A-A784-FABA-053F-091E4F926226}"/>
+                <a16:creationId xmlns:a16="http://schemas.microsoft.com/office/drawing/2014/main" id="{270C0ECE-AF9B-0BCB-BFD5-DD63D00355D1}"/>
               </a:ext>
             </a:extLst>
           </p:cNvPr>
@@ -6270,7 +6270,7 @@
           <p:cNvPr id="15" name="item_4">
             <a:extLst>
               <a:ext uri="{FF2B5EF4-FFF2-40B4-BE49-F238E27FC236}">
-                <a16:creationId xmlns:a16="http://schemas.microsoft.com/office/drawing/2014/main" id="{BCE0AD3E-C903-94F0-E19D-006710B6BE10}"/>
+                <a16:creationId xmlns:a16="http://schemas.microsoft.com/office/drawing/2014/main" id="{B79548A8-9652-2BED-18D1-BD19F0E6047F}"/>
               </a:ext>
             </a:extLst>
           </p:cNvPr>
@@ -6318,7 +6318,7 @@
           <p:cNvPr id="16" name="source">
             <a:extLst>
               <a:ext uri="{FF2B5EF4-FFF2-40B4-BE49-F238E27FC236}">
-                <a16:creationId xmlns:a16="http://schemas.microsoft.com/office/drawing/2014/main" id="{20955F1D-F4C0-5146-7EB5-E10C6BE741BD}"/>
+                <a16:creationId xmlns:a16="http://schemas.microsoft.com/office/drawing/2014/main" id="{92529DCE-E998-0B97-DF81-F141BE6F0131}"/>
               </a:ext>
             </a:extLst>
           </p:cNvPr>
@@ -6373,7 +6373,7 @@
     </p:spTree>
     <p:extLst>
       <p:ext uri="{BB962C8B-B14F-4D97-AF65-F5344CB8AC3E}">
-        <p14:creationId xmlns:p14="http://schemas.microsoft.com/office/powerpoint/2010/main" val="3593567744"/>
+        <p14:creationId xmlns:p14="http://schemas.microsoft.com/office/powerpoint/2010/main" val="2913940770"/>
       </p:ext>
     </p:extLst>
   </p:cSld>
@@ -6405,7 +6405,7 @@
           <p:cNvPr id="7" name="creative_background">
             <a:extLst>
               <a:ext uri="{FF2B5EF4-FFF2-40B4-BE49-F238E27FC236}">
-                <a16:creationId xmlns:a16="http://schemas.microsoft.com/office/drawing/2014/main" id="{FEF9649A-584F-EC25-F75F-60C67288AF76}"/>
+                <a16:creationId xmlns:a16="http://schemas.microsoft.com/office/drawing/2014/main" id="{C83820D3-12D0-2DA8-6F0E-342DF54112A3}"/>
               </a:ext>
             </a:extLst>
           </p:cNvPr>
@@ -6478,9 +6478,9 @@
           <a:bodyPr/>
           <a:lstStyle/>
           <a:p>
-            <a:fld id="{22B1A858-2238-4D50-A136-D8298B9D7581}" type="datetimeFigureOut">
+            <a:fld id="{17E755F5-25E9-4D58-8061-E75C01E49922}" type="datetimeFigureOut">
               <a:rPr lang="en-US" smtClean="0"/>
-              <a:t>10/3/2026</a:t>
+              <a:t>10/4/2026</a:t>
             </a:fld>
             <a:endParaRPr lang="en-US"/>
           </a:p>
@@ -6520,7 +6520,7 @@
           <a:bodyPr/>
           <a:lstStyle/>
           <a:p>
-            <a:fld id="{6B7AFC5B-9B31-47DE-8C26-4C4AD0A46382}" type="slidenum">
+            <a:fld id="{878B5E31-6775-4496-83E7-82D86CBA16EC}" type="slidenum">
               <a:rPr lang="en-US" smtClean="0"/>
               <a:t>‹#›</a:t>
             </a:fld>
@@ -6533,7 +6533,7 @@
           <p:cNvPr id="8" name="item_1_title">
             <a:extLst>
               <a:ext uri="{FF2B5EF4-FFF2-40B4-BE49-F238E27FC236}">
-                <a16:creationId xmlns:a16="http://schemas.microsoft.com/office/drawing/2014/main" id="{6AE206F9-22BB-E89C-668E-BE7E55DA8563}"/>
+                <a16:creationId xmlns:a16="http://schemas.microsoft.com/office/drawing/2014/main" id="{317C5B64-01AA-2BA3-B03B-0F42010F6610}"/>
               </a:ext>
             </a:extLst>
           </p:cNvPr>
@@ -6583,7 +6583,7 @@
           <p:cNvPr id="9" name="item_1">
             <a:extLst>
               <a:ext uri="{FF2B5EF4-FFF2-40B4-BE49-F238E27FC236}">
-                <a16:creationId xmlns:a16="http://schemas.microsoft.com/office/drawing/2014/main" id="{D2F8C1A9-1DBD-E0E8-5DA1-C132B50F2661}"/>
+                <a16:creationId xmlns:a16="http://schemas.microsoft.com/office/drawing/2014/main" id="{78B26D02-6C9C-329A-E6AC-B773EACE705F}"/>
               </a:ext>
             </a:extLst>
           </p:cNvPr>
@@ -6631,7 +6631,7 @@
           <p:cNvPr id="10" name="item_2_title">
             <a:extLst>
               <a:ext uri="{FF2B5EF4-FFF2-40B4-BE49-F238E27FC236}">
-                <a16:creationId xmlns:a16="http://schemas.microsoft.com/office/drawing/2014/main" id="{01F510E0-3593-61C9-734E-228079879C6E}"/>
+                <a16:creationId xmlns:a16="http://schemas.microsoft.com/office/drawing/2014/main" id="{DBA6E400-8C11-9D95-7401-3A0FA97F0EC8}"/>
               </a:ext>
             </a:extLst>
           </p:cNvPr>
@@ -6684,7 +6684,7 @@
           <p:cNvPr id="11" name="item_2">
             <a:extLst>
               <a:ext uri="{FF2B5EF4-FFF2-40B4-BE49-F238E27FC236}">
-                <a16:creationId xmlns:a16="http://schemas.microsoft.com/office/drawing/2014/main" id="{C2AFACD3-D71D-7BBD-DBE0-01F34547F00F}"/>
+                <a16:creationId xmlns:a16="http://schemas.microsoft.com/office/drawing/2014/main" id="{196208F7-0A2D-8F01-D9B3-F509836A2AA7}"/>
               </a:ext>
             </a:extLst>
           </p:cNvPr>
@@ -6732,7 +6732,7 @@
           <p:cNvPr id="12" name="item_3_title">
             <a:extLst>
               <a:ext uri="{FF2B5EF4-FFF2-40B4-BE49-F238E27FC236}">
-                <a16:creationId xmlns:a16="http://schemas.microsoft.com/office/drawing/2014/main" id="{9842DF2A-17F2-DFE5-A221-70AB3E7A4F6E}"/>
+                <a16:creationId xmlns:a16="http://schemas.microsoft.com/office/drawing/2014/main" id="{2C8A601D-070B-02BE-D72D-CC55D7BCA256}"/>
               </a:ext>
             </a:extLst>
           </p:cNvPr>
@@ -6785,7 +6785,7 @@
           <p:cNvPr id="13" name="item_3">
             <a:extLst>
               <a:ext uri="{FF2B5EF4-FFF2-40B4-BE49-F238E27FC236}">
-                <a16:creationId xmlns:a16="http://schemas.microsoft.com/office/drawing/2014/main" id="{7DC419A2-106D-5DCA-D6CF-F5085B48790B}"/>
+                <a16:creationId xmlns:a16="http://schemas.microsoft.com/office/drawing/2014/main" id="{326C7388-D720-1DB1-9F52-4F63CBC1DB0E}"/>
               </a:ext>
             </a:extLst>
           </p:cNvPr>
@@ -6833,7 +6833,7 @@
           <p:cNvPr id="14" name="item_4_title">
             <a:extLst>
               <a:ext uri="{FF2B5EF4-FFF2-40B4-BE49-F238E27FC236}">
-                <a16:creationId xmlns:a16="http://schemas.microsoft.com/office/drawing/2014/main" id="{7C997BE5-5F22-B797-4BCC-4D100C231913}"/>
+                <a16:creationId xmlns:a16="http://schemas.microsoft.com/office/drawing/2014/main" id="{C1BB6B51-07BB-B009-127B-54DABA7617A7}"/>
               </a:ext>
             </a:extLst>
           </p:cNvPr>
@@ -6886,7 +6886,7 @@
           <p:cNvPr id="15" name="item_4">
             <a:extLst>
               <a:ext uri="{FF2B5EF4-FFF2-40B4-BE49-F238E27FC236}">
-                <a16:creationId xmlns:a16="http://schemas.microsoft.com/office/drawing/2014/main" id="{816C4A43-691B-35B4-15D2-1C2805465289}"/>
+                <a16:creationId xmlns:a16="http://schemas.microsoft.com/office/drawing/2014/main" id="{1DB3DF10-C325-BA0B-2E3C-4A74B97E0282}"/>
               </a:ext>
             </a:extLst>
           </p:cNvPr>
@@ -6934,7 +6934,7 @@
           <p:cNvPr id="16" name="source">
             <a:extLst>
               <a:ext uri="{FF2B5EF4-FFF2-40B4-BE49-F238E27FC236}">
-                <a16:creationId xmlns:a16="http://schemas.microsoft.com/office/drawing/2014/main" id="{D2ECB4D7-0123-44A8-0A02-16EE503FAF0B}"/>
+                <a16:creationId xmlns:a16="http://schemas.microsoft.com/office/drawing/2014/main" id="{E13EB1FF-0D25-1FAD-988C-44F24A024A57}"/>
               </a:ext>
             </a:extLst>
           </p:cNvPr>
@@ -6989,7 +6989,7 @@
     </p:spTree>
     <p:extLst>
       <p:ext uri="{BB962C8B-B14F-4D97-AF65-F5344CB8AC3E}">
-        <p14:creationId xmlns:p14="http://schemas.microsoft.com/office/powerpoint/2010/main" val="3482445124"/>
+        <p14:creationId xmlns:p14="http://schemas.microsoft.com/office/powerpoint/2010/main" val="3104871671"/>
       </p:ext>
     </p:extLst>
   </p:cSld>
@@ -7021,7 +7021,7 @@
           <p:cNvPr id="7" name="creative_background">
             <a:extLst>
               <a:ext uri="{FF2B5EF4-FFF2-40B4-BE49-F238E27FC236}">
-                <a16:creationId xmlns:a16="http://schemas.microsoft.com/office/drawing/2014/main" id="{67655213-7195-8CD0-8967-F3B0D55A8683}"/>
+                <a16:creationId xmlns:a16="http://schemas.microsoft.com/office/drawing/2014/main" id="{1F7DA32E-B77F-18BB-2332-CB7FCE57B47B}"/>
               </a:ext>
             </a:extLst>
           </p:cNvPr>
@@ -7094,9 +7094,9 @@
           <a:bodyPr/>
           <a:lstStyle/>
           <a:p>
-            <a:fld id="{22B1A858-2238-4D50-A136-D8298B9D7581}" type="datetimeFigureOut">
+            <a:fld id="{17E755F5-25E9-4D58-8061-E75C01E49922}" type="datetimeFigureOut">
               <a:rPr lang="en-US" smtClean="0"/>
-              <a:t>10/3/2026</a:t>
+              <a:t>10/4/2026</a:t>
             </a:fld>
             <a:endParaRPr lang="en-US"/>
           </a:p>
@@ -7136,7 +7136,7 @@
           <a:bodyPr/>
           <a:lstStyle/>
           <a:p>
-            <a:fld id="{6B7AFC5B-9B31-47DE-8C26-4C4AD0A46382}" type="slidenum">
+            <a:fld id="{878B5E31-6775-4496-83E7-82D86CBA16EC}" type="slidenum">
               <a:rPr lang="en-US" smtClean="0"/>
               <a:t>‹#›</a:t>
             </a:fld>
@@ -7149,7 +7149,7 @@
           <p:cNvPr id="8" name="kpi_value_1">
             <a:extLst>
               <a:ext uri="{FF2B5EF4-FFF2-40B4-BE49-F238E27FC236}">
-                <a16:creationId xmlns:a16="http://schemas.microsoft.com/office/drawing/2014/main" id="{330C60FD-9FB2-91FE-2172-5DC6C8F7E4FB}"/>
+                <a16:creationId xmlns:a16="http://schemas.microsoft.com/office/drawing/2014/main" id="{BA6C0578-F5C2-E198-7C3A-12B975BA5982}"/>
               </a:ext>
             </a:extLst>
           </p:cNvPr>
@@ -7199,7 +7199,7 @@
           <p:cNvPr id="9" name="kpi_label_1">
             <a:extLst>
               <a:ext uri="{FF2B5EF4-FFF2-40B4-BE49-F238E27FC236}">
-                <a16:creationId xmlns:a16="http://schemas.microsoft.com/office/drawing/2014/main" id="{6F174203-613B-2DEE-27CB-EA733DF7593D}"/>
+                <a16:creationId xmlns:a16="http://schemas.microsoft.com/office/drawing/2014/main" id="{3A8EF26F-4AF2-7F64-61DF-6B28F7CF86F4}"/>
               </a:ext>
             </a:extLst>
           </p:cNvPr>
@@ -7247,7 +7247,7 @@
           <p:cNvPr id="10" name="quote">
             <a:extLst>
               <a:ext uri="{FF2B5EF4-FFF2-40B4-BE49-F238E27FC236}">
-                <a16:creationId xmlns:a16="http://schemas.microsoft.com/office/drawing/2014/main" id="{A9E036FE-BC0D-C8EC-CE9B-B61ED489FC97}"/>
+                <a16:creationId xmlns:a16="http://schemas.microsoft.com/office/drawing/2014/main" id="{C0C373C8-2F0B-8128-6178-FC4C94C23D9F}"/>
               </a:ext>
             </a:extLst>
           </p:cNvPr>
@@ -7297,7 +7297,7 @@
           <p:cNvPr id="11" name="attribution">
             <a:extLst>
               <a:ext uri="{FF2B5EF4-FFF2-40B4-BE49-F238E27FC236}">
-                <a16:creationId xmlns:a16="http://schemas.microsoft.com/office/drawing/2014/main" id="{F4A5FC94-66D9-D114-1B43-E35975D782A4}"/>
+                <a16:creationId xmlns:a16="http://schemas.microsoft.com/office/drawing/2014/main" id="{9669A11A-0CF9-A4E7-611E-D21134B78DC1}"/>
               </a:ext>
             </a:extLst>
           </p:cNvPr>
@@ -7345,7 +7345,7 @@
           <p:cNvPr id="12" name="item_1_title">
             <a:extLst>
               <a:ext uri="{FF2B5EF4-FFF2-40B4-BE49-F238E27FC236}">
-                <a16:creationId xmlns:a16="http://schemas.microsoft.com/office/drawing/2014/main" id="{A861FCD7-FC93-E818-0C40-D1CAC57DABB1}"/>
+                <a16:creationId xmlns:a16="http://schemas.microsoft.com/office/drawing/2014/main" id="{7BB13EE1-9393-8108-1E75-2AEF154C73F1}"/>
               </a:ext>
             </a:extLst>
           </p:cNvPr>
@@ -7398,7 +7398,7 @@
           <p:cNvPr id="13" name="item_1">
             <a:extLst>
               <a:ext uri="{FF2B5EF4-FFF2-40B4-BE49-F238E27FC236}">
-                <a16:creationId xmlns:a16="http://schemas.microsoft.com/office/drawing/2014/main" id="{69D536B6-61A3-B5FD-61E7-898984ED8F1C}"/>
+                <a16:creationId xmlns:a16="http://schemas.microsoft.com/office/drawing/2014/main" id="{75193CE1-BC9E-2885-C5FB-E547B202E1B1}"/>
               </a:ext>
             </a:extLst>
           </p:cNvPr>
@@ -7446,7 +7446,7 @@
           <p:cNvPr id="14" name="source">
             <a:extLst>
               <a:ext uri="{FF2B5EF4-FFF2-40B4-BE49-F238E27FC236}">
-                <a16:creationId xmlns:a16="http://schemas.microsoft.com/office/drawing/2014/main" id="{58546F94-B107-5495-9A04-17DD2169FC74}"/>
+                <a16:creationId xmlns:a16="http://schemas.microsoft.com/office/drawing/2014/main" id="{D42D5CC0-B967-F2F8-A139-AF957B9D12D3}"/>
               </a:ext>
             </a:extLst>
           </p:cNvPr>
@@ -7501,7 +7501,7 @@
     </p:spTree>
     <p:extLst>
       <p:ext uri="{BB962C8B-B14F-4D97-AF65-F5344CB8AC3E}">
-        <p14:creationId xmlns:p14="http://schemas.microsoft.com/office/powerpoint/2010/main" val="734481145"/>
+        <p14:creationId xmlns:p14="http://schemas.microsoft.com/office/powerpoint/2010/main" val="4028790791"/>
       </p:ext>
     </p:extLst>
   </p:cSld>
@@ -7533,7 +7533,7 @@
           <p:cNvPr id="7" name="creative_background">
             <a:extLst>
               <a:ext uri="{FF2B5EF4-FFF2-40B4-BE49-F238E27FC236}">
-                <a16:creationId xmlns:a16="http://schemas.microsoft.com/office/drawing/2014/main" id="{A9C2A04D-E742-D992-FF48-7D91CE166267}"/>
+                <a16:creationId xmlns:a16="http://schemas.microsoft.com/office/drawing/2014/main" id="{AA315128-2C80-BC35-9DD5-BE4E8E3DB574}"/>
               </a:ext>
             </a:extLst>
           </p:cNvPr>
@@ -7606,9 +7606,9 @@
           <a:bodyPr/>
           <a:lstStyle/>
           <a:p>
-            <a:fld id="{22B1A858-2238-4D50-A136-D8298B9D7581}" type="datetimeFigureOut">
+            <a:fld id="{17E755F5-25E9-4D58-8061-E75C01E49922}" type="datetimeFigureOut">
               <a:rPr lang="en-US" smtClean="0"/>
-              <a:t>10/3/2026</a:t>
+              <a:t>10/4/2026</a:t>
             </a:fld>
             <a:endParaRPr lang="en-US"/>
           </a:p>
@@ -7648,7 +7648,7 @@
           <a:bodyPr/>
           <a:lstStyle/>
           <a:p>
-            <a:fld id="{6B7AFC5B-9B31-47DE-8C26-4C4AD0A46382}" type="slidenum">
+            <a:fld id="{878B5E31-6775-4496-83E7-82D86CBA16EC}" type="slidenum">
               <a:rPr lang="en-US" smtClean="0"/>
               <a:t>‹#›</a:t>
             </a:fld>
@@ -7661,7 +7661,7 @@
           <p:cNvPr id="8" name="item_1_title">
             <a:extLst>
               <a:ext uri="{FF2B5EF4-FFF2-40B4-BE49-F238E27FC236}">
-                <a16:creationId xmlns:a16="http://schemas.microsoft.com/office/drawing/2014/main" id="{E516958C-CBC3-A064-61DB-4ADA6C8821AB}"/>
+                <a16:creationId xmlns:a16="http://schemas.microsoft.com/office/drawing/2014/main" id="{D3B6362B-5FDD-3EF2-2E0F-BF00AAB9BA8E}"/>
               </a:ext>
             </a:extLst>
           </p:cNvPr>
@@ -7711,7 +7711,7 @@
           <p:cNvPr id="9" name="item_1">
             <a:extLst>
               <a:ext uri="{FF2B5EF4-FFF2-40B4-BE49-F238E27FC236}">
-                <a16:creationId xmlns:a16="http://schemas.microsoft.com/office/drawing/2014/main" id="{B299A6AA-F0E3-FB2D-E574-E375A058C4B3}"/>
+                <a16:creationId xmlns:a16="http://schemas.microsoft.com/office/drawing/2014/main" id="{BA5A2C85-CB1C-B643-43B1-305224C62BF1}"/>
               </a:ext>
             </a:extLst>
           </p:cNvPr>
@@ -7759,7 +7759,7 @@
           <p:cNvPr id="10" name="item_2_title">
             <a:extLst>
               <a:ext uri="{FF2B5EF4-FFF2-40B4-BE49-F238E27FC236}">
-                <a16:creationId xmlns:a16="http://schemas.microsoft.com/office/drawing/2014/main" id="{F3CEB3CE-2D3E-A67F-6AFE-051FA371531C}"/>
+                <a16:creationId xmlns:a16="http://schemas.microsoft.com/office/drawing/2014/main" id="{0F16F14B-0219-462B-C373-FD4EE40D9F85}"/>
               </a:ext>
             </a:extLst>
           </p:cNvPr>
@@ -7812,7 +7812,7 @@
           <p:cNvPr id="11" name="item_2">
             <a:extLst>
               <a:ext uri="{FF2B5EF4-FFF2-40B4-BE49-F238E27FC236}">
-                <a16:creationId xmlns:a16="http://schemas.microsoft.com/office/drawing/2014/main" id="{3E06B407-5A0B-24C3-2701-3E5FB08E7D77}"/>
+                <a16:creationId xmlns:a16="http://schemas.microsoft.com/office/drawing/2014/main" id="{36280550-8F48-EE21-085C-703F1D1AB4E4}"/>
               </a:ext>
             </a:extLst>
           </p:cNvPr>
@@ -7860,7 +7860,7 @@
           <p:cNvPr id="12" name="item_3_title">
             <a:extLst>
               <a:ext uri="{FF2B5EF4-FFF2-40B4-BE49-F238E27FC236}">
-                <a16:creationId xmlns:a16="http://schemas.microsoft.com/office/drawing/2014/main" id="{AED8EEF8-76F1-3E93-7B16-21726558EBA0}"/>
+                <a16:creationId xmlns:a16="http://schemas.microsoft.com/office/drawing/2014/main" id="{EF539326-4B1C-64A1-EF05-FBF41DBE370B}"/>
               </a:ext>
             </a:extLst>
           </p:cNvPr>
@@ -7913,7 +7913,7 @@
           <p:cNvPr id="13" name="item_3">
             <a:extLst>
               <a:ext uri="{FF2B5EF4-FFF2-40B4-BE49-F238E27FC236}">
-                <a16:creationId xmlns:a16="http://schemas.microsoft.com/office/drawing/2014/main" id="{06FD95D9-A0E0-A585-85AB-11BC15ACA288}"/>
+                <a16:creationId xmlns:a16="http://schemas.microsoft.com/office/drawing/2014/main" id="{1705AE92-826B-F4B5-9EDF-E1F324243569}"/>
               </a:ext>
             </a:extLst>
           </p:cNvPr>
@@ -7961,7 +7961,7 @@
           <p:cNvPr id="14" name="source">
             <a:extLst>
               <a:ext uri="{FF2B5EF4-FFF2-40B4-BE49-F238E27FC236}">
-                <a16:creationId xmlns:a16="http://schemas.microsoft.com/office/drawing/2014/main" id="{8A456BA0-F811-A3DD-4CFB-CF866C44B2EC}"/>
+                <a16:creationId xmlns:a16="http://schemas.microsoft.com/office/drawing/2014/main" id="{2DB4F084-A878-A665-A440-0591ACDC1CDC}"/>
               </a:ext>
             </a:extLst>
           </p:cNvPr>
@@ -8016,7 +8016,7 @@
     </p:spTree>
     <p:extLst>
       <p:ext uri="{BB962C8B-B14F-4D97-AF65-F5344CB8AC3E}">
-        <p14:creationId xmlns:p14="http://schemas.microsoft.com/office/powerpoint/2010/main" val="1472050076"/>
+        <p14:creationId xmlns:p14="http://schemas.microsoft.com/office/powerpoint/2010/main" val="2849295071"/>
       </p:ext>
     </p:extLst>
   </p:cSld>
@@ -8048,7 +8048,7 @@
           <p:cNvPr id="7" name="creative_background">
             <a:extLst>
               <a:ext uri="{FF2B5EF4-FFF2-40B4-BE49-F238E27FC236}">
-                <a16:creationId xmlns:a16="http://schemas.microsoft.com/office/drawing/2014/main" id="{81DA9773-DEE3-6885-14BF-BBA1AB698B6A}"/>
+                <a16:creationId xmlns:a16="http://schemas.microsoft.com/office/drawing/2014/main" id="{42DCB36C-7D0D-B8D6-EEDE-802A666377E8}"/>
               </a:ext>
             </a:extLst>
           </p:cNvPr>
@@ -8121,9 +8121,9 @@
           <a:bodyPr/>
           <a:lstStyle/>
           <a:p>
-            <a:fld id="{22B1A858-2238-4D50-A136-D8298B9D7581}" type="datetimeFigureOut">
+            <a:fld id="{17E755F5-25E9-4D58-8061-E75C01E49922}" type="datetimeFigureOut">
               <a:rPr lang="en-US" smtClean="0"/>
-              <a:t>10/3/2026</a:t>
+              <a:t>10/4/2026</a:t>
             </a:fld>
             <a:endParaRPr lang="en-US"/>
           </a:p>
@@ -8163,7 +8163,7 @@
           <a:bodyPr/>
           <a:lstStyle/>
           <a:p>
-            <a:fld id="{6B7AFC5B-9B31-47DE-8C26-4C4AD0A46382}" type="slidenum">
+            <a:fld id="{878B5E31-6775-4496-83E7-82D86CBA16EC}" type="slidenum">
               <a:rPr lang="en-US" smtClean="0"/>
               <a:t>‹#›</a:t>
             </a:fld>
@@ -8176,7 +8176,7 @@
           <p:cNvPr id="8" name="marker_1">
             <a:extLst>
               <a:ext uri="{FF2B5EF4-FFF2-40B4-BE49-F238E27FC236}">
-                <a16:creationId xmlns:a16="http://schemas.microsoft.com/office/drawing/2014/main" id="{E7FB97F2-2912-A240-7F4D-5CDA0DE270EB}"/>
+                <a16:creationId xmlns:a16="http://schemas.microsoft.com/office/drawing/2014/main" id="{A90C666B-BF2A-B7A1-58C8-797239645C8F}"/>
               </a:ext>
             </a:extLst>
           </p:cNvPr>
@@ -8232,7 +8232,7 @@
           <p:cNvPr id="9" name="item_1_title">
             <a:extLst>
               <a:ext uri="{FF2B5EF4-FFF2-40B4-BE49-F238E27FC236}">
-                <a16:creationId xmlns:a16="http://schemas.microsoft.com/office/drawing/2014/main" id="{6F4F6CD0-0250-EBB6-5F87-B5577B4129C5}"/>
+                <a16:creationId xmlns:a16="http://schemas.microsoft.com/office/drawing/2014/main" id="{23994910-09DE-B3CF-130E-AB08D8C97569}"/>
               </a:ext>
             </a:extLst>
           </p:cNvPr>
@@ -8285,7 +8285,7 @@
           <p:cNvPr id="10" name="item_1">
             <a:extLst>
               <a:ext uri="{FF2B5EF4-FFF2-40B4-BE49-F238E27FC236}">
-                <a16:creationId xmlns:a16="http://schemas.microsoft.com/office/drawing/2014/main" id="{4F308758-BB17-8486-970D-3C6C443E3C3A}"/>
+                <a16:creationId xmlns:a16="http://schemas.microsoft.com/office/drawing/2014/main" id="{F2F27959-D040-BE70-F50D-E5D6FACF4510}"/>
               </a:ext>
             </a:extLst>
           </p:cNvPr>
@@ -8333,7 +8333,7 @@
           <p:cNvPr id="11" name="marker_2">
             <a:extLst>
               <a:ext uri="{FF2B5EF4-FFF2-40B4-BE49-F238E27FC236}">
-                <a16:creationId xmlns:a16="http://schemas.microsoft.com/office/drawing/2014/main" id="{9460C49C-F339-CDAC-CAFB-B36CAABC1681}"/>
+                <a16:creationId xmlns:a16="http://schemas.microsoft.com/office/drawing/2014/main" id="{D495EBB9-BDCF-3D74-42E8-CADB3DEA6A88}"/>
               </a:ext>
             </a:extLst>
           </p:cNvPr>
@@ -8389,7 +8389,7 @@
           <p:cNvPr id="12" name="item_2_title">
             <a:extLst>
               <a:ext uri="{FF2B5EF4-FFF2-40B4-BE49-F238E27FC236}">
-                <a16:creationId xmlns:a16="http://schemas.microsoft.com/office/drawing/2014/main" id="{BFE97362-8A4F-45BD-BDBB-8F72111F89FC}"/>
+                <a16:creationId xmlns:a16="http://schemas.microsoft.com/office/drawing/2014/main" id="{855E647A-B5D1-D633-86A9-5BE7CA456231}"/>
               </a:ext>
             </a:extLst>
           </p:cNvPr>
@@ -8442,7 +8442,7 @@
           <p:cNvPr id="13" name="item_2">
             <a:extLst>
               <a:ext uri="{FF2B5EF4-FFF2-40B4-BE49-F238E27FC236}">
-                <a16:creationId xmlns:a16="http://schemas.microsoft.com/office/drawing/2014/main" id="{02460ADD-C37F-A3BF-C3E2-DD3D47B4CF93}"/>
+                <a16:creationId xmlns:a16="http://schemas.microsoft.com/office/drawing/2014/main" id="{C2C0DBA3-5B3B-3B6D-9B1F-6338E7F99896}"/>
               </a:ext>
             </a:extLst>
           </p:cNvPr>
@@ -8490,7 +8490,7 @@
           <p:cNvPr id="14" name="source">
             <a:extLst>
               <a:ext uri="{FF2B5EF4-FFF2-40B4-BE49-F238E27FC236}">
-                <a16:creationId xmlns:a16="http://schemas.microsoft.com/office/drawing/2014/main" id="{B3F76ECE-BAB4-997D-5672-BBAB19832109}"/>
+                <a16:creationId xmlns:a16="http://schemas.microsoft.com/office/drawing/2014/main" id="{C1EF52C7-04FE-42F2-3902-06D734418CBA}"/>
               </a:ext>
             </a:extLst>
           </p:cNvPr>
@@ -8545,7 +8545,7 @@
     </p:spTree>
     <p:extLst>
       <p:ext uri="{BB962C8B-B14F-4D97-AF65-F5344CB8AC3E}">
-        <p14:creationId xmlns:p14="http://schemas.microsoft.com/office/powerpoint/2010/main" val="579154628"/>
+        <p14:creationId xmlns:p14="http://schemas.microsoft.com/office/powerpoint/2010/main" val="3342782089"/>
       </p:ext>
     </p:extLst>
   </p:cSld>
@@ -8577,7 +8577,7 @@
           <p:cNvPr id="7" name="creative_background">
             <a:extLst>
               <a:ext uri="{FF2B5EF4-FFF2-40B4-BE49-F238E27FC236}">
-                <a16:creationId xmlns:a16="http://schemas.microsoft.com/office/drawing/2014/main" id="{6DAAD4EE-6997-D582-D7A7-2B0AE6A2C120}"/>
+                <a16:creationId xmlns:a16="http://schemas.microsoft.com/office/drawing/2014/main" id="{0E294148-E835-657B-0B94-03F7704271BD}"/>
               </a:ext>
             </a:extLst>
           </p:cNvPr>
@@ -8650,9 +8650,9 @@
           <a:bodyPr/>
           <a:lstStyle/>
           <a:p>
-            <a:fld id="{22B1A858-2238-4D50-A136-D8298B9D7581}" type="datetimeFigureOut">
+            <a:fld id="{17E755F5-25E9-4D58-8061-E75C01E49922}" type="datetimeFigureOut">
               <a:rPr lang="en-US" smtClean="0"/>
-              <a:t>10/3/2026</a:t>
+              <a:t>10/4/2026</a:t>
             </a:fld>
             <a:endParaRPr lang="en-US"/>
           </a:p>
@@ -8692,7 +8692,7 @@
           <a:bodyPr/>
           <a:lstStyle/>
           <a:p>
-            <a:fld id="{6B7AFC5B-9B31-47DE-8C26-4C4AD0A46382}" type="slidenum">
+            <a:fld id="{878B5E31-6775-4496-83E7-82D86CBA16EC}" type="slidenum">
               <a:rPr lang="en-US" smtClean="0"/>
               <a:t>‹#›</a:t>
             </a:fld>
@@ -8705,7 +8705,7 @@
           <p:cNvPr id="8" name="kpi_value_1">
             <a:extLst>
               <a:ext uri="{FF2B5EF4-FFF2-40B4-BE49-F238E27FC236}">
-                <a16:creationId xmlns:a16="http://schemas.microsoft.com/office/drawing/2014/main" id="{E99D0139-7485-15B4-9E55-CB0AF48C2909}"/>
+                <a16:creationId xmlns:a16="http://schemas.microsoft.com/office/drawing/2014/main" id="{972F843C-3BE8-E051-D109-A574F0476E37}"/>
               </a:ext>
             </a:extLst>
           </p:cNvPr>
@@ -8755,7 +8755,7 @@
           <p:cNvPr id="9" name="kpi_label_1">
             <a:extLst>
               <a:ext uri="{FF2B5EF4-FFF2-40B4-BE49-F238E27FC236}">
-                <a16:creationId xmlns:a16="http://schemas.microsoft.com/office/drawing/2014/main" id="{17BB2D7D-08DA-51FE-CAE2-3E98238F5693}"/>
+                <a16:creationId xmlns:a16="http://schemas.microsoft.com/office/drawing/2014/main" id="{CA6324A3-D313-9079-D476-5CE4B1AB1DDC}"/>
               </a:ext>
             </a:extLst>
           </p:cNvPr>
@@ -8803,7 +8803,7 @@
           <p:cNvPr id="10" name="quote">
             <a:extLst>
               <a:ext uri="{FF2B5EF4-FFF2-40B4-BE49-F238E27FC236}">
-                <a16:creationId xmlns:a16="http://schemas.microsoft.com/office/drawing/2014/main" id="{A03AC47D-5107-A44C-2EF0-BA445E7F10E8}"/>
+                <a16:creationId xmlns:a16="http://schemas.microsoft.com/office/drawing/2014/main" id="{84644B60-C5B0-1224-7559-B3ACFEBCE45F}"/>
               </a:ext>
             </a:extLst>
           </p:cNvPr>
@@ -8853,7 +8853,7 @@
           <p:cNvPr id="11" name="attribution">
             <a:extLst>
               <a:ext uri="{FF2B5EF4-FFF2-40B4-BE49-F238E27FC236}">
-                <a16:creationId xmlns:a16="http://schemas.microsoft.com/office/drawing/2014/main" id="{CCDA5796-7753-4A2E-B4E0-7332750705CF}"/>
+                <a16:creationId xmlns:a16="http://schemas.microsoft.com/office/drawing/2014/main" id="{1FB09DF3-676B-D602-FAE7-DC9474EDF1A2}"/>
               </a:ext>
             </a:extLst>
           </p:cNvPr>
@@ -8901,7 +8901,7 @@
           <p:cNvPr id="12" name="item_1_title">
             <a:extLst>
               <a:ext uri="{FF2B5EF4-FFF2-40B4-BE49-F238E27FC236}">
-                <a16:creationId xmlns:a16="http://schemas.microsoft.com/office/drawing/2014/main" id="{92C371D3-25B9-D238-4CD5-6BE7023987E1}"/>
+                <a16:creationId xmlns:a16="http://schemas.microsoft.com/office/drawing/2014/main" id="{634E9ED8-A46C-CF0B-F9F8-2333CD1EB4E3}"/>
               </a:ext>
             </a:extLst>
           </p:cNvPr>
@@ -8954,7 +8954,7 @@
           <p:cNvPr id="13" name="item_1">
             <a:extLst>
               <a:ext uri="{FF2B5EF4-FFF2-40B4-BE49-F238E27FC236}">
-                <a16:creationId xmlns:a16="http://schemas.microsoft.com/office/drawing/2014/main" id="{0D2FA677-DD37-6F2A-27D0-EEEE93072828}"/>
+                <a16:creationId xmlns:a16="http://schemas.microsoft.com/office/drawing/2014/main" id="{3470DF4B-0689-9711-4E6B-1AB87898BB7F}"/>
               </a:ext>
             </a:extLst>
           </p:cNvPr>
@@ -9002,7 +9002,7 @@
           <p:cNvPr id="14" name="source">
             <a:extLst>
               <a:ext uri="{FF2B5EF4-FFF2-40B4-BE49-F238E27FC236}">
-                <a16:creationId xmlns:a16="http://schemas.microsoft.com/office/drawing/2014/main" id="{EA5FD906-6393-C619-64EF-FED216482030}"/>
+                <a16:creationId xmlns:a16="http://schemas.microsoft.com/office/drawing/2014/main" id="{B9F347F2-9A82-0E80-FEDD-B60EA87C7A9C}"/>
               </a:ext>
             </a:extLst>
           </p:cNvPr>
@@ -9057,7 +9057,7 @@
     </p:spTree>
     <p:extLst>
       <p:ext uri="{BB962C8B-B14F-4D97-AF65-F5344CB8AC3E}">
-        <p14:creationId xmlns:p14="http://schemas.microsoft.com/office/powerpoint/2010/main" val="68521996"/>
+        <p14:creationId xmlns:p14="http://schemas.microsoft.com/office/powerpoint/2010/main" val="4044497934"/>
       </p:ext>
     </p:extLst>
   </p:cSld>
@@ -9089,7 +9089,7 @@
           <p:cNvPr id="7" name="creative_background">
             <a:extLst>
               <a:ext uri="{FF2B5EF4-FFF2-40B4-BE49-F238E27FC236}">
-                <a16:creationId xmlns:a16="http://schemas.microsoft.com/office/drawing/2014/main" id="{9BBBE296-F43C-15E5-3A1C-00E2816527F9}"/>
+                <a16:creationId xmlns:a16="http://schemas.microsoft.com/office/drawing/2014/main" id="{AC3D305C-920A-C51F-AB46-7BF23C90F384}"/>
               </a:ext>
             </a:extLst>
           </p:cNvPr>
@@ -9162,9 +9162,9 @@
           <a:bodyPr/>
           <a:lstStyle/>
           <a:p>
-            <a:fld id="{22B1A858-2238-4D50-A136-D8298B9D7581}" type="datetimeFigureOut">
+            <a:fld id="{17E755F5-25E9-4D58-8061-E75C01E49922}" type="datetimeFigureOut">
               <a:rPr lang="en-US" smtClean="0"/>
-              <a:t>10/3/2026</a:t>
+              <a:t>10/4/2026</a:t>
             </a:fld>
             <a:endParaRPr lang="en-US"/>
           </a:p>
@@ -9204,7 +9204,7 @@
           <a:bodyPr/>
           <a:lstStyle/>
           <a:p>
-            <a:fld id="{6B7AFC5B-9B31-47DE-8C26-4C4AD0A46382}" type="slidenum">
+            <a:fld id="{878B5E31-6775-4496-83E7-82D86CBA16EC}" type="slidenum">
               <a:rPr lang="en-US" smtClean="0"/>
               <a:t>‹#›</a:t>
             </a:fld>
@@ -9217,7 +9217,7 @@
           <p:cNvPr id="8" name="marker_1">
             <a:extLst>
               <a:ext uri="{FF2B5EF4-FFF2-40B4-BE49-F238E27FC236}">
-                <a16:creationId xmlns:a16="http://schemas.microsoft.com/office/drawing/2014/main" id="{8F4E043C-8F26-BEE3-6046-FF3BA5ECEA69}"/>
+                <a16:creationId xmlns:a16="http://schemas.microsoft.com/office/drawing/2014/main" id="{C5AD2C06-0876-3F02-63E3-1FA7A8A95326}"/>
               </a:ext>
             </a:extLst>
           </p:cNvPr>
@@ -9273,7 +9273,7 @@
           <p:cNvPr id="9" name="item_1">
             <a:extLst>
               <a:ext uri="{FF2B5EF4-FFF2-40B4-BE49-F238E27FC236}">
-                <a16:creationId xmlns:a16="http://schemas.microsoft.com/office/drawing/2014/main" id="{A191CD1E-577F-DD88-CA86-5457BC7D81B6}"/>
+                <a16:creationId xmlns:a16="http://schemas.microsoft.com/office/drawing/2014/main" id="{39137D4E-5D23-FF38-4D96-FCD9C13AF3EF}"/>
               </a:ext>
             </a:extLst>
           </p:cNvPr>
@@ -9321,7 +9321,7 @@
           <p:cNvPr id="10" name="marker_2">
             <a:extLst>
               <a:ext uri="{FF2B5EF4-FFF2-40B4-BE49-F238E27FC236}">
-                <a16:creationId xmlns:a16="http://schemas.microsoft.com/office/drawing/2014/main" id="{ED503F27-7425-4019-4F25-65C244A3D31F}"/>
+                <a16:creationId xmlns:a16="http://schemas.microsoft.com/office/drawing/2014/main" id="{AFA77436-AF92-B9D8-F260-0C18AFA5EBF8}"/>
               </a:ext>
             </a:extLst>
           </p:cNvPr>
@@ -9377,7 +9377,7 @@
           <p:cNvPr id="11" name="item_2">
             <a:extLst>
               <a:ext uri="{FF2B5EF4-FFF2-40B4-BE49-F238E27FC236}">
-                <a16:creationId xmlns:a16="http://schemas.microsoft.com/office/drawing/2014/main" id="{882A4DEB-6978-8674-A067-C1FBC0B6366E}"/>
+                <a16:creationId xmlns:a16="http://schemas.microsoft.com/office/drawing/2014/main" id="{FD3169DC-335C-EF3D-1548-7DCFBFC02B0F}"/>
               </a:ext>
             </a:extLst>
           </p:cNvPr>
@@ -9425,7 +9425,7 @@
           <p:cNvPr id="12" name="marker_3">
             <a:extLst>
               <a:ext uri="{FF2B5EF4-FFF2-40B4-BE49-F238E27FC236}">
-                <a16:creationId xmlns:a16="http://schemas.microsoft.com/office/drawing/2014/main" id="{8FA657CD-05D4-DF88-F9BB-E1084043115F}"/>
+                <a16:creationId xmlns:a16="http://schemas.microsoft.com/office/drawing/2014/main" id="{E25A50D1-CC0D-797F-0A20-0A8509DFBCD7}"/>
               </a:ext>
             </a:extLst>
           </p:cNvPr>
@@ -9481,7 +9481,7 @@
           <p:cNvPr id="13" name="item_3">
             <a:extLst>
               <a:ext uri="{FF2B5EF4-FFF2-40B4-BE49-F238E27FC236}">
-                <a16:creationId xmlns:a16="http://schemas.microsoft.com/office/drawing/2014/main" id="{80C10F75-7397-93E3-E493-60041210AD70}"/>
+                <a16:creationId xmlns:a16="http://schemas.microsoft.com/office/drawing/2014/main" id="{F1514DF4-F32C-BD6D-25F0-7EC0490D7124}"/>
               </a:ext>
             </a:extLst>
           </p:cNvPr>
@@ -9529,7 +9529,7 @@
           <p:cNvPr id="14" name="marker_4">
             <a:extLst>
               <a:ext uri="{FF2B5EF4-FFF2-40B4-BE49-F238E27FC236}">
-                <a16:creationId xmlns:a16="http://schemas.microsoft.com/office/drawing/2014/main" id="{2B18F3D1-592B-1E89-B3C3-D00E35B39958}"/>
+                <a16:creationId xmlns:a16="http://schemas.microsoft.com/office/drawing/2014/main" id="{4F00EA81-D325-6B50-457C-95814697F91D}"/>
               </a:ext>
             </a:extLst>
           </p:cNvPr>
@@ -9585,7 +9585,7 @@
           <p:cNvPr id="15" name="item_4">
             <a:extLst>
               <a:ext uri="{FF2B5EF4-FFF2-40B4-BE49-F238E27FC236}">
-                <a16:creationId xmlns:a16="http://schemas.microsoft.com/office/drawing/2014/main" id="{268863DA-7951-6C09-4FF2-4C21D90516B7}"/>
+                <a16:creationId xmlns:a16="http://schemas.microsoft.com/office/drawing/2014/main" id="{4ADBDE04-3E83-B05A-1625-B4014416642D}"/>
               </a:ext>
             </a:extLst>
           </p:cNvPr>
@@ -9633,7 +9633,7 @@
           <p:cNvPr id="16" name="source">
             <a:extLst>
               <a:ext uri="{FF2B5EF4-FFF2-40B4-BE49-F238E27FC236}">
-                <a16:creationId xmlns:a16="http://schemas.microsoft.com/office/drawing/2014/main" id="{80937C49-2658-47D8-2BA5-1F971F82CDD7}"/>
+                <a16:creationId xmlns:a16="http://schemas.microsoft.com/office/drawing/2014/main" id="{6CAB98C9-E12E-5721-CDC6-3E2CDBCE5E90}"/>
               </a:ext>
             </a:extLst>
           </p:cNvPr>
@@ -9688,7 +9688,7 @@
     </p:spTree>
     <p:extLst>
       <p:ext uri="{BB962C8B-B14F-4D97-AF65-F5344CB8AC3E}">
-        <p14:creationId xmlns:p14="http://schemas.microsoft.com/office/powerpoint/2010/main" val="1620936896"/>
+        <p14:creationId xmlns:p14="http://schemas.microsoft.com/office/powerpoint/2010/main" val="1729189223"/>
       </p:ext>
     </p:extLst>
   </p:cSld>
@@ -9720,7 +9720,7 @@
           <p:cNvPr id="7" name="creative_background">
             <a:extLst>
               <a:ext uri="{FF2B5EF4-FFF2-40B4-BE49-F238E27FC236}">
-                <a16:creationId xmlns:a16="http://schemas.microsoft.com/office/drawing/2014/main" id="{B76BD4EC-9B49-12B8-97B3-0540C3917D10}"/>
+                <a16:creationId xmlns:a16="http://schemas.microsoft.com/office/drawing/2014/main" id="{1536784A-07C9-8302-2835-E4F3578AC3D1}"/>
               </a:ext>
             </a:extLst>
           </p:cNvPr>
@@ -9793,9 +9793,9 @@
           <a:bodyPr/>
           <a:lstStyle/>
           <a:p>
-            <a:fld id="{22B1A858-2238-4D50-A136-D8298B9D7581}" type="datetimeFigureOut">
+            <a:fld id="{17E755F5-25E9-4D58-8061-E75C01E49922}" type="datetimeFigureOut">
               <a:rPr lang="en-US" smtClean="0"/>
-              <a:t>10/3/2026</a:t>
+              <a:t>10/4/2026</a:t>
             </a:fld>
             <a:endParaRPr lang="en-US"/>
           </a:p>
@@ -9835,7 +9835,7 @@
           <a:bodyPr/>
           <a:lstStyle/>
           <a:p>
-            <a:fld id="{6B7AFC5B-9B31-47DE-8C26-4C4AD0A46382}" type="slidenum">
+            <a:fld id="{878B5E31-6775-4496-83E7-82D86CBA16EC}" type="slidenum">
               <a:rPr lang="en-US" smtClean="0"/>
               <a:t>‹#›</a:t>
             </a:fld>
@@ -9848,7 +9848,7 @@
           <p:cNvPr id="8" name="decisions_title">
             <a:extLst>
               <a:ext uri="{FF2B5EF4-FFF2-40B4-BE49-F238E27FC236}">
-                <a16:creationId xmlns:a16="http://schemas.microsoft.com/office/drawing/2014/main" id="{C92123D6-286B-283E-5C9D-8AA4BBD0CD88}"/>
+                <a16:creationId xmlns:a16="http://schemas.microsoft.com/office/drawing/2014/main" id="{03ED75B5-1553-DDF2-D1A9-B3EEF8A5761F}"/>
               </a:ext>
             </a:extLst>
           </p:cNvPr>
@@ -9898,7 +9898,7 @@
           <p:cNvPr id="9" name="decisions">
             <a:extLst>
               <a:ext uri="{FF2B5EF4-FFF2-40B4-BE49-F238E27FC236}">
-                <a16:creationId xmlns:a16="http://schemas.microsoft.com/office/drawing/2014/main" id="{4A8D850E-5962-06E3-3ABC-0BA21C2C1DE4}"/>
+                <a16:creationId xmlns:a16="http://schemas.microsoft.com/office/drawing/2014/main" id="{77CFDFFE-D98B-0D2D-DF2B-FD7A1C6340CE}"/>
               </a:ext>
             </a:extLst>
           </p:cNvPr>
@@ -9941,7 +9941,7 @@
           <p:cNvPr id="10" name="item_1_title">
             <a:extLst>
               <a:ext uri="{FF2B5EF4-FFF2-40B4-BE49-F238E27FC236}">
-                <a16:creationId xmlns:a16="http://schemas.microsoft.com/office/drawing/2014/main" id="{2BF8F81C-AECA-9F6F-877A-7EC0DE6813CC}"/>
+                <a16:creationId xmlns:a16="http://schemas.microsoft.com/office/drawing/2014/main" id="{8B52330D-DF8A-4C9B-3581-81A922A6E18E}"/>
               </a:ext>
             </a:extLst>
           </p:cNvPr>
@@ -9994,7 +9994,7 @@
           <p:cNvPr id="11" name="item_1">
             <a:extLst>
               <a:ext uri="{FF2B5EF4-FFF2-40B4-BE49-F238E27FC236}">
-                <a16:creationId xmlns:a16="http://schemas.microsoft.com/office/drawing/2014/main" id="{4BC378CE-A830-6014-3DE2-3BF5604BB790}"/>
+                <a16:creationId xmlns:a16="http://schemas.microsoft.com/office/drawing/2014/main" id="{3A77BCBE-C451-7AF8-006B-5CAB86AD672E}"/>
               </a:ext>
             </a:extLst>
           </p:cNvPr>
@@ -10042,7 +10042,7 @@
           <p:cNvPr id="12" name="item_2_title">
             <a:extLst>
               <a:ext uri="{FF2B5EF4-FFF2-40B4-BE49-F238E27FC236}">
-                <a16:creationId xmlns:a16="http://schemas.microsoft.com/office/drawing/2014/main" id="{6EE00D1F-F86C-B050-1775-82AC929D885B}"/>
+                <a16:creationId xmlns:a16="http://schemas.microsoft.com/office/drawing/2014/main" id="{5E2A645E-7425-A74B-C98E-ADB0DEE7AF06}"/>
               </a:ext>
             </a:extLst>
           </p:cNvPr>
@@ -10095,7 +10095,7 @@
           <p:cNvPr id="13" name="item_2">
             <a:extLst>
               <a:ext uri="{FF2B5EF4-FFF2-40B4-BE49-F238E27FC236}">
-                <a16:creationId xmlns:a16="http://schemas.microsoft.com/office/drawing/2014/main" id="{72B22263-321C-AC8D-A355-7AFD3A2C8E6C}"/>
+                <a16:creationId xmlns:a16="http://schemas.microsoft.com/office/drawing/2014/main" id="{F7A38D5F-6FD4-A8C4-9949-8DDD059AEF02}"/>
               </a:ext>
             </a:extLst>
           </p:cNvPr>
@@ -10143,7 +10143,7 @@
           <p:cNvPr id="14" name="item_3_title">
             <a:extLst>
               <a:ext uri="{FF2B5EF4-FFF2-40B4-BE49-F238E27FC236}">
-                <a16:creationId xmlns:a16="http://schemas.microsoft.com/office/drawing/2014/main" id="{07ED4051-5847-EEDB-60E9-DFA6F64E9DBA}"/>
+                <a16:creationId xmlns:a16="http://schemas.microsoft.com/office/drawing/2014/main" id="{6237DB45-03DD-217F-E62C-D4F8CFDE63ED}"/>
               </a:ext>
             </a:extLst>
           </p:cNvPr>
@@ -10196,7 +10196,7 @@
           <p:cNvPr id="15" name="item_3">
             <a:extLst>
               <a:ext uri="{FF2B5EF4-FFF2-40B4-BE49-F238E27FC236}">
-                <a16:creationId xmlns:a16="http://schemas.microsoft.com/office/drawing/2014/main" id="{2BD8A056-DF48-ABCC-7D1D-0916D3D3C2A1}"/>
+                <a16:creationId xmlns:a16="http://schemas.microsoft.com/office/drawing/2014/main" id="{1FFE2752-A584-34D2-ACFD-DBE7BC1BBFD2}"/>
               </a:ext>
             </a:extLst>
           </p:cNvPr>
@@ -10244,7 +10244,7 @@
           <p:cNvPr id="16" name="source">
             <a:extLst>
               <a:ext uri="{FF2B5EF4-FFF2-40B4-BE49-F238E27FC236}">
-                <a16:creationId xmlns:a16="http://schemas.microsoft.com/office/drawing/2014/main" id="{8ACF6886-B63E-DA20-5BDE-5A9EEDD8341C}"/>
+                <a16:creationId xmlns:a16="http://schemas.microsoft.com/office/drawing/2014/main" id="{C53A893C-F32B-F3AB-5555-130E47CA2F15}"/>
               </a:ext>
             </a:extLst>
           </p:cNvPr>
@@ -10299,7 +10299,7 @@
     </p:spTree>
     <p:extLst>
       <p:ext uri="{BB962C8B-B14F-4D97-AF65-F5344CB8AC3E}">
-        <p14:creationId xmlns:p14="http://schemas.microsoft.com/office/powerpoint/2010/main" val="3652090918"/>
+        <p14:creationId xmlns:p14="http://schemas.microsoft.com/office/powerpoint/2010/main" val="3739268432"/>
       </p:ext>
     </p:extLst>
   </p:cSld>
@@ -10331,7 +10331,7 @@
           <p:cNvPr id="7" name="creative_background">
             <a:extLst>
               <a:ext uri="{FF2B5EF4-FFF2-40B4-BE49-F238E27FC236}">
-                <a16:creationId xmlns:a16="http://schemas.microsoft.com/office/drawing/2014/main" id="{3517074E-9FE8-379E-3F03-1C2D96159851}"/>
+                <a16:creationId xmlns:a16="http://schemas.microsoft.com/office/drawing/2014/main" id="{299CADBD-0652-7878-3B53-FB77B40452C3}"/>
               </a:ext>
             </a:extLst>
           </p:cNvPr>
@@ -10404,9 +10404,9 @@
           <a:bodyPr/>
           <a:lstStyle/>
           <a:p>
-            <a:fld id="{22B1A858-2238-4D50-A136-D8298B9D7581}" type="datetimeFigureOut">
+            <a:fld id="{17E755F5-25E9-4D58-8061-E75C01E49922}" type="datetimeFigureOut">
               <a:rPr lang="en-US" smtClean="0"/>
-              <a:t>10/3/2026</a:t>
+              <a:t>10/4/2026</a:t>
             </a:fld>
             <a:endParaRPr lang="en-US"/>
           </a:p>
@@ -10446,7 +10446,7 @@
           <a:bodyPr/>
           <a:lstStyle/>
           <a:p>
-            <a:fld id="{6B7AFC5B-9B31-47DE-8C26-4C4AD0A46382}" type="slidenum">
+            <a:fld id="{878B5E31-6775-4496-83E7-82D86CBA16EC}" type="slidenum">
               <a:rPr lang="en-US" smtClean="0"/>
               <a:t>‹#›</a:t>
             </a:fld>
@@ -10459,7 +10459,7 @@
           <p:cNvPr id="8" name="body">
             <a:extLst>
               <a:ext uri="{FF2B5EF4-FFF2-40B4-BE49-F238E27FC236}">
-                <a16:creationId xmlns:a16="http://schemas.microsoft.com/office/drawing/2014/main" id="{67149880-57C8-166F-2B26-EDD9B6D8EC00}"/>
+                <a16:creationId xmlns:a16="http://schemas.microsoft.com/office/drawing/2014/main" id="{88BC38C8-3C84-F955-5B4E-41F3D6BA913C}"/>
               </a:ext>
             </a:extLst>
           </p:cNvPr>
@@ -10499,7 +10499,7 @@
           <p:cNvPr id="9" name="kpi_value_1">
             <a:extLst>
               <a:ext uri="{FF2B5EF4-FFF2-40B4-BE49-F238E27FC236}">
-                <a16:creationId xmlns:a16="http://schemas.microsoft.com/office/drawing/2014/main" id="{6AE0704B-0CAF-16CC-AA91-B776CEC3CF6A}"/>
+                <a16:creationId xmlns:a16="http://schemas.microsoft.com/office/drawing/2014/main" id="{F74210C9-B09C-4F5D-CABB-E0DEEAB0322A}"/>
               </a:ext>
             </a:extLst>
           </p:cNvPr>
@@ -10552,7 +10552,7 @@
           <p:cNvPr id="10" name="kpi_label_1">
             <a:extLst>
               <a:ext uri="{FF2B5EF4-FFF2-40B4-BE49-F238E27FC236}">
-                <a16:creationId xmlns:a16="http://schemas.microsoft.com/office/drawing/2014/main" id="{3F3FCF94-B427-3978-82AB-C140DCD7D92F}"/>
+                <a16:creationId xmlns:a16="http://schemas.microsoft.com/office/drawing/2014/main" id="{C4DC194E-3AE7-C200-634F-A92A25DE4340}"/>
               </a:ext>
             </a:extLst>
           </p:cNvPr>
@@ -10600,7 +10600,7 @@
           <p:cNvPr id="11" name="kpi_value_2">
             <a:extLst>
               <a:ext uri="{FF2B5EF4-FFF2-40B4-BE49-F238E27FC236}">
-                <a16:creationId xmlns:a16="http://schemas.microsoft.com/office/drawing/2014/main" id="{0584A1E5-942A-08BC-2D3C-E0F86D72249F}"/>
+                <a16:creationId xmlns:a16="http://schemas.microsoft.com/office/drawing/2014/main" id="{AF2FE33E-0831-1480-6797-B852727E3581}"/>
               </a:ext>
             </a:extLst>
           </p:cNvPr>
@@ -10653,7 +10653,7 @@
           <p:cNvPr id="12" name="kpi_label_2">
             <a:extLst>
               <a:ext uri="{FF2B5EF4-FFF2-40B4-BE49-F238E27FC236}">
-                <a16:creationId xmlns:a16="http://schemas.microsoft.com/office/drawing/2014/main" id="{000896A7-A820-82FA-47D8-76F7D4C1E2D5}"/>
+                <a16:creationId xmlns:a16="http://schemas.microsoft.com/office/drawing/2014/main" id="{A466867F-6F1B-D4AC-69DF-8D3443835215}"/>
               </a:ext>
             </a:extLst>
           </p:cNvPr>
@@ -10701,7 +10701,7 @@
           <p:cNvPr id="13" name="source">
             <a:extLst>
               <a:ext uri="{FF2B5EF4-FFF2-40B4-BE49-F238E27FC236}">
-                <a16:creationId xmlns:a16="http://schemas.microsoft.com/office/drawing/2014/main" id="{B4FCFE75-8885-1741-22EB-A9D01CE9D736}"/>
+                <a16:creationId xmlns:a16="http://schemas.microsoft.com/office/drawing/2014/main" id="{9595CB4A-66D5-349B-51CC-9625CAFFC388}"/>
               </a:ext>
             </a:extLst>
           </p:cNvPr>
@@ -10756,7 +10756,7 @@
     </p:spTree>
     <p:extLst>
       <p:ext uri="{BB962C8B-B14F-4D97-AF65-F5344CB8AC3E}">
-        <p14:creationId xmlns:p14="http://schemas.microsoft.com/office/powerpoint/2010/main" val="1994588277"/>
+        <p14:creationId xmlns:p14="http://schemas.microsoft.com/office/powerpoint/2010/main" val="3523104524"/>
       </p:ext>
     </p:extLst>
   </p:cSld>
@@ -10788,7 +10788,7 @@
           <p:cNvPr id="7" name="creative_background">
             <a:extLst>
               <a:ext uri="{FF2B5EF4-FFF2-40B4-BE49-F238E27FC236}">
-                <a16:creationId xmlns:a16="http://schemas.microsoft.com/office/drawing/2014/main" id="{28A45FFD-7FC3-31E1-D181-800AA671E520}"/>
+                <a16:creationId xmlns:a16="http://schemas.microsoft.com/office/drawing/2014/main" id="{B0F11FC9-E091-5B9D-6E8D-4603813CAD04}"/>
               </a:ext>
             </a:extLst>
           </p:cNvPr>
@@ -10861,9 +10861,9 @@
           <a:bodyPr/>
           <a:lstStyle/>
           <a:p>
-            <a:fld id="{22B1A858-2238-4D50-A136-D8298B9D7581}" type="datetimeFigureOut">
+            <a:fld id="{17E755F5-25E9-4D58-8061-E75C01E49922}" type="datetimeFigureOut">
               <a:rPr lang="en-US" smtClean="0"/>
-              <a:t>10/3/2026</a:t>
+              <a:t>10/4/2026</a:t>
             </a:fld>
             <a:endParaRPr lang="en-US"/>
           </a:p>
@@ -10903,7 +10903,7 @@
           <a:bodyPr/>
           <a:lstStyle/>
           <a:p>
-            <a:fld id="{6B7AFC5B-9B31-47DE-8C26-4C4AD0A46382}" type="slidenum">
+            <a:fld id="{878B5E31-6775-4496-83E7-82D86CBA16EC}" type="slidenum">
               <a:rPr lang="en-US" smtClean="0"/>
               <a:t>‹#›</a:t>
             </a:fld>
@@ -10916,7 +10916,7 @@
           <p:cNvPr id="8" name="body">
             <a:extLst>
               <a:ext uri="{FF2B5EF4-FFF2-40B4-BE49-F238E27FC236}">
-                <a16:creationId xmlns:a16="http://schemas.microsoft.com/office/drawing/2014/main" id="{62A2FC82-84C9-36C8-0698-5A2136AA61FC}"/>
+                <a16:creationId xmlns:a16="http://schemas.microsoft.com/office/drawing/2014/main" id="{608CD6C3-DEC9-BBA9-C78F-B79DED528B87}"/>
               </a:ext>
             </a:extLst>
           </p:cNvPr>
@@ -10956,7 +10956,7 @@
           <p:cNvPr id="9" name="kpi_value_1">
             <a:extLst>
               <a:ext uri="{FF2B5EF4-FFF2-40B4-BE49-F238E27FC236}">
-                <a16:creationId xmlns:a16="http://schemas.microsoft.com/office/drawing/2014/main" id="{7F832769-D804-2122-F583-EBD4597166A3}"/>
+                <a16:creationId xmlns:a16="http://schemas.microsoft.com/office/drawing/2014/main" id="{F6C1A9DB-C266-04F9-D09B-5349C0002F00}"/>
               </a:ext>
             </a:extLst>
           </p:cNvPr>
@@ -11009,7 +11009,7 @@
           <p:cNvPr id="10" name="kpi_label_1">
             <a:extLst>
               <a:ext uri="{FF2B5EF4-FFF2-40B4-BE49-F238E27FC236}">
-                <a16:creationId xmlns:a16="http://schemas.microsoft.com/office/drawing/2014/main" id="{EABD4D24-C2E9-88E5-3561-07200348D15C}"/>
+                <a16:creationId xmlns:a16="http://schemas.microsoft.com/office/drawing/2014/main" id="{6A3F5C7D-7F14-638A-4C1F-4F3991E2D39E}"/>
               </a:ext>
             </a:extLst>
           </p:cNvPr>
@@ -11057,7 +11057,7 @@
           <p:cNvPr id="11" name="kpi_value_2">
             <a:extLst>
               <a:ext uri="{FF2B5EF4-FFF2-40B4-BE49-F238E27FC236}">
-                <a16:creationId xmlns:a16="http://schemas.microsoft.com/office/drawing/2014/main" id="{FF491BFF-5B43-74E4-2D06-40D545F177A7}"/>
+                <a16:creationId xmlns:a16="http://schemas.microsoft.com/office/drawing/2014/main" id="{45685891-E3A7-7BAA-4665-AAD7B45B0472}"/>
               </a:ext>
             </a:extLst>
           </p:cNvPr>
@@ -11110,7 +11110,7 @@
           <p:cNvPr id="12" name="kpi_label_2">
             <a:extLst>
               <a:ext uri="{FF2B5EF4-FFF2-40B4-BE49-F238E27FC236}">
-                <a16:creationId xmlns:a16="http://schemas.microsoft.com/office/drawing/2014/main" id="{D7993837-2778-F2C6-7A0C-4D004ACBA0BD}"/>
+                <a16:creationId xmlns:a16="http://schemas.microsoft.com/office/drawing/2014/main" id="{8910A5C8-7320-6A2C-20FA-BA95CA61C51A}"/>
               </a:ext>
             </a:extLst>
           </p:cNvPr>
@@ -11158,7 +11158,7 @@
           <p:cNvPr id="13" name="kpi_value_3">
             <a:extLst>
               <a:ext uri="{FF2B5EF4-FFF2-40B4-BE49-F238E27FC236}">
-                <a16:creationId xmlns:a16="http://schemas.microsoft.com/office/drawing/2014/main" id="{88D131DD-3769-D9C9-D420-5B2D3E3936E8}"/>
+                <a16:creationId xmlns:a16="http://schemas.microsoft.com/office/drawing/2014/main" id="{E8DD75E1-F273-5E97-D2C6-45CEC7E9BC46}"/>
               </a:ext>
             </a:extLst>
           </p:cNvPr>
@@ -11211,7 +11211,7 @@
           <p:cNvPr id="14" name="kpi_label_3">
             <a:extLst>
               <a:ext uri="{FF2B5EF4-FFF2-40B4-BE49-F238E27FC236}">
-                <a16:creationId xmlns:a16="http://schemas.microsoft.com/office/drawing/2014/main" id="{8F3EA48A-886E-1821-8404-ED2BE5FA0957}"/>
+                <a16:creationId xmlns:a16="http://schemas.microsoft.com/office/drawing/2014/main" id="{5B5C1EEC-7482-CE78-C606-555DC6826E6D}"/>
               </a:ext>
             </a:extLst>
           </p:cNvPr>
@@ -11259,7 +11259,7 @@
           <p:cNvPr id="15" name="kpi_value_4">
             <a:extLst>
               <a:ext uri="{FF2B5EF4-FFF2-40B4-BE49-F238E27FC236}">
-                <a16:creationId xmlns:a16="http://schemas.microsoft.com/office/drawing/2014/main" id="{CA034875-10DD-A351-5FAC-FE2180ABF9C8}"/>
+                <a16:creationId xmlns:a16="http://schemas.microsoft.com/office/drawing/2014/main" id="{DFBD1293-32DC-4E46-0738-E90CEA96D13C}"/>
               </a:ext>
             </a:extLst>
           </p:cNvPr>
@@ -11312,7 +11312,7 @@
           <p:cNvPr id="16" name="kpi_label_4">
             <a:extLst>
               <a:ext uri="{FF2B5EF4-FFF2-40B4-BE49-F238E27FC236}">
-                <a16:creationId xmlns:a16="http://schemas.microsoft.com/office/drawing/2014/main" id="{2686C83F-6147-8482-3BB8-387317FCD734}"/>
+                <a16:creationId xmlns:a16="http://schemas.microsoft.com/office/drawing/2014/main" id="{9D62891D-B824-D16B-E43B-CDE95CEAD94C}"/>
               </a:ext>
             </a:extLst>
           </p:cNvPr>
@@ -11360,7 +11360,7 @@
           <p:cNvPr id="17" name="source">
             <a:extLst>
               <a:ext uri="{FF2B5EF4-FFF2-40B4-BE49-F238E27FC236}">
-                <a16:creationId xmlns:a16="http://schemas.microsoft.com/office/drawing/2014/main" id="{E1124C41-9EDC-0583-C38E-14B72BE7AEEF}"/>
+                <a16:creationId xmlns:a16="http://schemas.microsoft.com/office/drawing/2014/main" id="{D5AF8011-34FA-5726-C6CB-AD50430434DF}"/>
               </a:ext>
             </a:extLst>
           </p:cNvPr>
@@ -11415,7 +11415,7 @@
     </p:spTree>
     <p:extLst>
       <p:ext uri="{BB962C8B-B14F-4D97-AF65-F5344CB8AC3E}">
-        <p14:creationId xmlns:p14="http://schemas.microsoft.com/office/powerpoint/2010/main" val="2863797342"/>
+        <p14:creationId xmlns:p14="http://schemas.microsoft.com/office/powerpoint/2010/main" val="706162149"/>
       </p:ext>
     </p:extLst>
   </p:cSld>
@@ -11447,7 +11447,7 @@
           <p:cNvPr id="7" name="creative_background">
             <a:extLst>
               <a:ext uri="{FF2B5EF4-FFF2-40B4-BE49-F238E27FC236}">
-                <a16:creationId xmlns:a16="http://schemas.microsoft.com/office/drawing/2014/main" id="{16B8688A-E7AB-43B9-D144-868A928BE227}"/>
+                <a16:creationId xmlns:a16="http://schemas.microsoft.com/office/drawing/2014/main" id="{C3773716-5D95-A1C9-A96D-75A45BE9A545}"/>
               </a:ext>
             </a:extLst>
           </p:cNvPr>
@@ -11520,9 +11520,9 @@
           <a:bodyPr/>
           <a:lstStyle/>
           <a:p>
-            <a:fld id="{22B1A858-2238-4D50-A136-D8298B9D7581}" type="datetimeFigureOut">
+            <a:fld id="{17E755F5-25E9-4D58-8061-E75C01E49922}" type="datetimeFigureOut">
               <a:rPr lang="en-US" smtClean="0"/>
-              <a:t>10/3/2026</a:t>
+              <a:t>10/4/2026</a:t>
             </a:fld>
             <a:endParaRPr lang="en-US"/>
           </a:p>
@@ -11562,7 +11562,7 @@
           <a:bodyPr/>
           <a:lstStyle/>
           <a:p>
-            <a:fld id="{6B7AFC5B-9B31-47DE-8C26-4C4AD0A46382}" type="slidenum">
+            <a:fld id="{878B5E31-6775-4496-83E7-82D86CBA16EC}" type="slidenum">
               <a:rPr lang="en-US" smtClean="0"/>
               <a:t>‹#›</a:t>
             </a:fld>
@@ -11575,7 +11575,7 @@
           <p:cNvPr id="8" name="body">
             <a:extLst>
               <a:ext uri="{FF2B5EF4-FFF2-40B4-BE49-F238E27FC236}">
-                <a16:creationId xmlns:a16="http://schemas.microsoft.com/office/drawing/2014/main" id="{100EAE11-5551-2B03-D1AF-61D9A292B6B7}"/>
+                <a16:creationId xmlns:a16="http://schemas.microsoft.com/office/drawing/2014/main" id="{36D34B1B-B163-BBDA-1AFD-AA260D8DE576}"/>
               </a:ext>
             </a:extLst>
           </p:cNvPr>
@@ -11615,7 +11615,7 @@
           <p:cNvPr id="9" name="quote">
             <a:extLst>
               <a:ext uri="{FF2B5EF4-FFF2-40B4-BE49-F238E27FC236}">
-                <a16:creationId xmlns:a16="http://schemas.microsoft.com/office/drawing/2014/main" id="{F0BB55BF-AFA8-A70C-0A1D-0B89A7AED04D}"/>
+                <a16:creationId xmlns:a16="http://schemas.microsoft.com/office/drawing/2014/main" id="{3F29E916-498A-5809-571F-DADC5A2C8AB8}"/>
               </a:ext>
             </a:extLst>
           </p:cNvPr>
@@ -11665,7 +11665,7 @@
           <p:cNvPr id="10" name="attribution">
             <a:extLst>
               <a:ext uri="{FF2B5EF4-FFF2-40B4-BE49-F238E27FC236}">
-                <a16:creationId xmlns:a16="http://schemas.microsoft.com/office/drawing/2014/main" id="{CA514214-98C6-3B72-FA84-672B6894CD2D}"/>
+                <a16:creationId xmlns:a16="http://schemas.microsoft.com/office/drawing/2014/main" id="{B35935F2-7FA6-9907-6E99-90C710A3047B}"/>
               </a:ext>
             </a:extLst>
           </p:cNvPr>
@@ -11713,7 +11713,7 @@
           <p:cNvPr id="11" name="source">
             <a:extLst>
               <a:ext uri="{FF2B5EF4-FFF2-40B4-BE49-F238E27FC236}">
-                <a16:creationId xmlns:a16="http://schemas.microsoft.com/office/drawing/2014/main" id="{EE707243-341A-E376-BD27-F87F504DFA69}"/>
+                <a16:creationId xmlns:a16="http://schemas.microsoft.com/office/drawing/2014/main" id="{3F84156F-16C8-360C-A32C-4AFB3BB736C4}"/>
               </a:ext>
             </a:extLst>
           </p:cNvPr>
@@ -11768,7 +11768,7 @@
     </p:spTree>
     <p:extLst>
       <p:ext uri="{BB962C8B-B14F-4D97-AF65-F5344CB8AC3E}">
-        <p14:creationId xmlns:p14="http://schemas.microsoft.com/office/powerpoint/2010/main" val="1472326859"/>
+        <p14:creationId xmlns:p14="http://schemas.microsoft.com/office/powerpoint/2010/main" val="3103727054"/>
       </p:ext>
     </p:extLst>
   </p:cSld>
@@ -11800,7 +11800,7 @@
           <p:cNvPr id="7" name="creative_background">
             <a:extLst>
               <a:ext uri="{FF2B5EF4-FFF2-40B4-BE49-F238E27FC236}">
-                <a16:creationId xmlns:a16="http://schemas.microsoft.com/office/drawing/2014/main" id="{880DDD59-E0ED-6D40-F969-64EEF3713F0E}"/>
+                <a16:creationId xmlns:a16="http://schemas.microsoft.com/office/drawing/2014/main" id="{D394ACE5-DE98-255E-2428-F0FE24B05334}"/>
               </a:ext>
             </a:extLst>
           </p:cNvPr>
@@ -11873,9 +11873,9 @@
           <a:bodyPr/>
           <a:lstStyle/>
           <a:p>
-            <a:fld id="{22B1A858-2238-4D50-A136-D8298B9D7581}" type="datetimeFigureOut">
+            <a:fld id="{17E755F5-25E9-4D58-8061-E75C01E49922}" type="datetimeFigureOut">
               <a:rPr lang="en-US" smtClean="0"/>
-              <a:t>10/3/2026</a:t>
+              <a:t>10/4/2026</a:t>
             </a:fld>
             <a:endParaRPr lang="en-US"/>
           </a:p>
@@ -11915,7 +11915,7 @@
           <a:bodyPr/>
           <a:lstStyle/>
           <a:p>
-            <a:fld id="{6B7AFC5B-9B31-47DE-8C26-4C4AD0A46382}" type="slidenum">
+            <a:fld id="{878B5E31-6775-4496-83E7-82D86CBA16EC}" type="slidenum">
               <a:rPr lang="en-US" smtClean="0"/>
               <a:t>‹#›</a:t>
             </a:fld>
@@ -11928,7 +11928,7 @@
           <p:cNvPr id="8" name="item_1_title">
             <a:extLst>
               <a:ext uri="{FF2B5EF4-FFF2-40B4-BE49-F238E27FC236}">
-                <a16:creationId xmlns:a16="http://schemas.microsoft.com/office/drawing/2014/main" id="{206268EB-247B-D2F9-8380-103B36538437}"/>
+                <a16:creationId xmlns:a16="http://schemas.microsoft.com/office/drawing/2014/main" id="{4463E1D8-EEB9-D8ED-7A0F-44B674B47A2E}"/>
               </a:ext>
             </a:extLst>
           </p:cNvPr>
@@ -11978,7 +11978,7 @@
           <p:cNvPr id="9" name="item_1">
             <a:extLst>
               <a:ext uri="{FF2B5EF4-FFF2-40B4-BE49-F238E27FC236}">
-                <a16:creationId xmlns:a16="http://schemas.microsoft.com/office/drawing/2014/main" id="{1428D04E-463C-C2E3-50DA-55DEA4EC9888}"/>
+                <a16:creationId xmlns:a16="http://schemas.microsoft.com/office/drawing/2014/main" id="{34BDF81E-6650-AAD3-6B32-BA698893B0B4}"/>
               </a:ext>
             </a:extLst>
           </p:cNvPr>
@@ -12026,7 +12026,7 @@
           <p:cNvPr id="10" name="item_2_title">
             <a:extLst>
               <a:ext uri="{FF2B5EF4-FFF2-40B4-BE49-F238E27FC236}">
-                <a16:creationId xmlns:a16="http://schemas.microsoft.com/office/drawing/2014/main" id="{A062077E-057E-E964-6EAE-E41E17E3EF1A}"/>
+                <a16:creationId xmlns:a16="http://schemas.microsoft.com/office/drawing/2014/main" id="{30492582-3C4D-D0B9-BE74-768B19F3586D}"/>
               </a:ext>
             </a:extLst>
           </p:cNvPr>
@@ -12079,7 +12079,7 @@
           <p:cNvPr id="11" name="item_2">
             <a:extLst>
               <a:ext uri="{FF2B5EF4-FFF2-40B4-BE49-F238E27FC236}">
-                <a16:creationId xmlns:a16="http://schemas.microsoft.com/office/drawing/2014/main" id="{26DDECCA-76BD-E0DE-7005-9AA47487AC24}"/>
+                <a16:creationId xmlns:a16="http://schemas.microsoft.com/office/drawing/2014/main" id="{B1493A11-705B-BA2E-3254-87B5B57C98DD}"/>
               </a:ext>
             </a:extLst>
           </p:cNvPr>
@@ -12127,7 +12127,7 @@
           <p:cNvPr id="12" name="item_3_title">
             <a:extLst>
               <a:ext uri="{FF2B5EF4-FFF2-40B4-BE49-F238E27FC236}">
-                <a16:creationId xmlns:a16="http://schemas.microsoft.com/office/drawing/2014/main" id="{9B7DD530-8C0B-E044-4A06-BFCA6EE313A0}"/>
+                <a16:creationId xmlns:a16="http://schemas.microsoft.com/office/drawing/2014/main" id="{A02F0913-A02E-A29F-E55B-62EA015A5436}"/>
               </a:ext>
             </a:extLst>
           </p:cNvPr>
@@ -12180,7 +12180,7 @@
           <p:cNvPr id="13" name="item_3">
             <a:extLst>
               <a:ext uri="{FF2B5EF4-FFF2-40B4-BE49-F238E27FC236}">
-                <a16:creationId xmlns:a16="http://schemas.microsoft.com/office/drawing/2014/main" id="{FFE3583D-EB89-6BC8-98FA-5A2003157053}"/>
+                <a16:creationId xmlns:a16="http://schemas.microsoft.com/office/drawing/2014/main" id="{8A190FFA-79AD-6E68-3CAD-B45ECD0E0F74}"/>
               </a:ext>
             </a:extLst>
           </p:cNvPr>
@@ -12228,7 +12228,7 @@
           <p:cNvPr id="14" name="source">
             <a:extLst>
               <a:ext uri="{FF2B5EF4-FFF2-40B4-BE49-F238E27FC236}">
-                <a16:creationId xmlns:a16="http://schemas.microsoft.com/office/drawing/2014/main" id="{ED863A7E-9AA2-6DCB-6A01-AE1EB1D540F2}"/>
+                <a16:creationId xmlns:a16="http://schemas.microsoft.com/office/drawing/2014/main" id="{B9F65D13-A89E-1BB3-4DAB-F5852835A40D}"/>
               </a:ext>
             </a:extLst>
           </p:cNvPr>
@@ -12283,7 +12283,7 @@
     </p:spTree>
     <p:extLst>
       <p:ext uri="{BB962C8B-B14F-4D97-AF65-F5344CB8AC3E}">
-        <p14:creationId xmlns:p14="http://schemas.microsoft.com/office/powerpoint/2010/main" val="79445632"/>
+        <p14:creationId xmlns:p14="http://schemas.microsoft.com/office/powerpoint/2010/main" val="3445763911"/>
       </p:ext>
     </p:extLst>
   </p:cSld>
@@ -12315,7 +12315,7 @@
           <p:cNvPr id="7" name="creative_background">
             <a:extLst>
               <a:ext uri="{FF2B5EF4-FFF2-40B4-BE49-F238E27FC236}">
-                <a16:creationId xmlns:a16="http://schemas.microsoft.com/office/drawing/2014/main" id="{E3158B78-1A4B-0288-5B47-282229C1204C}"/>
+                <a16:creationId xmlns:a16="http://schemas.microsoft.com/office/drawing/2014/main" id="{6EA783D3-4834-1F19-6C30-A97B037169E7}"/>
               </a:ext>
             </a:extLst>
           </p:cNvPr>
@@ -12388,9 +12388,9 @@
           <a:bodyPr/>
           <a:lstStyle/>
           <a:p>
-            <a:fld id="{22B1A858-2238-4D50-A136-D8298B9D7581}" type="datetimeFigureOut">
+            <a:fld id="{17E755F5-25E9-4D58-8061-E75C01E49922}" type="datetimeFigureOut">
               <a:rPr lang="en-US" smtClean="0"/>
-              <a:t>10/3/2026</a:t>
+              <a:t>10/4/2026</a:t>
             </a:fld>
             <a:endParaRPr lang="en-US"/>
           </a:p>
@@ -12430,7 +12430,7 @@
           <a:bodyPr/>
           <a:lstStyle/>
           <a:p>
-            <a:fld id="{6B7AFC5B-9B31-47DE-8C26-4C4AD0A46382}" type="slidenum">
+            <a:fld id="{878B5E31-6775-4496-83E7-82D86CBA16EC}" type="slidenum">
               <a:rPr lang="en-US" smtClean="0"/>
               <a:t>‹#›</a:t>
             </a:fld>
@@ -12443,7 +12443,7 @@
           <p:cNvPr id="8" name="item_1_title">
             <a:extLst>
               <a:ext uri="{FF2B5EF4-FFF2-40B4-BE49-F238E27FC236}">
-                <a16:creationId xmlns:a16="http://schemas.microsoft.com/office/drawing/2014/main" id="{D4CA715D-B210-C80E-F4AC-08C34C31AA0D}"/>
+                <a16:creationId xmlns:a16="http://schemas.microsoft.com/office/drawing/2014/main" id="{D445DBAA-C0CB-C70E-B092-DDE059750309}"/>
               </a:ext>
             </a:extLst>
           </p:cNvPr>
@@ -12493,7 +12493,7 @@
           <p:cNvPr id="9" name="item_1">
             <a:extLst>
               <a:ext uri="{FF2B5EF4-FFF2-40B4-BE49-F238E27FC236}">
-                <a16:creationId xmlns:a16="http://schemas.microsoft.com/office/drawing/2014/main" id="{498CFA12-8805-ED92-2FDD-32146A80F834}"/>
+                <a16:creationId xmlns:a16="http://schemas.microsoft.com/office/drawing/2014/main" id="{DBA7E8A2-505D-C2D2-902C-4D1AD355BC37}"/>
               </a:ext>
             </a:extLst>
           </p:cNvPr>
@@ -12541,7 +12541,7 @@
           <p:cNvPr id="10" name="item_2_title">
             <a:extLst>
               <a:ext uri="{FF2B5EF4-FFF2-40B4-BE49-F238E27FC236}">
-                <a16:creationId xmlns:a16="http://schemas.microsoft.com/office/drawing/2014/main" id="{2E9051D5-04E9-4058-5866-4C25E0DAB837}"/>
+                <a16:creationId xmlns:a16="http://schemas.microsoft.com/office/drawing/2014/main" id="{FE10675C-BA3E-2053-BEBF-3D47B7706850}"/>
               </a:ext>
             </a:extLst>
           </p:cNvPr>
@@ -12594,7 +12594,7 @@
           <p:cNvPr id="11" name="item_2">
             <a:extLst>
               <a:ext uri="{FF2B5EF4-FFF2-40B4-BE49-F238E27FC236}">
-                <a16:creationId xmlns:a16="http://schemas.microsoft.com/office/drawing/2014/main" id="{8346347C-5668-14D8-BB57-160583572C97}"/>
+                <a16:creationId xmlns:a16="http://schemas.microsoft.com/office/drawing/2014/main" id="{5D695DF7-C932-3EB8-264C-9EBEBD3FD800}"/>
               </a:ext>
             </a:extLst>
           </p:cNvPr>
@@ -12642,7 +12642,7 @@
           <p:cNvPr id="12" name="source">
             <a:extLst>
               <a:ext uri="{FF2B5EF4-FFF2-40B4-BE49-F238E27FC236}">
-                <a16:creationId xmlns:a16="http://schemas.microsoft.com/office/drawing/2014/main" id="{3538C4F8-2E43-F2E9-4355-288568703AD7}"/>
+                <a16:creationId xmlns:a16="http://schemas.microsoft.com/office/drawing/2014/main" id="{EE75B39B-35A6-06C5-D554-B726EE3272C0}"/>
               </a:ext>
             </a:extLst>
           </p:cNvPr>
@@ -12697,7 +12697,7 @@
     </p:spTree>
     <p:extLst>
       <p:ext uri="{BB962C8B-B14F-4D97-AF65-F5344CB8AC3E}">
-        <p14:creationId xmlns:p14="http://schemas.microsoft.com/office/powerpoint/2010/main" val="2631215432"/>
+        <p14:creationId xmlns:p14="http://schemas.microsoft.com/office/powerpoint/2010/main" val="1388797986"/>
       </p:ext>
     </p:extLst>
   </p:cSld>
@@ -12729,7 +12729,7 @@
           <p:cNvPr id="7" name="creative_background">
             <a:extLst>
               <a:ext uri="{FF2B5EF4-FFF2-40B4-BE49-F238E27FC236}">
-                <a16:creationId xmlns:a16="http://schemas.microsoft.com/office/drawing/2014/main" id="{3EAA6A14-7D22-575A-6FE9-B6B71601B984}"/>
+                <a16:creationId xmlns:a16="http://schemas.microsoft.com/office/drawing/2014/main" id="{44781A4E-2B5D-805F-27D0-E9C59EF750BC}"/>
               </a:ext>
             </a:extLst>
           </p:cNvPr>
@@ -12802,9 +12802,9 @@
           <a:bodyPr/>
           <a:lstStyle/>
           <a:p>
-            <a:fld id="{22B1A858-2238-4D50-A136-D8298B9D7581}" type="datetimeFigureOut">
+            <a:fld id="{17E755F5-25E9-4D58-8061-E75C01E49922}" type="datetimeFigureOut">
               <a:rPr lang="en-US" smtClean="0"/>
-              <a:t>10/3/2026</a:t>
+              <a:t>10/4/2026</a:t>
             </a:fld>
             <a:endParaRPr lang="en-US"/>
           </a:p>
@@ -12844,7 +12844,7 @@
           <a:bodyPr/>
           <a:lstStyle/>
           <a:p>
-            <a:fld id="{6B7AFC5B-9B31-47DE-8C26-4C4AD0A46382}" type="slidenum">
+            <a:fld id="{878B5E31-6775-4496-83E7-82D86CBA16EC}" type="slidenum">
               <a:rPr lang="en-US" smtClean="0"/>
               <a:t>‹#›</a:t>
             </a:fld>
@@ -12857,7 +12857,7 @@
           <p:cNvPr id="8" name="chart">
             <a:extLst>
               <a:ext uri="{FF2B5EF4-FFF2-40B4-BE49-F238E27FC236}">
-                <a16:creationId xmlns:a16="http://schemas.microsoft.com/office/drawing/2014/main" id="{1D99954A-DE13-8749-B049-7A32DB8C9655}"/>
+                <a16:creationId xmlns:a16="http://schemas.microsoft.com/office/drawing/2014/main" id="{78E20101-8832-E40B-40C3-B38129F456DA}"/>
               </a:ext>
             </a:extLst>
           </p:cNvPr>
@@ -12887,7 +12887,7 @@
           <p:cNvPr id="9" name="body">
             <a:extLst>
               <a:ext uri="{FF2B5EF4-FFF2-40B4-BE49-F238E27FC236}">
-                <a16:creationId xmlns:a16="http://schemas.microsoft.com/office/drawing/2014/main" id="{FF8EE5EF-DF9B-4503-4BCF-48C20DF9AA54}"/>
+                <a16:creationId xmlns:a16="http://schemas.microsoft.com/office/drawing/2014/main" id="{3959765C-D6B7-96F3-A547-9639E07E5C28}"/>
               </a:ext>
             </a:extLst>
           </p:cNvPr>
@@ -12930,7 +12930,7 @@
           <p:cNvPr id="10" name="source">
             <a:extLst>
               <a:ext uri="{FF2B5EF4-FFF2-40B4-BE49-F238E27FC236}">
-                <a16:creationId xmlns:a16="http://schemas.microsoft.com/office/drawing/2014/main" id="{78798F6A-B2BB-C532-D280-B374BFEC2917}"/>
+                <a16:creationId xmlns:a16="http://schemas.microsoft.com/office/drawing/2014/main" id="{B87C2D8C-4A42-2BC6-B54A-EC4BE2FC8D1F}"/>
               </a:ext>
             </a:extLst>
           </p:cNvPr>
@@ -12985,7 +12985,7 @@
     </p:spTree>
     <p:extLst>
       <p:ext uri="{BB962C8B-B14F-4D97-AF65-F5344CB8AC3E}">
-        <p14:creationId xmlns:p14="http://schemas.microsoft.com/office/powerpoint/2010/main" val="3610868350"/>
+        <p14:creationId xmlns:p14="http://schemas.microsoft.com/office/powerpoint/2010/main" val="207693468"/>
       </p:ext>
     </p:extLst>
   </p:cSld>
@@ -13017,7 +13017,7 @@
           <p:cNvPr id="7" name="creative_background">
             <a:extLst>
               <a:ext uri="{FF2B5EF4-FFF2-40B4-BE49-F238E27FC236}">
-                <a16:creationId xmlns:a16="http://schemas.microsoft.com/office/drawing/2014/main" id="{2E3ED189-9AC9-3E39-A27C-931584A1B412}"/>
+                <a16:creationId xmlns:a16="http://schemas.microsoft.com/office/drawing/2014/main" id="{ADF5D02F-8EBB-DFF5-6AF7-ED97D884DE7E}"/>
               </a:ext>
             </a:extLst>
           </p:cNvPr>
@@ -13090,9 +13090,9 @@
           <a:bodyPr/>
           <a:lstStyle/>
           <a:p>
-            <a:fld id="{22B1A858-2238-4D50-A136-D8298B9D7581}" type="datetimeFigureOut">
+            <a:fld id="{17E755F5-25E9-4D58-8061-E75C01E49922}" type="datetimeFigureOut">
               <a:rPr lang="en-US" smtClean="0"/>
-              <a:t>10/3/2026</a:t>
+              <a:t>10/4/2026</a:t>
             </a:fld>
             <a:endParaRPr lang="en-US"/>
           </a:p>
@@ -13132,7 +13132,7 @@
           <a:bodyPr/>
           <a:lstStyle/>
           <a:p>
-            <a:fld id="{6B7AFC5B-9B31-47DE-8C26-4C4AD0A46382}" type="slidenum">
+            <a:fld id="{878B5E31-6775-4496-83E7-82D86CBA16EC}" type="slidenum">
               <a:rPr lang="en-US" smtClean="0"/>
               <a:t>‹#›</a:t>
             </a:fld>
@@ -13145,7 +13145,7 @@
           <p:cNvPr id="8" name="item_1_title">
             <a:extLst>
               <a:ext uri="{FF2B5EF4-FFF2-40B4-BE49-F238E27FC236}">
-                <a16:creationId xmlns:a16="http://schemas.microsoft.com/office/drawing/2014/main" id="{0A9D7B1F-70C9-72F5-094D-30BA96FEDFDB}"/>
+                <a16:creationId xmlns:a16="http://schemas.microsoft.com/office/drawing/2014/main" id="{4BB898C1-0224-E8E8-2642-D33B3242B22B}"/>
               </a:ext>
             </a:extLst>
           </p:cNvPr>
@@ -13195,7 +13195,7 @@
           <p:cNvPr id="9" name="item_1">
             <a:extLst>
               <a:ext uri="{FF2B5EF4-FFF2-40B4-BE49-F238E27FC236}">
-                <a16:creationId xmlns:a16="http://schemas.microsoft.com/office/drawing/2014/main" id="{43BD8F85-949A-5A85-5106-08AE7BAC49C2}"/>
+                <a16:creationId xmlns:a16="http://schemas.microsoft.com/office/drawing/2014/main" id="{0022F5F0-AA42-CB85-FA7B-A0087092B100}"/>
               </a:ext>
             </a:extLst>
           </p:cNvPr>
@@ -13243,7 +13243,7 @@
           <p:cNvPr id="10" name="item_2_title">
             <a:extLst>
               <a:ext uri="{FF2B5EF4-FFF2-40B4-BE49-F238E27FC236}">
-                <a16:creationId xmlns:a16="http://schemas.microsoft.com/office/drawing/2014/main" id="{333AF435-24CD-00D5-0DE5-CB38C28B0B39}"/>
+                <a16:creationId xmlns:a16="http://schemas.microsoft.com/office/drawing/2014/main" id="{B9F1288A-8991-1068-1673-531678D844A2}"/>
               </a:ext>
             </a:extLst>
           </p:cNvPr>
@@ -13296,7 +13296,7 @@
           <p:cNvPr id="11" name="item_2">
             <a:extLst>
               <a:ext uri="{FF2B5EF4-FFF2-40B4-BE49-F238E27FC236}">
-                <a16:creationId xmlns:a16="http://schemas.microsoft.com/office/drawing/2014/main" id="{9EECE6C4-8D40-A03D-E624-7EEFEE8D33D9}"/>
+                <a16:creationId xmlns:a16="http://schemas.microsoft.com/office/drawing/2014/main" id="{4DB7DA80-B951-EB37-FC5A-87DF4FA1AFBC}"/>
               </a:ext>
             </a:extLst>
           </p:cNvPr>
@@ -13344,7 +13344,7 @@
           <p:cNvPr id="12" name="item_3_title">
             <a:extLst>
               <a:ext uri="{FF2B5EF4-FFF2-40B4-BE49-F238E27FC236}">
-                <a16:creationId xmlns:a16="http://schemas.microsoft.com/office/drawing/2014/main" id="{CE6D3A95-BE28-E8F9-F6BF-6528085D90E5}"/>
+                <a16:creationId xmlns:a16="http://schemas.microsoft.com/office/drawing/2014/main" id="{BC91D313-548D-35A2-6CA2-36217A6C3CB7}"/>
               </a:ext>
             </a:extLst>
           </p:cNvPr>
@@ -13397,7 +13397,7 @@
           <p:cNvPr id="13" name="item_3">
             <a:extLst>
               <a:ext uri="{FF2B5EF4-FFF2-40B4-BE49-F238E27FC236}">
-                <a16:creationId xmlns:a16="http://schemas.microsoft.com/office/drawing/2014/main" id="{93A1A8D4-2BDE-0EB6-E1D3-FCFA0A708ED7}"/>
+                <a16:creationId xmlns:a16="http://schemas.microsoft.com/office/drawing/2014/main" id="{2B299396-0E5A-4507-337B-9DB5785C5BC3}"/>
               </a:ext>
             </a:extLst>
           </p:cNvPr>
@@ -13445,7 +13445,7 @@
           <p:cNvPr id="14" name="item_4_title">
             <a:extLst>
               <a:ext uri="{FF2B5EF4-FFF2-40B4-BE49-F238E27FC236}">
-                <a16:creationId xmlns:a16="http://schemas.microsoft.com/office/drawing/2014/main" id="{D6A73622-80DD-F102-FC18-5F99C14AB834}"/>
+                <a16:creationId xmlns:a16="http://schemas.microsoft.com/office/drawing/2014/main" id="{C41065B1-C513-B25A-741D-1E662C7839CA}"/>
               </a:ext>
             </a:extLst>
           </p:cNvPr>
@@ -13498,7 +13498,7 @@
           <p:cNvPr id="15" name="item_4">
             <a:extLst>
               <a:ext uri="{FF2B5EF4-FFF2-40B4-BE49-F238E27FC236}">
-                <a16:creationId xmlns:a16="http://schemas.microsoft.com/office/drawing/2014/main" id="{B25A799E-6772-59F2-2002-AEC96B815E5F}"/>
+                <a16:creationId xmlns:a16="http://schemas.microsoft.com/office/drawing/2014/main" id="{84159B0E-9421-AAE3-37F4-3CDF82D68785}"/>
               </a:ext>
             </a:extLst>
           </p:cNvPr>
@@ -13546,7 +13546,7 @@
           <p:cNvPr id="16" name="source">
             <a:extLst>
               <a:ext uri="{FF2B5EF4-FFF2-40B4-BE49-F238E27FC236}">
-                <a16:creationId xmlns:a16="http://schemas.microsoft.com/office/drawing/2014/main" id="{1DEB1B2D-3B81-CE02-3C34-59B8D94C9002}"/>
+                <a16:creationId xmlns:a16="http://schemas.microsoft.com/office/drawing/2014/main" id="{E7057DB4-E552-6F51-EEC7-A554B4EFB47D}"/>
               </a:ext>
             </a:extLst>
           </p:cNvPr>
@@ -13601,7 +13601,7 @@
     </p:spTree>
     <p:extLst>
       <p:ext uri="{BB962C8B-B14F-4D97-AF65-F5344CB8AC3E}">
-        <p14:creationId xmlns:p14="http://schemas.microsoft.com/office/powerpoint/2010/main" val="1430506310"/>
+        <p14:creationId xmlns:p14="http://schemas.microsoft.com/office/powerpoint/2010/main" val="2570365432"/>
       </p:ext>
     </p:extLst>
   </p:cSld>
@@ -13638,7 +13638,7 @@
           <p:cNvPr id="9" name="creative_background_master">
             <a:extLst>
               <a:ext uri="{FF2B5EF4-FFF2-40B4-BE49-F238E27FC236}">
-                <a16:creationId xmlns:a16="http://schemas.microsoft.com/office/drawing/2014/main" id="{0545D690-5AA7-D8A3-5EBF-2AF0E3A50385}"/>
+                <a16:creationId xmlns:a16="http://schemas.microsoft.com/office/drawing/2014/main" id="{84D13723-2B5D-2B98-6E45-597D8D5A14C5}"/>
               </a:ext>
             </a:extLst>
           </p:cNvPr>
@@ -13799,9 +13799,9 @@
             </a:lvl1pPr>
           </a:lstStyle>
           <a:p>
-            <a:fld id="{22B1A858-2238-4D50-A136-D8298B9D7581}" type="datetimeFigureOut">
+            <a:fld id="{17E755F5-25E9-4D58-8061-E75C01E49922}" type="datetimeFigureOut">
               <a:rPr lang="en-US" smtClean="0"/>
-              <a:t>10/3/2026</a:t>
+              <a:t>10/4/2026</a:t>
             </a:fld>
             <a:endParaRPr lang="en-US"/>
           </a:p>
@@ -13881,7 +13881,7 @@
             </a:lvl1pPr>
           </a:lstStyle>
           <a:p>
-            <a:fld id="{6B7AFC5B-9B31-47DE-8C26-4C4AD0A46382}" type="slidenum">
+            <a:fld id="{878B5E31-6775-4496-83E7-82D86CBA16EC}" type="slidenum">
               <a:rPr lang="en-US" smtClean="0"/>
               <a:t>‹#›</a:t>
             </a:fld>
@@ -13892,7 +13892,7 @@
     </p:spTree>
     <p:extLst>
       <p:ext uri="{BB962C8B-B14F-4D97-AF65-F5344CB8AC3E}">
-        <p14:creationId xmlns:p14="http://schemas.microsoft.com/office/powerpoint/2010/main" val="2190563019"/>
+        <p14:creationId xmlns:p14="http://schemas.microsoft.com/office/powerpoint/2010/main" val="2080101412"/>
       </p:ext>
     </p:extLst>
   </p:cSld>
@@ -14273,13 +14273,13 @@
   <a:themeElements>
     <a:clrScheme name="Integral">
       <a:dk1>
-        <a:srgbClr val="298F9C"/>
+        <a:srgbClr val="72D0DE"/>
       </a:dk1>
       <a:lt1>
         <a:srgbClr val="050809"/>
       </a:lt1>
       <a:dk2>
-        <a:srgbClr val="97A8AB"/>
+        <a:srgbClr val="B3C5C8"/>
       </a:dk2>
       <a:lt2>
         <a:srgbClr val="141618"/>
@@ -14291,22 +14291,22 @@
         <a:srgbClr val="D9A441"/>
       </a:accent2>
       <a:accent3>
-        <a:srgbClr val="97A8AB"/>
+        <a:srgbClr val="B3C5C8"/>
       </a:accent3>
       <a:accent4>
-        <a:srgbClr val="188592"/>
+        <a:srgbClr val="57B6C4"/>
       </a:accent4>
       <a:accent5>
         <a:srgbClr val="D9A441"/>
       </a:accent5>
       <a:accent6>
-        <a:srgbClr val="97A8AB"/>
+        <a:srgbClr val="B3C5C8"/>
       </a:accent6>
       <a:hlink>
-        <a:srgbClr val="188592"/>
+        <a:srgbClr val="57B6C4"/>
       </a:hlink>
       <a:folHlink>
-        <a:srgbClr val="97A8AB"/>
+        <a:srgbClr val="B3C5C8"/>
       </a:folHlink>
     </a:clrScheme>
     <a:fontScheme name="Integral">
